--- a/a7/build/out/u3/A7 3.05  Slides.pptx
+++ b/a7/build/out/u3/A7 3.05  Slides.pptx
@@ -38,6 +38,7 @@
     <p:sldId id="286" r:id="rId37"/>
     <p:sldId id="287" r:id="rId38"/>
     <p:sldId id="288" r:id="rId39"/>
+    <p:sldId id="289" r:id="rId40"/>
   </p:sldIdLst>
   <p:sldSz cx="12191969" cy="6858000" type="screen4x3"/>
   <p:notesSz cx="6858000" cy="9144000"/>
@@ -5646,9 +5647,44 @@
           </a:p>
         </p:txBody>
       </p:sp>
+      <p:sp>
+        <p:nvSpPr>
+          <p:cNvPr id="9" name="TextBox 8"/>
+          <p:cNvSpPr txBox="1"/>
+          <p:nvPr/>
+        </p:nvSpPr>
+        <p:spPr>
+          <a:xfrm>
+            <a:off x="2485643" y="2223516"/>
+            <a:ext cx="6219952" cy="457200"/>
+          </a:xfrm>
+          <a:prstGeom prst="rect">
+            <a:avLst/>
+          </a:prstGeom>
+          <a:noFill/>
+        </p:spPr>
+        <p:txBody>
+          <a:bodyPr wrap="none" lIns="45720" rIns="45720" tIns="18288" bIns="18288" anchor="ctr">
+            <a:spAutoFit/>
+          </a:bodyPr>
+          <a:lstStyle/>
+          <a:p>
+            <a:pPr algn="l"/>
+            <a:r>
+              <a:rPr sz="2600" b="0" i="0">
+                <a:solidFill>
+                  <a:srgbClr val="1A1A1A"/>
+                </a:solidFill>
+                <a:latin typeface="Century Schoolbook"/>
+              </a:rPr>
+              <a:t>A recipe is scaled by a factor of  </a:t>
+            </a:r>
+          </a:p>
+        </p:txBody>
+      </p:sp>
       <p:pic>
         <p:nvPicPr>
-          <p:cNvPr id="9" name="Picture 8" descr="9b859d649e66baa6.png"/>
+          <p:cNvPr id="10" name="Picture 9" descr="74f8723956196338.png"/>
           <p:cNvPicPr>
             <a:picLocks noChangeAspect="1"/>
           </p:cNvPicPr>
@@ -5662,8 +5698,8 @@
         </p:blipFill>
         <p:spPr>
           <a:xfrm>
-            <a:off x="5541264" y="2194560"/>
-            <a:ext cx="1078992" cy="649224"/>
+            <a:off x="8568436" y="2194560"/>
+            <a:ext cx="862584" cy="515112"/>
           </a:xfrm>
           <a:prstGeom prst="rect">
             <a:avLst/>
@@ -5672,7 +5708,112 @@
       </p:pic>
       <p:sp>
         <p:nvSpPr>
-          <p:cNvPr id="10" name="TextBox 9"/>
+          <p:cNvPr id="11" name="TextBox 10"/>
+          <p:cNvSpPr txBox="1"/>
+          <p:nvPr/>
+        </p:nvSpPr>
+        <p:spPr>
+          <a:xfrm>
+            <a:off x="9431020" y="2223516"/>
+            <a:ext cx="382016" cy="457200"/>
+          </a:xfrm>
+          <a:prstGeom prst="rect">
+            <a:avLst/>
+          </a:prstGeom>
+          <a:noFill/>
+        </p:spPr>
+        <p:txBody>
+          <a:bodyPr wrap="none" lIns="45720" rIns="45720" tIns="18288" bIns="18288" anchor="ctr">
+            <a:spAutoFit/>
+          </a:bodyPr>
+          <a:lstStyle/>
+          <a:p>
+            <a:pPr algn="l"/>
+            <a:r>
+              <a:rPr sz="2600" b="0" i="0">
+                <a:solidFill>
+                  <a:srgbClr val="1A1A1A"/>
+                </a:solidFill>
+                <a:latin typeface="Century Schoolbook"/>
+              </a:rPr>
+              <a:t>.</a:t>
+            </a:r>
+          </a:p>
+        </p:txBody>
+      </p:sp>
+      <p:sp>
+        <p:nvSpPr>
+          <p:cNvPr id="12" name="TextBox 11"/>
+          <p:cNvSpPr txBox="1"/>
+          <p:nvPr/>
+        </p:nvSpPr>
+        <p:spPr>
+          <a:xfrm>
+            <a:off x="777240" y="2983992"/>
+            <a:ext cx="10607040" cy="465151"/>
+          </a:xfrm>
+          <a:prstGeom prst="rect">
+            <a:avLst/>
+          </a:prstGeom>
+          <a:noFill/>
+        </p:spPr>
+        <p:txBody>
+          <a:bodyPr wrap="square" lIns="45720" rIns="45720" tIns="18288" bIns="18288" anchor="t">
+            <a:spAutoFit/>
+          </a:bodyPr>
+          <a:lstStyle/>
+          <a:p>
+            <a:pPr algn="ctr"/>
+            <a:r>
+              <a:rPr sz="2600" b="0" i="0">
+                <a:solidFill>
+                  <a:srgbClr val="1A1A1A"/>
+                </a:solidFill>
+                <a:latin typeface="Century Schoolbook"/>
+              </a:rPr>
+              <a:t>The original recipe serves 6 people.</a:t>
+            </a:r>
+          </a:p>
+        </p:txBody>
+      </p:sp>
+      <p:sp>
+        <p:nvSpPr>
+          <p:cNvPr id="13" name="TextBox 12"/>
+          <p:cNvSpPr txBox="1"/>
+          <p:nvPr/>
+        </p:nvSpPr>
+        <p:spPr>
+          <a:xfrm>
+            <a:off x="777240" y="3558871"/>
+            <a:ext cx="10607040" cy="465151"/>
+          </a:xfrm>
+          <a:prstGeom prst="rect">
+            <a:avLst/>
+          </a:prstGeom>
+          <a:noFill/>
+        </p:spPr>
+        <p:txBody>
+          <a:bodyPr wrap="square" lIns="45720" rIns="45720" tIns="18288" bIns="18288" anchor="t">
+            <a:spAutoFit/>
+          </a:bodyPr>
+          <a:lstStyle/>
+          <a:p>
+            <a:pPr algn="ctr"/>
+            <a:r>
+              <a:rPr sz="2600" b="0" i="0">
+                <a:solidFill>
+                  <a:srgbClr val="1A1A1A"/>
+                </a:solidFill>
+                <a:latin typeface="Century Schoolbook"/>
+              </a:rPr>
+              <a:t>Rewrite the factor with a positive exponent.</a:t>
+            </a:r>
+          </a:p>
+        </p:txBody>
+      </p:sp>
+      <p:sp>
+        <p:nvSpPr>
+          <p:cNvPr id="14" name="TextBox 13"/>
           <p:cNvSpPr txBox="1"/>
           <p:nvPr/>
         </p:nvSpPr>
@@ -5707,7 +5848,7 @@
       </p:sp>
       <p:sp>
         <p:nvSpPr>
-          <p:cNvPr id="11" name="TextBox 10"/>
+          <p:cNvPr id="15" name="TextBox 14"/>
           <p:cNvSpPr txBox="1"/>
           <p:nvPr/>
         </p:nvSpPr>
@@ -6003,9 +6144,44 @@
           </a:p>
         </p:txBody>
       </p:sp>
+      <p:sp>
+        <p:nvSpPr>
+          <p:cNvPr id="9" name="TextBox 8"/>
+          <p:cNvSpPr txBox="1"/>
+          <p:nvPr/>
+        </p:nvSpPr>
+        <p:spPr>
+          <a:xfrm>
+            <a:off x="2485643" y="2132076"/>
+            <a:ext cx="6219952" cy="457200"/>
+          </a:xfrm>
+          <a:prstGeom prst="rect">
+            <a:avLst/>
+          </a:prstGeom>
+          <a:noFill/>
+        </p:spPr>
+        <p:txBody>
+          <a:bodyPr wrap="none" lIns="45720" rIns="45720" tIns="18288" bIns="18288" anchor="ctr">
+            <a:spAutoFit/>
+          </a:bodyPr>
+          <a:lstStyle/>
+          <a:p>
+            <a:pPr algn="l"/>
+            <a:r>
+              <a:rPr sz="2600" b="0" i="0">
+                <a:solidFill>
+                  <a:srgbClr val="1A1A1A"/>
+                </a:solidFill>
+                <a:latin typeface="Century Schoolbook"/>
+              </a:rPr>
+              <a:t>A recipe is scaled by a factor of  </a:t>
+            </a:r>
+          </a:p>
+        </p:txBody>
+      </p:sp>
       <p:pic>
         <p:nvPicPr>
-          <p:cNvPr id="9" name="Picture 8" descr="9b859d649e66baa6.png"/>
+          <p:cNvPr id="10" name="Picture 9" descr="74f8723956196338.png"/>
           <p:cNvPicPr>
             <a:picLocks noChangeAspect="1"/>
           </p:cNvPicPr>
@@ -6019,8 +6195,8 @@
         </p:blipFill>
         <p:spPr>
           <a:xfrm>
-            <a:off x="5541264" y="2103120"/>
-            <a:ext cx="1078992" cy="649224"/>
+            <a:off x="8568436" y="2103120"/>
+            <a:ext cx="862584" cy="515112"/>
           </a:xfrm>
           <a:prstGeom prst="rect">
             <a:avLst/>
@@ -6029,13 +6205,118 @@
       </p:pic>
       <p:sp>
         <p:nvSpPr>
-          <p:cNvPr id="10" name="TextBox 9"/>
-          <p:cNvSpPr txBox="1"/>
-          <p:nvPr/>
-        </p:nvSpPr>
-        <p:spPr>
-          <a:xfrm>
-            <a:off x="1828800" y="3026663"/>
+          <p:cNvPr id="11" name="TextBox 10"/>
+          <p:cNvSpPr txBox="1"/>
+          <p:nvPr/>
+        </p:nvSpPr>
+        <p:spPr>
+          <a:xfrm>
+            <a:off x="9431020" y="2132076"/>
+            <a:ext cx="382016" cy="457200"/>
+          </a:xfrm>
+          <a:prstGeom prst="rect">
+            <a:avLst/>
+          </a:prstGeom>
+          <a:noFill/>
+        </p:spPr>
+        <p:txBody>
+          <a:bodyPr wrap="none" lIns="45720" rIns="45720" tIns="18288" bIns="18288" anchor="ctr">
+            <a:spAutoFit/>
+          </a:bodyPr>
+          <a:lstStyle/>
+          <a:p>
+            <a:pPr algn="l"/>
+            <a:r>
+              <a:rPr sz="2600" b="0" i="0">
+                <a:solidFill>
+                  <a:srgbClr val="1A1A1A"/>
+                </a:solidFill>
+                <a:latin typeface="Century Schoolbook"/>
+              </a:rPr>
+              <a:t>.</a:t>
+            </a:r>
+          </a:p>
+        </p:txBody>
+      </p:sp>
+      <p:sp>
+        <p:nvSpPr>
+          <p:cNvPr id="12" name="TextBox 11"/>
+          <p:cNvSpPr txBox="1"/>
+          <p:nvPr/>
+        </p:nvSpPr>
+        <p:spPr>
+          <a:xfrm>
+            <a:off x="777240" y="2892552"/>
+            <a:ext cx="10607040" cy="465151"/>
+          </a:xfrm>
+          <a:prstGeom prst="rect">
+            <a:avLst/>
+          </a:prstGeom>
+          <a:noFill/>
+        </p:spPr>
+        <p:txBody>
+          <a:bodyPr wrap="square" lIns="45720" rIns="45720" tIns="18288" bIns="18288" anchor="t">
+            <a:spAutoFit/>
+          </a:bodyPr>
+          <a:lstStyle/>
+          <a:p>
+            <a:pPr algn="ctr"/>
+            <a:r>
+              <a:rPr sz="2600" b="0" i="0">
+                <a:solidFill>
+                  <a:srgbClr val="1A1A1A"/>
+                </a:solidFill>
+                <a:latin typeface="Century Schoolbook"/>
+              </a:rPr>
+              <a:t>The original recipe serves 6 people.</a:t>
+            </a:r>
+          </a:p>
+        </p:txBody>
+      </p:sp>
+      <p:sp>
+        <p:nvSpPr>
+          <p:cNvPr id="13" name="TextBox 12"/>
+          <p:cNvSpPr txBox="1"/>
+          <p:nvPr/>
+        </p:nvSpPr>
+        <p:spPr>
+          <a:xfrm>
+            <a:off x="777240" y="3467431"/>
+            <a:ext cx="10607040" cy="465151"/>
+          </a:xfrm>
+          <a:prstGeom prst="rect">
+            <a:avLst/>
+          </a:prstGeom>
+          <a:noFill/>
+        </p:spPr>
+        <p:txBody>
+          <a:bodyPr wrap="square" lIns="45720" rIns="45720" tIns="18288" bIns="18288" anchor="t">
+            <a:spAutoFit/>
+          </a:bodyPr>
+          <a:lstStyle/>
+          <a:p>
+            <a:pPr algn="ctr"/>
+            <a:r>
+              <a:rPr sz="2600" b="0" i="0">
+                <a:solidFill>
+                  <a:srgbClr val="1A1A1A"/>
+                </a:solidFill>
+                <a:latin typeface="Century Schoolbook"/>
+              </a:rPr>
+              <a:t>Rewrite the factor with a positive exponent.</a:t>
+            </a:r>
+          </a:p>
+        </p:txBody>
+      </p:sp>
+      <p:sp>
+        <p:nvSpPr>
+          <p:cNvPr id="14" name="TextBox 13"/>
+          <p:cNvSpPr txBox="1"/>
+          <p:nvPr/>
+        </p:nvSpPr>
+        <p:spPr>
+          <a:xfrm>
+            <a:off x="1828800" y="4088030"/>
             <a:ext cx="8503920" cy="548640"/>
           </a:xfrm>
           <a:prstGeom prst="rect">
@@ -6064,13 +6345,13 @@
       </p:sp>
       <p:sp>
         <p:nvSpPr>
-          <p:cNvPr id="11" name="TextBox 10"/>
-          <p:cNvSpPr txBox="1"/>
-          <p:nvPr/>
-        </p:nvSpPr>
-        <p:spPr>
-          <a:xfrm>
-            <a:off x="4703063" y="4710684"/>
+          <p:cNvPr id="15" name="TextBox 14"/>
+          <p:cNvSpPr txBox="1"/>
+          <p:nvPr/>
+        </p:nvSpPr>
+        <p:spPr>
+          <a:xfrm>
+            <a:off x="4703063" y="4866794"/>
             <a:ext cx="1920240" cy="548640"/>
           </a:xfrm>
           <a:prstGeom prst="rect">
@@ -6099,7 +6380,7 @@
       </p:sp>
       <p:pic>
         <p:nvPicPr>
-          <p:cNvPr id="12" name="Picture 11" descr="733bcc72d86bfa25.png"/>
+          <p:cNvPr id="16" name="Picture 15" descr="733bcc72d86bfa25.png"/>
           <p:cNvPicPr>
             <a:picLocks noChangeAspect="1"/>
           </p:cNvPicPr>
@@ -6113,7 +6394,7 @@
         </p:blipFill>
         <p:spPr>
           <a:xfrm>
-            <a:off x="6623303" y="4663440"/>
+            <a:off x="6623303" y="4819550"/>
             <a:ext cx="835152" cy="643128"/>
           </a:xfrm>
           <a:prstGeom prst="rect">
@@ -14550,7 +14831,7 @@
                 </a:solidFill>
                 <a:latin typeface="Century Schoolbook"/>
               </a:rPr>
-              <a:t>IXL</a:t>
+              <a:t>Independent Set</a:t>
             </a:r>
           </a:p>
         </p:txBody>
@@ -14655,7 +14936,7 @@
                 </a:solidFill>
                 <a:latin typeface="Century Schoolbook"/>
               </a:rPr>
-              <a:t>Last five minutes.</a:t>
+              <a:t>Six questions. On your own, in silence.</a:t>
             </a:r>
           </a:p>
         </p:txBody>
@@ -14773,6 +15054,479 @@
         </p:nvSpPr>
         <p:spPr>
           <a:xfrm>
+            <a:off x="960120" y="2011680"/>
+            <a:ext cx="548640" cy="356616"/>
+          </a:xfrm>
+          <a:prstGeom prst="rect">
+            <a:avLst/>
+          </a:prstGeom>
+          <a:noFill/>
+        </p:spPr>
+        <p:txBody>
+          <a:bodyPr wrap="square" lIns="45720" rIns="45720" tIns="18288" bIns="18288" anchor="t">
+            <a:spAutoFit/>
+          </a:bodyPr>
+          <a:lstStyle/>
+          <a:p>
+            <a:pPr algn="l"/>
+            <a:r>
+              <a:rPr sz="2100" b="1" i="0">
+                <a:solidFill>
+                  <a:srgbClr val="0B5394"/>
+                </a:solidFill>
+                <a:latin typeface="Century Schoolbook"/>
+              </a:rPr>
+              <a:t>1.</a:t>
+            </a:r>
+          </a:p>
+        </p:txBody>
+      </p:sp>
+      <p:sp>
+        <p:nvSpPr>
+          <p:cNvPr id="10" name="TextBox 9"/>
+          <p:cNvSpPr txBox="1"/>
+          <p:nvPr/>
+        </p:nvSpPr>
+        <p:spPr>
+          <a:xfrm>
+            <a:off x="1554480" y="2011680"/>
+            <a:ext cx="9829800" cy="411480"/>
+          </a:xfrm>
+          <a:prstGeom prst="rect">
+            <a:avLst/>
+          </a:prstGeom>
+          <a:noFill/>
+        </p:spPr>
+        <p:txBody>
+          <a:bodyPr wrap="square" lIns="45720" rIns="45720" tIns="18288" bIns="18288" anchor="t">
+            <a:spAutoFit/>
+          </a:bodyPr>
+          <a:lstStyle/>
+          <a:p>
+            <a:pPr algn="l"/>
+            <a:r>
+              <a:rPr sz="2100" b="0" i="0">
+                <a:solidFill>
+                  <a:srgbClr val="1A1A1A"/>
+                </a:solidFill>
+                <a:latin typeface="Century Schoolbook"/>
+              </a:rPr>
+              <a:t>Six questions. Work down the page.</a:t>
+            </a:r>
+          </a:p>
+        </p:txBody>
+      </p:sp>
+      <p:sp>
+        <p:nvSpPr>
+          <p:cNvPr id="11" name="TextBox 10"/>
+          <p:cNvSpPr txBox="1"/>
+          <p:nvPr/>
+        </p:nvSpPr>
+        <p:spPr>
+          <a:xfrm>
+            <a:off x="960120" y="2551176"/>
+            <a:ext cx="548640" cy="356616"/>
+          </a:xfrm>
+          <a:prstGeom prst="rect">
+            <a:avLst/>
+          </a:prstGeom>
+          <a:noFill/>
+        </p:spPr>
+        <p:txBody>
+          <a:bodyPr wrap="square" lIns="45720" rIns="45720" tIns="18288" bIns="18288" anchor="t">
+            <a:spAutoFit/>
+          </a:bodyPr>
+          <a:lstStyle/>
+          <a:p>
+            <a:pPr algn="l"/>
+            <a:r>
+              <a:rPr sz="2100" b="1" i="0">
+                <a:solidFill>
+                  <a:srgbClr val="0B5394"/>
+                </a:solidFill>
+                <a:latin typeface="Century Schoolbook"/>
+              </a:rPr>
+              <a:t>2.</a:t>
+            </a:r>
+          </a:p>
+        </p:txBody>
+      </p:sp>
+      <p:sp>
+        <p:nvSpPr>
+          <p:cNvPr id="12" name="TextBox 11"/>
+          <p:cNvSpPr txBox="1"/>
+          <p:nvPr/>
+        </p:nvSpPr>
+        <p:spPr>
+          <a:xfrm>
+            <a:off x="1554480" y="2551176"/>
+            <a:ext cx="9829800" cy="411480"/>
+          </a:xfrm>
+          <a:prstGeom prst="rect">
+            <a:avLst/>
+          </a:prstGeom>
+          <a:noFill/>
+        </p:spPr>
+        <p:txBody>
+          <a:bodyPr wrap="square" lIns="45720" rIns="45720" tIns="18288" bIns="18288" anchor="t">
+            <a:spAutoFit/>
+          </a:bodyPr>
+          <a:lstStyle/>
+          <a:p>
+            <a:pPr algn="l"/>
+            <a:r>
+              <a:rPr sz="2100" b="0" i="0">
+                <a:solidFill>
+                  <a:srgbClr val="1A1A1A"/>
+                </a:solidFill>
+                <a:latin typeface="Century Schoolbook"/>
+              </a:rPr>
+              <a:t>Show the step that does the work, not just the answer.</a:t>
+            </a:r>
+          </a:p>
+        </p:txBody>
+      </p:sp>
+      <p:sp>
+        <p:nvSpPr>
+          <p:cNvPr id="13" name="TextBox 12"/>
+          <p:cNvSpPr txBox="1"/>
+          <p:nvPr/>
+        </p:nvSpPr>
+        <p:spPr>
+          <a:xfrm>
+            <a:off x="960120" y="3090672"/>
+            <a:ext cx="548640" cy="356616"/>
+          </a:xfrm>
+          <a:prstGeom prst="rect">
+            <a:avLst/>
+          </a:prstGeom>
+          <a:noFill/>
+        </p:spPr>
+        <p:txBody>
+          <a:bodyPr wrap="square" lIns="45720" rIns="45720" tIns="18288" bIns="18288" anchor="t">
+            <a:spAutoFit/>
+          </a:bodyPr>
+          <a:lstStyle/>
+          <a:p>
+            <a:pPr algn="l"/>
+            <a:r>
+              <a:rPr sz="2100" b="1" i="0">
+                <a:solidFill>
+                  <a:srgbClr val="0B5394"/>
+                </a:solidFill>
+                <a:latin typeface="Century Schoolbook"/>
+              </a:rPr>
+              <a:t>3.</a:t>
+            </a:r>
+          </a:p>
+        </p:txBody>
+      </p:sp>
+      <p:sp>
+        <p:nvSpPr>
+          <p:cNvPr id="14" name="TextBox 13"/>
+          <p:cNvSpPr txBox="1"/>
+          <p:nvPr/>
+        </p:nvSpPr>
+        <p:spPr>
+          <a:xfrm>
+            <a:off x="1554480" y="3090672"/>
+            <a:ext cx="9829800" cy="411480"/>
+          </a:xfrm>
+          <a:prstGeom prst="rect">
+            <a:avLst/>
+          </a:prstGeom>
+          <a:noFill/>
+        </p:spPr>
+        <p:txBody>
+          <a:bodyPr wrap="square" lIns="45720" rIns="45720" tIns="18288" bIns="18288" anchor="t">
+            <a:spAutoFit/>
+          </a:bodyPr>
+          <a:lstStyle/>
+          <a:p>
+            <a:pPr algn="l"/>
+            <a:r>
+              <a:rPr sz="2100" b="0" i="0">
+                <a:solidFill>
+                  <a:srgbClr val="1A1A1A"/>
+                </a:solidFill>
+                <a:latin typeface="Century Schoolbook"/>
+              </a:rPr>
+              <a:t>Silence until the six minutes are up.</a:t>
+            </a:r>
+          </a:p>
+        </p:txBody>
+      </p:sp>
+    </p:spTree>
+  </p:cSld>
+  <p:clrMapOvr>
+    <a:masterClrMapping/>
+  </p:clrMapOvr>
+</p:sld>
+</file>
+
+<file path=ppt/slides/slide34.xml><?xml version="1.0" encoding="utf-8"?>
+<p:sld xmlns:a="http://schemas.openxmlformats.org/drawingml/2006/main" xmlns:p="http://schemas.openxmlformats.org/presentationml/2006/main" xmlns:r="http://schemas.openxmlformats.org/officeDocument/2006/relationships">
+  <p:cSld>
+    <p:spTree>
+      <p:nvGrpSpPr>
+        <p:cNvPr id="1" name=""/>
+        <p:cNvGrpSpPr/>
+        <p:nvPr/>
+      </p:nvGrpSpPr>
+      <p:grpSpPr/>
+      <p:sp>
+        <p:nvSpPr>
+          <p:cNvPr id="2" name="TextBox 1"/>
+          <p:cNvSpPr txBox="1"/>
+          <p:nvPr/>
+        </p:nvSpPr>
+        <p:spPr>
+          <a:xfrm>
+            <a:off x="777240" y="365760"/>
+            <a:ext cx="10607040" cy="640080"/>
+          </a:xfrm>
+          <a:prstGeom prst="rect">
+            <a:avLst/>
+          </a:prstGeom>
+          <a:noFill/>
+        </p:spPr>
+        <p:txBody>
+          <a:bodyPr wrap="square" lIns="45720" rIns="45720" tIns="18288" bIns="18288" anchor="t">
+            <a:spAutoFit/>
+          </a:bodyPr>
+          <a:lstStyle/>
+          <a:p>
+            <a:pPr algn="l"/>
+            <a:r>
+              <a:rPr sz="3600" b="1" i="0">
+                <a:solidFill>
+                  <a:srgbClr val="1A1A1A"/>
+                </a:solidFill>
+                <a:latin typeface="Century Schoolbook"/>
+              </a:rPr>
+              <a:t>IXL</a:t>
+            </a:r>
+          </a:p>
+        </p:txBody>
+      </p:sp>
+      <p:cxnSp>
+        <p:nvCxnSpPr>
+          <p:cNvPr id="3" name="Connector 2"/>
+          <p:cNvCxnSpPr/>
+          <p:nvPr/>
+        </p:nvCxnSpPr>
+        <p:spPr>
+          <a:xfrm>
+            <a:off x="777240" y="1097280"/>
+            <a:ext cx="10607040" cy="0"/>
+          </a:xfrm>
+          <a:prstGeom prst="line">
+            <a:avLst/>
+          </a:prstGeom>
+          <a:ln w="19050">
+            <a:solidFill>
+              <a:srgbClr val="1A1A1A"/>
+            </a:solidFill>
+          </a:ln>
+        </p:spPr>
+        <p:style>
+          <a:lnRef idx="2">
+            <a:schemeClr val="accent1"/>
+          </a:lnRef>
+          <a:fillRef idx="0">
+            <a:schemeClr val="accent1"/>
+          </a:fillRef>
+          <a:effectRef idx="1">
+            <a:schemeClr val="accent1"/>
+          </a:effectRef>
+          <a:fontRef idx="minor">
+            <a:schemeClr val="tx1"/>
+          </a:fontRef>
+        </p:style>
+      </p:cxnSp>
+      <p:cxnSp>
+        <p:nvCxnSpPr>
+          <p:cNvPr id="4" name="Connector 3"/>
+          <p:cNvCxnSpPr/>
+          <p:nvPr/>
+        </p:nvCxnSpPr>
+        <p:spPr>
+          <a:xfrm>
+            <a:off x="777240" y="1179576"/>
+            <a:ext cx="10607040" cy="0"/>
+          </a:xfrm>
+          <a:prstGeom prst="line">
+            <a:avLst/>
+          </a:prstGeom>
+          <a:ln w="9525">
+            <a:solidFill>
+              <a:srgbClr val="1A1A1A"/>
+            </a:solidFill>
+          </a:ln>
+        </p:spPr>
+        <p:style>
+          <a:lnRef idx="2">
+            <a:schemeClr val="accent1"/>
+          </a:lnRef>
+          <a:fillRef idx="0">
+            <a:schemeClr val="accent1"/>
+          </a:fillRef>
+          <a:effectRef idx="1">
+            <a:schemeClr val="accent1"/>
+          </a:effectRef>
+          <a:fontRef idx="minor">
+            <a:schemeClr val="tx1"/>
+          </a:fontRef>
+        </p:style>
+      </p:cxnSp>
+      <p:sp>
+        <p:nvSpPr>
+          <p:cNvPr id="5" name="TextBox 4"/>
+          <p:cNvSpPr txBox="1"/>
+          <p:nvPr/>
+        </p:nvSpPr>
+        <p:spPr>
+          <a:xfrm>
+            <a:off x="777240" y="1261872"/>
+            <a:ext cx="10607040" cy="310896"/>
+          </a:xfrm>
+          <a:prstGeom prst="rect">
+            <a:avLst/>
+          </a:prstGeom>
+          <a:noFill/>
+        </p:spPr>
+        <p:txBody>
+          <a:bodyPr wrap="square" lIns="45720" rIns="45720" tIns="18288" bIns="18288" anchor="t">
+            <a:spAutoFit/>
+          </a:bodyPr>
+          <a:lstStyle/>
+          <a:p>
+            <a:pPr algn="l"/>
+            <a:r>
+              <a:rPr sz="1700" b="0" i="1">
+                <a:solidFill>
+                  <a:srgbClr val="6B6B6B"/>
+                </a:solidFill>
+                <a:latin typeface="Century Schoolbook"/>
+              </a:rPr>
+              <a:t>Last five minutes.</a:t>
+            </a:r>
+          </a:p>
+        </p:txBody>
+      </p:sp>
+      <p:cxnSp>
+        <p:nvCxnSpPr>
+          <p:cNvPr id="6" name="Connector 5"/>
+          <p:cNvCxnSpPr/>
+          <p:nvPr/>
+        </p:nvCxnSpPr>
+        <p:spPr>
+          <a:xfrm>
+            <a:off x="777240" y="6199632"/>
+            <a:ext cx="10607040" cy="0"/>
+          </a:xfrm>
+          <a:prstGeom prst="line">
+            <a:avLst/>
+          </a:prstGeom>
+          <a:ln w="9525">
+            <a:solidFill>
+              <a:srgbClr val="6B6B6B"/>
+            </a:solidFill>
+          </a:ln>
+        </p:spPr>
+        <p:style>
+          <a:lnRef idx="2">
+            <a:schemeClr val="accent1"/>
+          </a:lnRef>
+          <a:fillRef idx="0">
+            <a:schemeClr val="accent1"/>
+          </a:fillRef>
+          <a:effectRef idx="1">
+            <a:schemeClr val="accent1"/>
+          </a:effectRef>
+          <a:fontRef idx="minor">
+            <a:schemeClr val="tx1"/>
+          </a:fontRef>
+        </p:style>
+      </p:cxnSp>
+      <p:sp>
+        <p:nvSpPr>
+          <p:cNvPr id="7" name="TextBox 6"/>
+          <p:cNvSpPr txBox="1"/>
+          <p:nvPr/>
+        </p:nvSpPr>
+        <p:spPr>
+          <a:xfrm>
+            <a:off x="777240" y="6272784"/>
+            <a:ext cx="9692640" cy="274320"/>
+          </a:xfrm>
+          <a:prstGeom prst="rect">
+            <a:avLst/>
+          </a:prstGeom>
+          <a:noFill/>
+        </p:spPr>
+        <p:txBody>
+          <a:bodyPr wrap="square" lIns="45720" rIns="45720" tIns="18288" bIns="18288" anchor="t">
+            <a:spAutoFit/>
+          </a:bodyPr>
+          <a:lstStyle/>
+          <a:p>
+            <a:pPr algn="l"/>
+            <a:r>
+              <a:rPr sz="1100" b="0" i="1">
+                <a:solidFill>
+                  <a:srgbClr val="6B6B6B"/>
+                </a:solidFill>
+                <a:latin typeface="Century Schoolbook"/>
+              </a:rPr>
+              <a:t>Grade 7 Accelerated · Unit 3 · Lesson 5 — Applying Exponent Laws</a:t>
+            </a:r>
+          </a:p>
+        </p:txBody>
+      </p:sp>
+      <p:sp>
+        <p:nvSpPr>
+          <p:cNvPr id="8" name="TextBox 7"/>
+          <p:cNvSpPr txBox="1"/>
+          <p:nvPr/>
+        </p:nvSpPr>
+        <p:spPr>
+          <a:xfrm>
+            <a:off x="10744200" y="6272784"/>
+            <a:ext cx="640080" cy="274320"/>
+          </a:xfrm>
+          <a:prstGeom prst="rect">
+            <a:avLst/>
+          </a:prstGeom>
+          <a:noFill/>
+        </p:spPr>
+        <p:txBody>
+          <a:bodyPr wrap="square" lIns="45720" rIns="45720" tIns="18288" bIns="18288" anchor="t">
+            <a:spAutoFit/>
+          </a:bodyPr>
+          <a:lstStyle/>
+          <a:p>
+            <a:pPr algn="r"/>
+            <a:r>
+              <a:rPr sz="1100" b="0" i="0">
+                <a:solidFill>
+                  <a:srgbClr val="6B6B6B"/>
+                </a:solidFill>
+                <a:latin typeface="Century Schoolbook"/>
+              </a:rPr>
+              <a:t>34</a:t>
+            </a:r>
+          </a:p>
+        </p:txBody>
+      </p:sp>
+      <p:sp>
+        <p:nvSpPr>
+          <p:cNvPr id="9" name="TextBox 8"/>
+          <p:cNvSpPr txBox="1"/>
+          <p:nvPr/>
+        </p:nvSpPr>
+        <p:spPr>
+          <a:xfrm>
             <a:off x="960120" y="1828800"/>
             <a:ext cx="548640" cy="356616"/>
           </a:xfrm>
@@ -14970,7 +15724,7 @@
                 </a:solidFill>
                 <a:latin typeface="Century Schoolbook"/>
               </a:rPr>
-              <a:t>Stop at a SmartScore of 67 on each skill. Whatever you do not finish is tonight's practice.</a:t>
+              <a:t>Every skill listed is required, to a SmartScore of 67. Due at the start of the next class.</a:t>
             </a:r>
           </a:p>
         </p:txBody>
@@ -15005,7 +15759,7 @@
                 </a:solidFill>
                 <a:latin typeface="Century Schoolbook"/>
               </a:rPr>
-              <a:t>Today's skills</a:t>
+              <a:t>Today's skills — all required</a:t>
             </a:r>
           </a:p>
         </p:txBody>

--- a/a7/build/out/u3/A7 3.05  Slides.pptx
+++ b/a7/build/out/u3/A7 3.05  Slides.pptx
@@ -9492,7 +9492,7 @@
       </p:sp>
       <p:pic>
         <p:nvPicPr>
-          <p:cNvPr id="9" name="Picture 8" descr="bc9cf694f32f6a44.png"/>
+          <p:cNvPr id="9" name="Picture 8" descr="e2d8a0f684711ea6.png"/>
           <p:cNvPicPr>
             <a:picLocks noChangeAspect="1"/>
           </p:cNvPicPr>
@@ -9506,8 +9506,8 @@
         </p:blipFill>
         <p:spPr>
           <a:xfrm>
-            <a:off x="5367527" y="2194560"/>
-            <a:ext cx="1426464" cy="649224"/>
+            <a:off x="5375148" y="2194560"/>
+            <a:ext cx="1411224" cy="649224"/>
           </a:xfrm>
           <a:prstGeom prst="rect">
             <a:avLst/>
@@ -9597,7 +9597,7 @@
                 </a:solidFill>
                 <a:latin typeface="Century Schoolbook"/>
               </a:rPr>
-              <a:t>2</a:t>
+              <a:t>3</a:t>
             </a:r>
           </a:p>
         </p:txBody>
@@ -9650,7 +9650,7 @@
                 </a:solidFill>
                 <a:latin typeface="Century Schoolbook"/>
               </a:rPr>
-              <a:t>2</a:t>
+              <a:t>3</a:t>
             </a:r>
           </a:p>
         </p:txBody>
@@ -9694,7 +9694,7 @@
                 </a:solidFill>
                 <a:latin typeface="Century Schoolbook"/>
               </a:rPr>
-              <a:t>−(8/7)</a:t>
+              <a:t>(−7/8)</a:t>
             </a:r>
             <a:r>
               <a:rPr sz="2400" b="0" i="0" baseline="30000">
@@ -9703,7 +9703,7 @@
                 </a:solidFill>
                 <a:latin typeface="Century Schoolbook"/>
               </a:rPr>
-              <a:t>2</a:t>
+              <a:t>3</a:t>
             </a:r>
           </a:p>
         </p:txBody>
@@ -9747,7 +9747,7 @@
                 </a:solidFill>
                 <a:latin typeface="Century Schoolbook"/>
               </a:rPr>
-              <a:t>(−7/8)</a:t>
+              <a:t>(7/8)</a:t>
             </a:r>
             <a:r>
               <a:rPr sz="2400" b="0" i="0" baseline="30000">
@@ -9756,7 +9756,7 @@
                 </a:solidFill>
                 <a:latin typeface="Century Schoolbook"/>
               </a:rPr>
-              <a:t>2</a:t>
+              <a:t>3</a:t>
             </a:r>
           </a:p>
         </p:txBody>
@@ -10061,7 +10061,7 @@
       </p:sp>
       <p:pic>
         <p:nvPicPr>
-          <p:cNvPr id="9" name="Picture 8" descr="bc9cf694f32f6a44.png"/>
+          <p:cNvPr id="9" name="Picture 8" descr="e2d8a0f684711ea6.png"/>
           <p:cNvPicPr>
             <a:picLocks noChangeAspect="1"/>
           </p:cNvPicPr>
@@ -10075,8 +10075,8 @@
         </p:blipFill>
         <p:spPr>
           <a:xfrm>
-            <a:off x="5367527" y="2103120"/>
-            <a:ext cx="1426464" cy="649224"/>
+            <a:off x="5375148" y="2103120"/>
+            <a:ext cx="1411224" cy="649224"/>
           </a:xfrm>
           <a:prstGeom prst="rect">
             <a:avLst/>
@@ -10166,7 +10166,7 @@
                 </a:solidFill>
                 <a:latin typeface="Century Schoolbook"/>
               </a:rPr>
-              <a:t>2</a:t>
+              <a:t>3</a:t>
             </a:r>
           </a:p>
         </p:txBody>
@@ -10219,7 +10219,7 @@
                 </a:solidFill>
                 <a:latin typeface="Century Schoolbook"/>
               </a:rPr>
-              <a:t>2</a:t>
+              <a:t>3</a:t>
             </a:r>
           </a:p>
         </p:txBody>
@@ -10263,7 +10263,7 @@
                 </a:solidFill>
                 <a:latin typeface="Century Schoolbook"/>
               </a:rPr>
-              <a:t>−(8/7)</a:t>
+              <a:t>(−7/8)</a:t>
             </a:r>
             <a:r>
               <a:rPr sz="2400" b="0" i="0" baseline="30000">
@@ -10272,7 +10272,7 @@
                 </a:solidFill>
                 <a:latin typeface="Century Schoolbook"/>
               </a:rPr>
-              <a:t>2</a:t>
+              <a:t>3</a:t>
             </a:r>
           </a:p>
         </p:txBody>
@@ -10316,7 +10316,7 @@
                 </a:solidFill>
                 <a:latin typeface="Century Schoolbook"/>
               </a:rPr>
-              <a:t>(−7/8)</a:t>
+              <a:t>(7/8)</a:t>
             </a:r>
             <a:r>
               <a:rPr sz="2400" b="0" i="0" baseline="30000">
@@ -10325,7 +10325,7 @@
                 </a:solidFill>
                 <a:latin typeface="Century Schoolbook"/>
               </a:rPr>
-              <a:t>2</a:t>
+              <a:t>3</a:t>
             </a:r>
           </a:p>
         </p:txBody>
@@ -10369,7 +10369,7 @@
                 </a:solidFill>
                 <a:latin typeface="Century Schoolbook"/>
               </a:rPr>
-              <a:t>2</a:t>
+              <a:t>3</a:t>
             </a:r>
           </a:p>
         </p:txBody>

--- a/a7/build/out/u3/A7 3.05  Slides.pptx
+++ b/a7/build/out/u3/A7 3.05  Slides.pptx
@@ -3817,7 +3817,7 @@
       </p:sp>
       <p:pic>
         <p:nvPicPr>
-          <p:cNvPr id="9" name="Picture 8" descr="aaa1dfcd273e9206.png"/>
+          <p:cNvPr id="9" name="Picture 8" descr="a7f1f688f77ec613.png"/>
           <p:cNvPicPr>
             <a:picLocks noChangeAspect="1"/>
           </p:cNvPicPr>
@@ -3831,8 +3831,8 @@
         </p:blipFill>
         <p:spPr>
           <a:xfrm>
-            <a:off x="5373623" y="2194560"/>
-            <a:ext cx="1414272" cy="649224"/>
+            <a:off x="5298948" y="2194560"/>
+            <a:ext cx="1563624" cy="862584"/>
           </a:xfrm>
           <a:prstGeom prst="rect">
             <a:avLst/>
@@ -3847,7 +3847,7 @@
         </p:nvSpPr>
         <p:spPr>
           <a:xfrm>
-            <a:off x="777240" y="3163824"/>
+            <a:off x="777240" y="3377184"/>
             <a:ext cx="10607040" cy="429370"/>
           </a:xfrm>
           <a:prstGeom prst="rect">
@@ -3900,7 +3900,7 @@
         </p:nvSpPr>
         <p:spPr>
           <a:xfrm>
-            <a:off x="4692395" y="4535424"/>
+            <a:off x="4578095" y="4642104"/>
             <a:ext cx="1920240" cy="548640"/>
           </a:xfrm>
           <a:prstGeom prst="rect">
@@ -3929,7 +3929,7 @@
       </p:sp>
       <p:pic>
         <p:nvPicPr>
-          <p:cNvPr id="12" name="Picture 11" descr="8a43ff992deefc88.png"/>
+          <p:cNvPr id="12" name="Picture 11" descr="cacffea294d43135.png"/>
           <p:cNvPicPr>
             <a:picLocks noChangeAspect="1"/>
           </p:cNvPicPr>
@@ -3943,8 +3943,8 @@
         </p:blipFill>
         <p:spPr>
           <a:xfrm>
-            <a:off x="6612635" y="4480560"/>
-            <a:ext cx="856488" cy="658368"/>
+            <a:off x="6498335" y="4480560"/>
+            <a:ext cx="1085088" cy="871728"/>
           </a:xfrm>
           <a:prstGeom prst="rect">
             <a:avLst/>
@@ -4216,7 +4216,7 @@
       </p:sp>
       <p:pic>
         <p:nvPicPr>
-          <p:cNvPr id="9" name="Picture 8" descr="5ea0c24b535e0093.png"/>
+          <p:cNvPr id="9" name="Picture 8" descr="b8ecac4debf08671.png"/>
           <p:cNvPicPr>
             <a:picLocks noChangeAspect="1"/>
           </p:cNvPicPr>
@@ -4230,8 +4230,8 @@
         </p:blipFill>
         <p:spPr>
           <a:xfrm>
-            <a:off x="5151120" y="2103120"/>
-            <a:ext cx="1859280" cy="527304"/>
+            <a:off x="5036820" y="2103120"/>
+            <a:ext cx="2087880" cy="691896"/>
           </a:xfrm>
           <a:prstGeom prst="rect">
             <a:avLst/>
@@ -4246,7 +4246,7 @@
         </p:nvSpPr>
         <p:spPr>
           <a:xfrm>
-            <a:off x="777240" y="3133344"/>
+            <a:off x="777240" y="3297936"/>
             <a:ext cx="10607040" cy="429370"/>
           </a:xfrm>
           <a:prstGeom prst="rect">
@@ -4538,7 +4538,7 @@
       </p:sp>
       <p:pic>
         <p:nvPicPr>
-          <p:cNvPr id="9" name="Picture 8" descr="7174009b82f7cefc.png"/>
+          <p:cNvPr id="9" name="Picture 8" descr="db559d4d2a359eb5.png"/>
           <p:cNvPicPr>
             <a:picLocks noChangeAspect="1"/>
           </p:cNvPicPr>
@@ -4553,7 +4553,7 @@
         <p:spPr>
           <a:xfrm>
             <a:off x="1828800" y="1920240"/>
-            <a:ext cx="4779264" cy="527304"/>
+            <a:ext cx="5227320" cy="691896"/>
           </a:xfrm>
           <a:prstGeom prst="rect">
             <a:avLst/>
@@ -4568,8 +4568,8 @@
         </p:nvSpPr>
         <p:spPr>
           <a:xfrm>
-            <a:off x="7065264" y="1955292"/>
-            <a:ext cx="4319015" cy="502920"/>
+            <a:off x="7513320" y="2037588"/>
+            <a:ext cx="3870959" cy="502920"/>
           </a:xfrm>
           <a:prstGeom prst="rect">
             <a:avLst/>
@@ -4597,7 +4597,7 @@
       </p:sp>
       <p:pic>
         <p:nvPicPr>
-          <p:cNvPr id="11" name="Picture 10" descr="aa53a291c7cfe91d.png"/>
+          <p:cNvPr id="11" name="Picture 10" descr="49a689f73e6d36b0.png"/>
           <p:cNvPicPr>
             <a:picLocks noChangeAspect="1"/>
           </p:cNvPicPr>
@@ -4611,8 +4611,8 @@
         </p:blipFill>
         <p:spPr>
           <a:xfrm>
-            <a:off x="1828800" y="2721864"/>
-            <a:ext cx="1383792" cy="527304"/>
+            <a:off x="1828800" y="2886456"/>
+            <a:ext cx="1621536" cy="697992"/>
           </a:xfrm>
           <a:prstGeom prst="rect">
             <a:avLst/>
@@ -4627,7 +4627,7 @@
         </p:nvSpPr>
         <p:spPr>
           <a:xfrm>
-            <a:off x="3669792" y="2756915"/>
+            <a:off x="3907536" y="3006852"/>
             <a:ext cx="6400800" cy="502920"/>
           </a:xfrm>
           <a:prstGeom prst="rect">
@@ -4972,7 +4972,7 @@
       </p:sp>
       <p:pic>
         <p:nvPicPr>
-          <p:cNvPr id="9" name="Picture 8" descr="15eb7a595f278a85.png"/>
+          <p:cNvPr id="9" name="Picture 8" descr="a7f97d6945899edc.png"/>
           <p:cNvPicPr>
             <a:picLocks noChangeAspect="1"/>
           </p:cNvPicPr>
@@ -4986,8 +4986,8 @@
         </p:blipFill>
         <p:spPr>
           <a:xfrm>
-            <a:off x="4460748" y="2194560"/>
-            <a:ext cx="3240024" cy="649224"/>
+            <a:off x="4315968" y="2194560"/>
+            <a:ext cx="3529584" cy="862584"/>
           </a:xfrm>
           <a:prstGeom prst="rect">
             <a:avLst/>
@@ -5259,7 +5259,7 @@
       </p:sp>
       <p:pic>
         <p:nvPicPr>
-          <p:cNvPr id="9" name="Picture 8" descr="15eb7a595f278a85.png"/>
+          <p:cNvPr id="9" name="Picture 8" descr="a7f97d6945899edc.png"/>
           <p:cNvPicPr>
             <a:picLocks noChangeAspect="1"/>
           </p:cNvPicPr>
@@ -5273,8 +5273,8 @@
         </p:blipFill>
         <p:spPr>
           <a:xfrm>
-            <a:off x="4460748" y="2194560"/>
-            <a:ext cx="3240024" cy="649224"/>
+            <a:off x="4315968" y="2194560"/>
+            <a:ext cx="3529584" cy="862584"/>
           </a:xfrm>
           <a:prstGeom prst="rect">
             <a:avLst/>
@@ -5289,7 +5289,7 @@
         </p:nvSpPr>
         <p:spPr>
           <a:xfrm>
-            <a:off x="777240" y="3163824"/>
+            <a:off x="777240" y="3377184"/>
             <a:ext cx="10607040" cy="429370"/>
           </a:xfrm>
           <a:prstGeom prst="rect">
@@ -5333,7 +5333,7 @@
         </p:nvSpPr>
         <p:spPr>
           <a:xfrm>
-            <a:off x="4437887" y="4533900"/>
+            <a:off x="4364735" y="4637532"/>
             <a:ext cx="1920240" cy="548640"/>
           </a:xfrm>
           <a:prstGeom prst="rect">
@@ -5362,7 +5362,7 @@
       </p:sp>
       <p:pic>
         <p:nvPicPr>
-          <p:cNvPr id="12" name="Picture 11" descr="72c3be02c8e03a83.png"/>
+          <p:cNvPr id="12" name="Picture 11" descr="3269d301dd5e8afa.png"/>
           <p:cNvPicPr>
             <a:picLocks noChangeAspect="1"/>
           </p:cNvPicPr>
@@ -5376,8 +5376,8 @@
         </p:blipFill>
         <p:spPr>
           <a:xfrm>
-            <a:off x="6358128" y="4480560"/>
-            <a:ext cx="1365504" cy="655320"/>
+            <a:off x="6284976" y="4480560"/>
+            <a:ext cx="1511808" cy="862584"/>
           </a:xfrm>
           <a:prstGeom prst="rect">
             <a:avLst/>
@@ -5655,8 +5655,8 @@
         </p:nvSpPr>
         <p:spPr>
           <a:xfrm>
-            <a:off x="2485643" y="2223516"/>
-            <a:ext cx="6219952" cy="457200"/>
+            <a:off x="2888003" y="2304288"/>
+            <a:ext cx="5370780" cy="457200"/>
           </a:xfrm>
           <a:prstGeom prst="rect">
             <a:avLst/>
@@ -5665,7 +5665,7 @@
         </p:spPr>
         <p:txBody>
           <a:bodyPr wrap="none" lIns="45720" rIns="45720" tIns="18288" bIns="18288" anchor="ctr">
-            <a:spAutoFit/>
+            <a:noAutofit/>
           </a:bodyPr>
           <a:lstStyle/>
           <a:p>
@@ -5684,7 +5684,7 @@
       </p:sp>
       <p:pic>
         <p:nvPicPr>
-          <p:cNvPr id="10" name="Picture 9" descr="74f8723956196338.png"/>
+          <p:cNvPr id="10" name="Picture 9" descr="b43afb9c608d068d.png"/>
           <p:cNvPicPr>
             <a:picLocks noChangeAspect="1"/>
           </p:cNvPicPr>
@@ -5698,8 +5698,8 @@
         </p:blipFill>
         <p:spPr>
           <a:xfrm>
-            <a:off x="8568436" y="2194560"/>
-            <a:ext cx="862584" cy="515112"/>
+            <a:off x="8121624" y="2194560"/>
+            <a:ext cx="981455" cy="676656"/>
           </a:xfrm>
           <a:prstGeom prst="rect">
             <a:avLst/>
@@ -5714,8 +5714,8 @@
         </p:nvSpPr>
         <p:spPr>
           <a:xfrm>
-            <a:off x="9431020" y="2223516"/>
-            <a:ext cx="382016" cy="457200"/>
+            <a:off x="9103080" y="2304288"/>
+            <a:ext cx="307595" cy="457200"/>
           </a:xfrm>
           <a:prstGeom prst="rect">
             <a:avLst/>
@@ -5724,7 +5724,7 @@
         </p:spPr>
         <p:txBody>
           <a:bodyPr wrap="none" lIns="45720" rIns="45720" tIns="18288" bIns="18288" anchor="ctr">
-            <a:spAutoFit/>
+            <a:noAutofit/>
           </a:bodyPr>
           <a:lstStyle/>
           <a:p>
@@ -5749,7 +5749,7 @@
         </p:nvSpPr>
         <p:spPr>
           <a:xfrm>
-            <a:off x="777240" y="2983992"/>
+            <a:off x="777240" y="3145535"/>
             <a:ext cx="10607040" cy="465151"/>
           </a:xfrm>
           <a:prstGeom prst="rect">
@@ -5784,7 +5784,7 @@
         </p:nvSpPr>
         <p:spPr>
           <a:xfrm>
-            <a:off x="777240" y="3558871"/>
+            <a:off x="777240" y="3720415"/>
             <a:ext cx="10607040" cy="465151"/>
           </a:xfrm>
           <a:prstGeom prst="rect">
@@ -5819,7 +5819,7 @@
         </p:nvSpPr>
         <p:spPr>
           <a:xfrm>
-            <a:off x="777240" y="4343400"/>
+            <a:off x="777240" y="4432454"/>
             <a:ext cx="10607040" cy="457200"/>
           </a:xfrm>
           <a:prstGeom prst="rect">
@@ -5854,7 +5854,7 @@
         </p:nvSpPr>
         <p:spPr>
           <a:xfrm>
-            <a:off x="777240" y="4828032"/>
+            <a:off x="777240" y="4917086"/>
             <a:ext cx="10607040" cy="365760"/>
           </a:xfrm>
           <a:prstGeom prst="rect">
@@ -6152,8 +6152,8 @@
         </p:nvSpPr>
         <p:spPr>
           <a:xfrm>
-            <a:off x="2485643" y="2132076"/>
-            <a:ext cx="6219952" cy="457200"/>
+            <a:off x="2888003" y="2212848"/>
+            <a:ext cx="5370780" cy="457200"/>
           </a:xfrm>
           <a:prstGeom prst="rect">
             <a:avLst/>
@@ -6162,7 +6162,7 @@
         </p:spPr>
         <p:txBody>
           <a:bodyPr wrap="none" lIns="45720" rIns="45720" tIns="18288" bIns="18288" anchor="ctr">
-            <a:spAutoFit/>
+            <a:noAutofit/>
           </a:bodyPr>
           <a:lstStyle/>
           <a:p>
@@ -6181,7 +6181,7 @@
       </p:sp>
       <p:pic>
         <p:nvPicPr>
-          <p:cNvPr id="10" name="Picture 9" descr="74f8723956196338.png"/>
+          <p:cNvPr id="10" name="Picture 9" descr="b43afb9c608d068d.png"/>
           <p:cNvPicPr>
             <a:picLocks noChangeAspect="1"/>
           </p:cNvPicPr>
@@ -6195,8 +6195,8 @@
         </p:blipFill>
         <p:spPr>
           <a:xfrm>
-            <a:off x="8568436" y="2103120"/>
-            <a:ext cx="862584" cy="515112"/>
+            <a:off x="8121624" y="2103120"/>
+            <a:ext cx="981455" cy="676656"/>
           </a:xfrm>
           <a:prstGeom prst="rect">
             <a:avLst/>
@@ -6211,8 +6211,8 @@
         </p:nvSpPr>
         <p:spPr>
           <a:xfrm>
-            <a:off x="9431020" y="2132076"/>
-            <a:ext cx="382016" cy="457200"/>
+            <a:off x="9103080" y="2212848"/>
+            <a:ext cx="307595" cy="457200"/>
           </a:xfrm>
           <a:prstGeom prst="rect">
             <a:avLst/>
@@ -6221,7 +6221,7 @@
         </p:spPr>
         <p:txBody>
           <a:bodyPr wrap="none" lIns="45720" rIns="45720" tIns="18288" bIns="18288" anchor="ctr">
-            <a:spAutoFit/>
+            <a:noAutofit/>
           </a:bodyPr>
           <a:lstStyle/>
           <a:p>
@@ -6246,7 +6246,7 @@
         </p:nvSpPr>
         <p:spPr>
           <a:xfrm>
-            <a:off x="777240" y="2892552"/>
+            <a:off x="777240" y="3054096"/>
             <a:ext cx="10607040" cy="465151"/>
           </a:xfrm>
           <a:prstGeom prst="rect">
@@ -6281,7 +6281,7 @@
         </p:nvSpPr>
         <p:spPr>
           <a:xfrm>
-            <a:off x="777240" y="3467431"/>
+            <a:off x="777240" y="3628975"/>
             <a:ext cx="10607040" cy="465151"/>
           </a:xfrm>
           <a:prstGeom prst="rect">
@@ -6316,7 +6316,7 @@
         </p:nvSpPr>
         <p:spPr>
           <a:xfrm>
-            <a:off x="1828800" y="4088030"/>
+            <a:off x="1828800" y="4249574"/>
             <a:ext cx="8503920" cy="548640"/>
           </a:xfrm>
           <a:prstGeom prst="rect">
@@ -6351,7 +6351,7 @@
         </p:nvSpPr>
         <p:spPr>
           <a:xfrm>
-            <a:off x="4703063" y="4866794"/>
+            <a:off x="4629912" y="5133494"/>
             <a:ext cx="1920240" cy="548640"/>
           </a:xfrm>
           <a:prstGeom prst="rect">
@@ -6380,7 +6380,7 @@
       </p:sp>
       <p:pic>
         <p:nvPicPr>
-          <p:cNvPr id="16" name="Picture 15" descr="733bcc72d86bfa25.png"/>
+          <p:cNvPr id="16" name="Picture 15" descr="319963a3efbf8562.png"/>
           <p:cNvPicPr>
             <a:picLocks noChangeAspect="1"/>
           </p:cNvPicPr>
@@ -6394,8 +6394,8 @@
         </p:blipFill>
         <p:spPr>
           <a:xfrm>
-            <a:off x="6623303" y="4819550"/>
-            <a:ext cx="835152" cy="643128"/>
+            <a:off x="6550152" y="4981094"/>
+            <a:ext cx="981455" cy="853440"/>
           </a:xfrm>
           <a:prstGeom prst="rect">
             <a:avLst/>
@@ -6667,7 +6667,7 @@
       </p:sp>
       <p:pic>
         <p:nvPicPr>
-          <p:cNvPr id="9" name="Picture 8" descr="96bc3c845a76cea1.png"/>
+          <p:cNvPr id="9" name="Picture 8" descr="23a87bc643d7e5a2.png"/>
           <p:cNvPicPr>
             <a:picLocks noChangeAspect="1"/>
           </p:cNvPicPr>
@@ -6681,8 +6681,8 @@
         </p:blipFill>
         <p:spPr>
           <a:xfrm>
-            <a:off x="5420867" y="2194560"/>
-            <a:ext cx="1319784" cy="655320"/>
+            <a:off x="5292852" y="2194560"/>
+            <a:ext cx="1575816" cy="868680"/>
           </a:xfrm>
           <a:prstGeom prst="rect">
             <a:avLst/>
@@ -7024,7 +7024,7 @@
       </p:sp>
       <p:pic>
         <p:nvPicPr>
-          <p:cNvPr id="9" name="Picture 8" descr="96bc3c845a76cea1.png"/>
+          <p:cNvPr id="9" name="Picture 8" descr="23a87bc643d7e5a2.png"/>
           <p:cNvPicPr>
             <a:picLocks noChangeAspect="1"/>
           </p:cNvPicPr>
@@ -7038,8 +7038,8 @@
         </p:blipFill>
         <p:spPr>
           <a:xfrm>
-            <a:off x="5420867" y="2103120"/>
-            <a:ext cx="1319784" cy="655320"/>
+            <a:off x="5292852" y="2103120"/>
+            <a:ext cx="1575816" cy="868680"/>
           </a:xfrm>
           <a:prstGeom prst="rect">
             <a:avLst/>
@@ -7054,7 +7054,7 @@
         </p:nvSpPr>
         <p:spPr>
           <a:xfrm>
-            <a:off x="1828800" y="3032760"/>
+            <a:off x="1828800" y="3246120"/>
             <a:ext cx="8503920" cy="548640"/>
           </a:xfrm>
           <a:prstGeom prst="rect">
@@ -7089,7 +7089,7 @@
         </p:nvSpPr>
         <p:spPr>
           <a:xfrm>
-            <a:off x="4582667" y="4715256"/>
+            <a:off x="4454651" y="4823459"/>
             <a:ext cx="1920240" cy="548640"/>
           </a:xfrm>
           <a:prstGeom prst="rect">
@@ -7118,7 +7118,7 @@
       </p:sp>
       <p:pic>
         <p:nvPicPr>
-          <p:cNvPr id="12" name="Picture 11" descr="b563bfbd8d76cbe0.png"/>
+          <p:cNvPr id="12" name="Picture 11" descr="837676bd53bd7ebc.png"/>
           <p:cNvPicPr>
             <a:picLocks noChangeAspect="1"/>
           </p:cNvPicPr>
@@ -7132,8 +7132,8 @@
         </p:blipFill>
         <p:spPr>
           <a:xfrm>
-            <a:off x="6502908" y="4663440"/>
-            <a:ext cx="1075944" cy="652272"/>
+            <a:off x="6374891" y="4663440"/>
+            <a:ext cx="1331976" cy="868680"/>
           </a:xfrm>
           <a:prstGeom prst="rect">
             <a:avLst/>
@@ -7405,7 +7405,7 @@
       </p:sp>
       <p:pic>
         <p:nvPicPr>
-          <p:cNvPr id="9" name="Picture 8" descr="e2502010ecab300d.png"/>
+          <p:cNvPr id="9" name="Picture 8" descr="c08fd56f1b4e345e.png"/>
           <p:cNvPicPr>
             <a:picLocks noChangeAspect="1"/>
           </p:cNvPicPr>
@@ -7419,8 +7419,8 @@
         </p:blipFill>
         <p:spPr>
           <a:xfrm>
-            <a:off x="5364480" y="2194560"/>
-            <a:ext cx="1432560" cy="658368"/>
+            <a:off x="5288280" y="2194560"/>
+            <a:ext cx="1584960" cy="871728"/>
           </a:xfrm>
           <a:prstGeom prst="rect">
             <a:avLst/>
@@ -7769,7 +7769,7 @@
         <p:spPr>
           <a:xfrm>
             <a:off x="1874519" y="1760220"/>
-            <a:ext cx="3551936" cy="457200"/>
+            <a:ext cx="3058734" cy="457200"/>
           </a:xfrm>
           <a:prstGeom prst="rect">
             <a:avLst/>
@@ -7778,7 +7778,7 @@
         </p:spPr>
         <p:txBody>
           <a:bodyPr wrap="none" lIns="45720" rIns="45720" tIns="18288" bIns="18288" anchor="ctr">
-            <a:spAutoFit/>
+            <a:noAutofit/>
           </a:bodyPr>
           <a:lstStyle/>
           <a:p>
@@ -7811,7 +7811,7 @@
         </p:blipFill>
         <p:spPr>
           <a:xfrm>
-            <a:off x="5289296" y="1851660"/>
+            <a:off x="4796094" y="1851660"/>
             <a:ext cx="417576" cy="274320"/>
           </a:xfrm>
           <a:prstGeom prst="rect">
@@ -7827,8 +7827,8 @@
         </p:nvSpPr>
         <p:spPr>
           <a:xfrm>
-            <a:off x="1874519" y="2395728"/>
-            <a:ext cx="6285992" cy="457200"/>
+            <a:off x="1874519" y="2468880"/>
+            <a:ext cx="5677198" cy="457200"/>
           </a:xfrm>
           <a:prstGeom prst="rect">
             <a:avLst/>
@@ -7837,7 +7837,7 @@
         </p:spPr>
         <p:txBody>
           <a:bodyPr wrap="none" lIns="45720" rIns="45720" tIns="18288" bIns="18288" anchor="ctr">
-            <a:spAutoFit/>
+            <a:noAutofit/>
           </a:bodyPr>
           <a:lstStyle/>
           <a:p>
@@ -7856,7 +7856,7 @@
       </p:sp>
       <p:pic>
         <p:nvPicPr>
-          <p:cNvPr id="12" name="Picture 11" descr="37c17cda3a3954ed.png"/>
+          <p:cNvPr id="12" name="Picture 11" descr="82be0161615a5d7f.png"/>
           <p:cNvPicPr>
             <a:picLocks noChangeAspect="1"/>
           </p:cNvPicPr>
@@ -7870,8 +7870,8 @@
         </p:blipFill>
         <p:spPr>
           <a:xfrm>
-            <a:off x="8023352" y="2395728"/>
-            <a:ext cx="326136" cy="457200"/>
+            <a:off x="7414558" y="2395728"/>
+            <a:ext cx="463296" cy="603504"/>
           </a:xfrm>
           <a:prstGeom prst="rect">
             <a:avLst/>
@@ -7886,8 +7886,8 @@
         </p:nvSpPr>
         <p:spPr>
           <a:xfrm>
-            <a:off x="1874519" y="3031236"/>
-            <a:ext cx="3551936" cy="457200"/>
+            <a:off x="1874519" y="3177540"/>
+            <a:ext cx="3065570" cy="457200"/>
           </a:xfrm>
           <a:prstGeom prst="rect">
             <a:avLst/>
@@ -7896,7 +7896,7 @@
         </p:spPr>
         <p:txBody>
           <a:bodyPr wrap="none" lIns="45720" rIns="45720" tIns="18288" bIns="18288" anchor="ctr">
-            <a:spAutoFit/>
+            <a:noAutofit/>
           </a:bodyPr>
           <a:lstStyle/>
           <a:p>
@@ -7929,7 +7929,7 @@
         </p:blipFill>
         <p:spPr>
           <a:xfrm>
-            <a:off x="5289296" y="3122676"/>
+            <a:off x="4802930" y="3268980"/>
             <a:ext cx="265176" cy="274320"/>
           </a:xfrm>
           <a:prstGeom prst="rect">
@@ -7945,8 +7945,8 @@
         </p:nvSpPr>
         <p:spPr>
           <a:xfrm>
-            <a:off x="5554472" y="3031236"/>
-            <a:ext cx="817879" cy="457200"/>
+            <a:off x="5068106" y="3177540"/>
+            <a:ext cx="674751" cy="457200"/>
           </a:xfrm>
           <a:prstGeom prst="rect">
             <a:avLst/>
@@ -7955,7 +7955,7 @@
         </p:spPr>
         <p:txBody>
           <a:bodyPr wrap="none" lIns="45720" rIns="45720" tIns="18288" bIns="18288" anchor="ctr">
-            <a:spAutoFit/>
+            <a:noAutofit/>
           </a:bodyPr>
           <a:lstStyle/>
           <a:p>
@@ -7988,7 +7988,7 @@
         </p:blipFill>
         <p:spPr>
           <a:xfrm>
-            <a:off x="6235192" y="3118104"/>
+            <a:off x="5605697" y="3264408"/>
             <a:ext cx="265176" cy="283464"/>
           </a:xfrm>
           <a:prstGeom prst="rect">
@@ -8004,8 +8004,8 @@
         </p:nvSpPr>
         <p:spPr>
           <a:xfrm>
-            <a:off x="6500368" y="3031236"/>
-            <a:ext cx="362204" cy="457200"/>
+            <a:off x="5870873" y="3177540"/>
+            <a:ext cx="347771" cy="457200"/>
           </a:xfrm>
           <a:prstGeom prst="rect">
             <a:avLst/>
@@ -8014,7 +8014,7 @@
         </p:spPr>
         <p:txBody>
           <a:bodyPr wrap="none" lIns="45720" rIns="45720" tIns="18288" bIns="18288" anchor="ctr">
-            <a:spAutoFit/>
+            <a:noAutofit/>
           </a:bodyPr>
           <a:lstStyle/>
           <a:p>
@@ -8039,8 +8039,8 @@
         </p:nvSpPr>
         <p:spPr>
           <a:xfrm>
-            <a:off x="1874519" y="3649980"/>
-            <a:ext cx="4767072" cy="457200"/>
+            <a:off x="1874519" y="3863340"/>
+            <a:ext cx="4084107" cy="457200"/>
           </a:xfrm>
           <a:prstGeom prst="rect">
             <a:avLst/>
@@ -8049,7 +8049,7 @@
         </p:spPr>
         <p:txBody>
           <a:bodyPr wrap="none" lIns="45720" rIns="45720" tIns="18288" bIns="18288" anchor="ctr">
-            <a:spAutoFit/>
+            <a:noAutofit/>
           </a:bodyPr>
           <a:lstStyle/>
           <a:p>
@@ -8068,7 +8068,7 @@
       </p:sp>
       <p:pic>
         <p:nvPicPr>
-          <p:cNvPr id="19" name="Picture 18" descr="e8053e529bf5330f.png"/>
+          <p:cNvPr id="19" name="Picture 18" descr="e5446a4e89f9a3af.png"/>
           <p:cNvPicPr>
             <a:picLocks noChangeAspect="1"/>
           </p:cNvPicPr>
@@ -8082,8 +8082,8 @@
         </p:blipFill>
         <p:spPr>
           <a:xfrm>
-            <a:off x="6504432" y="3666744"/>
-            <a:ext cx="329184" cy="423672"/>
+            <a:off x="5821467" y="3813048"/>
+            <a:ext cx="377952" cy="557784"/>
           </a:xfrm>
           <a:prstGeom prst="rect">
             <a:avLst/>
@@ -8355,7 +8355,7 @@
       </p:sp>
       <p:pic>
         <p:nvPicPr>
-          <p:cNvPr id="9" name="Picture 8" descr="e2502010ecab300d.png"/>
+          <p:cNvPr id="9" name="Picture 8" descr="c08fd56f1b4e345e.png"/>
           <p:cNvPicPr>
             <a:picLocks noChangeAspect="1"/>
           </p:cNvPicPr>
@@ -8369,8 +8369,8 @@
         </p:blipFill>
         <p:spPr>
           <a:xfrm>
-            <a:off x="5364480" y="2103120"/>
-            <a:ext cx="1432560" cy="658368"/>
+            <a:off x="5288280" y="2103120"/>
+            <a:ext cx="1584960" cy="871728"/>
           </a:xfrm>
           <a:prstGeom prst="rect">
             <a:avLst/>
@@ -8385,7 +8385,7 @@
         </p:nvSpPr>
         <p:spPr>
           <a:xfrm>
-            <a:off x="1828800" y="3035807"/>
+            <a:off x="1828800" y="3249167"/>
             <a:ext cx="8503920" cy="548640"/>
           </a:xfrm>
           <a:prstGeom prst="rect">
@@ -8438,7 +8438,7 @@
         </p:nvSpPr>
         <p:spPr>
           <a:xfrm>
-            <a:off x="4940808" y="4718303"/>
+            <a:off x="4864607" y="4823459"/>
             <a:ext cx="1920240" cy="548640"/>
           </a:xfrm>
           <a:prstGeom prst="rect">
@@ -8467,7 +8467,7 @@
       </p:sp>
       <p:pic>
         <p:nvPicPr>
-          <p:cNvPr id="12" name="Picture 11" descr="b0a280c71055935c.png"/>
+          <p:cNvPr id="12" name="Picture 11" descr="3148abf2051aaac1.png"/>
           <p:cNvPicPr>
             <a:picLocks noChangeAspect="1"/>
           </p:cNvPicPr>
@@ -8481,8 +8481,8 @@
         </p:blipFill>
         <p:spPr>
           <a:xfrm>
-            <a:off x="6861048" y="4663440"/>
-            <a:ext cx="359664" cy="658368"/>
+            <a:off x="6784848" y="4663440"/>
+            <a:ext cx="512064" cy="868680"/>
           </a:xfrm>
           <a:prstGeom prst="rect">
             <a:avLst/>
@@ -8754,7 +8754,7 @@
       </p:sp>
       <p:pic>
         <p:nvPicPr>
-          <p:cNvPr id="9" name="Picture 8" descr="ddba2018d9acc4a7.png"/>
+          <p:cNvPr id="9" name="Picture 8" descr="c2285e954aff8d61.png"/>
           <p:cNvPicPr>
             <a:picLocks noChangeAspect="1"/>
           </p:cNvPicPr>
@@ -8768,8 +8768,8 @@
         </p:blipFill>
         <p:spPr>
           <a:xfrm>
-            <a:off x="5462015" y="2194560"/>
-            <a:ext cx="1237488" cy="646176"/>
+            <a:off x="5347715" y="2194560"/>
+            <a:ext cx="1466088" cy="853440"/>
           </a:xfrm>
           <a:prstGeom prst="rect">
             <a:avLst/>
@@ -9111,7 +9111,7 @@
       </p:sp>
       <p:pic>
         <p:nvPicPr>
-          <p:cNvPr id="9" name="Picture 8" descr="ddba2018d9acc4a7.png"/>
+          <p:cNvPr id="9" name="Picture 8" descr="c2285e954aff8d61.png"/>
           <p:cNvPicPr>
             <a:picLocks noChangeAspect="1"/>
           </p:cNvPicPr>
@@ -9125,8 +9125,8 @@
         </p:blipFill>
         <p:spPr>
           <a:xfrm>
-            <a:off x="5462015" y="2103120"/>
-            <a:ext cx="1237488" cy="646176"/>
+            <a:off x="5347715" y="2103120"/>
+            <a:ext cx="1466088" cy="853440"/>
           </a:xfrm>
           <a:prstGeom prst="rect">
             <a:avLst/>
@@ -9141,7 +9141,7 @@
         </p:nvSpPr>
         <p:spPr>
           <a:xfrm>
-            <a:off x="1828800" y="3023615"/>
+            <a:off x="1828800" y="3230880"/>
             <a:ext cx="8503920" cy="548640"/>
           </a:xfrm>
           <a:prstGeom prst="rect">
@@ -9176,7 +9176,7 @@
         </p:nvSpPr>
         <p:spPr>
           <a:xfrm>
-            <a:off x="4622292" y="4710684"/>
+            <a:off x="4509516" y="4815840"/>
             <a:ext cx="1920240" cy="548640"/>
           </a:xfrm>
           <a:prstGeom prst="rect">
@@ -9205,7 +9205,7 @@
       </p:sp>
       <p:pic>
         <p:nvPicPr>
-          <p:cNvPr id="12" name="Picture 11" descr="f9cdd03ece469f47.png"/>
+          <p:cNvPr id="12" name="Picture 11" descr="c2c7971114380740.png"/>
           <p:cNvPicPr>
             <a:picLocks noChangeAspect="1"/>
           </p:cNvPicPr>
@@ -9219,8 +9219,8 @@
         </p:blipFill>
         <p:spPr>
           <a:xfrm>
-            <a:off x="6542531" y="4663440"/>
-            <a:ext cx="996696" cy="643128"/>
+            <a:off x="6429756" y="4663440"/>
+            <a:ext cx="1222248" cy="853440"/>
           </a:xfrm>
           <a:prstGeom prst="rect">
             <a:avLst/>
@@ -9492,7 +9492,7 @@
       </p:sp>
       <p:pic>
         <p:nvPicPr>
-          <p:cNvPr id="9" name="Picture 8" descr="e2d8a0f684711ea6.png"/>
+          <p:cNvPr id="9" name="Picture 8" descr="fb95563de51335d3.png"/>
           <p:cNvPicPr>
             <a:picLocks noChangeAspect="1"/>
           </p:cNvPicPr>
@@ -9506,8 +9506,8 @@
         </p:blipFill>
         <p:spPr>
           <a:xfrm>
-            <a:off x="5375148" y="2194560"/>
-            <a:ext cx="1411224" cy="649224"/>
+            <a:off x="5301996" y="2194560"/>
+            <a:ext cx="1557528" cy="853440"/>
           </a:xfrm>
           <a:prstGeom prst="rect">
             <a:avLst/>
@@ -9522,7 +9522,7 @@
         </p:nvSpPr>
         <p:spPr>
           <a:xfrm>
-            <a:off x="777240" y="3072384"/>
+            <a:off x="777240" y="3276599"/>
             <a:ext cx="10607040" cy="465151"/>
           </a:xfrm>
           <a:prstGeom prst="rect">
@@ -9557,7 +9557,7 @@
         </p:nvSpPr>
         <p:spPr>
           <a:xfrm>
-            <a:off x="1874519" y="3738703"/>
+            <a:off x="1874519" y="3942919"/>
             <a:ext cx="4572000" cy="548640"/>
           </a:xfrm>
           <a:prstGeom prst="rect">
@@ -9610,7 +9610,7 @@
         </p:nvSpPr>
         <p:spPr>
           <a:xfrm>
-            <a:off x="6629400" y="3738703"/>
+            <a:off x="6629400" y="3942919"/>
             <a:ext cx="4572000" cy="548640"/>
           </a:xfrm>
           <a:prstGeom prst="rect">
@@ -9663,7 +9663,7 @@
         </p:nvSpPr>
         <p:spPr>
           <a:xfrm>
-            <a:off x="1874519" y="4424503"/>
+            <a:off x="1874519" y="4628719"/>
             <a:ext cx="4572000" cy="548640"/>
           </a:xfrm>
           <a:prstGeom prst="rect">
@@ -9716,7 +9716,7 @@
         </p:nvSpPr>
         <p:spPr>
           <a:xfrm>
-            <a:off x="6629400" y="4424503"/>
+            <a:off x="6629400" y="4628719"/>
             <a:ext cx="4572000" cy="548640"/>
           </a:xfrm>
           <a:prstGeom prst="rect">
@@ -9769,7 +9769,7 @@
         </p:nvSpPr>
         <p:spPr>
           <a:xfrm>
-            <a:off x="777240" y="5430343"/>
+            <a:off x="777240" y="5634559"/>
             <a:ext cx="10607040" cy="457200"/>
           </a:xfrm>
           <a:prstGeom prst="rect">
@@ -10061,7 +10061,7 @@
       </p:sp>
       <p:pic>
         <p:nvPicPr>
-          <p:cNvPr id="9" name="Picture 8" descr="e2d8a0f684711ea6.png"/>
+          <p:cNvPr id="9" name="Picture 8" descr="fb95563de51335d3.png"/>
           <p:cNvPicPr>
             <a:picLocks noChangeAspect="1"/>
           </p:cNvPicPr>
@@ -10075,8 +10075,8 @@
         </p:blipFill>
         <p:spPr>
           <a:xfrm>
-            <a:off x="5375148" y="2103120"/>
-            <a:ext cx="1411224" cy="649224"/>
+            <a:off x="5301996" y="2103120"/>
+            <a:ext cx="1557528" cy="853440"/>
           </a:xfrm>
           <a:prstGeom prst="rect">
             <a:avLst/>
@@ -10091,7 +10091,7 @@
         </p:nvSpPr>
         <p:spPr>
           <a:xfrm>
-            <a:off x="777240" y="2980944"/>
+            <a:off x="777240" y="3185160"/>
             <a:ext cx="10607040" cy="465151"/>
           </a:xfrm>
           <a:prstGeom prst="rect">
@@ -10126,7 +10126,7 @@
         </p:nvSpPr>
         <p:spPr>
           <a:xfrm>
-            <a:off x="1874519" y="3647263"/>
+            <a:off x="1874519" y="3851479"/>
             <a:ext cx="4572000" cy="548640"/>
           </a:xfrm>
           <a:prstGeom prst="rect">
@@ -10179,7 +10179,7 @@
         </p:nvSpPr>
         <p:spPr>
           <a:xfrm>
-            <a:off x="6629400" y="3647263"/>
+            <a:off x="6629400" y="3851479"/>
             <a:ext cx="4572000" cy="548640"/>
           </a:xfrm>
           <a:prstGeom prst="rect">
@@ -10232,7 +10232,7 @@
         </p:nvSpPr>
         <p:spPr>
           <a:xfrm>
-            <a:off x="1874519" y="4333063"/>
+            <a:off x="1874519" y="4537279"/>
             <a:ext cx="4572000" cy="548640"/>
           </a:xfrm>
           <a:prstGeom prst="rect">
@@ -10285,7 +10285,7 @@
         </p:nvSpPr>
         <p:spPr>
           <a:xfrm>
-            <a:off x="6629400" y="4333063"/>
+            <a:off x="6629400" y="4537279"/>
             <a:ext cx="4572000" cy="548640"/>
           </a:xfrm>
           <a:prstGeom prst="rect">
@@ -10338,7 +10338,7 @@
         </p:nvSpPr>
         <p:spPr>
           <a:xfrm>
-            <a:off x="777240" y="5338903"/>
+            <a:off x="777240" y="5543119"/>
             <a:ext cx="10607040" cy="548640"/>
           </a:xfrm>
           <a:prstGeom prst="rect">
@@ -10639,7 +10639,7 @@
       </p:sp>
       <p:pic>
         <p:nvPicPr>
-          <p:cNvPr id="9" name="Picture 8" descr="4805e52056fb0236.png"/>
+          <p:cNvPr id="9" name="Picture 8" descr="e9242358ed1b2b8f.png"/>
           <p:cNvPicPr>
             <a:picLocks noChangeAspect="1"/>
           </p:cNvPicPr>
@@ -10653,8 +10653,8 @@
         </p:blipFill>
         <p:spPr>
           <a:xfrm>
-            <a:off x="4727448" y="2194560"/>
-            <a:ext cx="2706624" cy="658368"/>
+            <a:off x="4579620" y="2194560"/>
+            <a:ext cx="3002280" cy="871728"/>
           </a:xfrm>
           <a:prstGeom prst="rect">
             <a:avLst/>
@@ -10669,7 +10669,7 @@
         </p:nvSpPr>
         <p:spPr>
           <a:xfrm>
-            <a:off x="777240" y="3081528"/>
+            <a:off x="777240" y="3294888"/>
             <a:ext cx="10607040" cy="465151"/>
           </a:xfrm>
           <a:prstGeom prst="rect">
@@ -10704,7 +10704,7 @@
         </p:nvSpPr>
         <p:spPr>
           <a:xfrm>
-            <a:off x="1874519" y="3747847"/>
+            <a:off x="1874519" y="3961207"/>
             <a:ext cx="4572000" cy="548640"/>
           </a:xfrm>
           <a:prstGeom prst="rect">
@@ -10757,7 +10757,7 @@
         </p:nvSpPr>
         <p:spPr>
           <a:xfrm>
-            <a:off x="6629400" y="3747847"/>
+            <a:off x="6629400" y="3961207"/>
             <a:ext cx="4572000" cy="548640"/>
           </a:xfrm>
           <a:prstGeom prst="rect">
@@ -10810,7 +10810,7 @@
         </p:nvSpPr>
         <p:spPr>
           <a:xfrm>
-            <a:off x="1874519" y="4433647"/>
+            <a:off x="1874519" y="4647007"/>
             <a:ext cx="4572000" cy="548640"/>
           </a:xfrm>
           <a:prstGeom prst="rect">
@@ -10863,7 +10863,7 @@
         </p:nvSpPr>
         <p:spPr>
           <a:xfrm>
-            <a:off x="6629400" y="4433647"/>
+            <a:off x="6629400" y="4647007"/>
             <a:ext cx="4572000" cy="548640"/>
           </a:xfrm>
           <a:prstGeom prst="rect">
@@ -10916,7 +10916,7 @@
         </p:nvSpPr>
         <p:spPr>
           <a:xfrm>
-            <a:off x="777240" y="5439487"/>
+            <a:off x="777240" y="5652847"/>
             <a:ext cx="10607040" cy="457200"/>
           </a:xfrm>
           <a:prstGeom prst="rect">
@@ -11208,7 +11208,7 @@
       </p:sp>
       <p:pic>
         <p:nvPicPr>
-          <p:cNvPr id="9" name="Picture 8" descr="4805e52056fb0236.png"/>
+          <p:cNvPr id="9" name="Picture 8" descr="e9242358ed1b2b8f.png"/>
           <p:cNvPicPr>
             <a:picLocks noChangeAspect="1"/>
           </p:cNvPicPr>
@@ -11222,8 +11222,8 @@
         </p:blipFill>
         <p:spPr>
           <a:xfrm>
-            <a:off x="4727448" y="2103120"/>
-            <a:ext cx="2706624" cy="658368"/>
+            <a:off x="4579620" y="2103120"/>
+            <a:ext cx="3002280" cy="871728"/>
           </a:xfrm>
           <a:prstGeom prst="rect">
             <a:avLst/>
@@ -11238,7 +11238,7 @@
         </p:nvSpPr>
         <p:spPr>
           <a:xfrm>
-            <a:off x="777240" y="2990087"/>
+            <a:off x="777240" y="3203447"/>
             <a:ext cx="10607040" cy="465151"/>
           </a:xfrm>
           <a:prstGeom prst="rect">
@@ -11273,7 +11273,7 @@
         </p:nvSpPr>
         <p:spPr>
           <a:xfrm>
-            <a:off x="1874519" y="3656407"/>
+            <a:off x="1874519" y="3869767"/>
             <a:ext cx="4572000" cy="548640"/>
           </a:xfrm>
           <a:prstGeom prst="rect">
@@ -11326,7 +11326,7 @@
         </p:nvSpPr>
         <p:spPr>
           <a:xfrm>
-            <a:off x="6629400" y="3656407"/>
+            <a:off x="6629400" y="3869767"/>
             <a:ext cx="4572000" cy="548640"/>
           </a:xfrm>
           <a:prstGeom prst="rect">
@@ -11379,7 +11379,7 @@
         </p:nvSpPr>
         <p:spPr>
           <a:xfrm>
-            <a:off x="1874519" y="4342207"/>
+            <a:off x="1874519" y="4555567"/>
             <a:ext cx="4572000" cy="548640"/>
           </a:xfrm>
           <a:prstGeom prst="rect">
@@ -11432,7 +11432,7 @@
         </p:nvSpPr>
         <p:spPr>
           <a:xfrm>
-            <a:off x="6629400" y="4342207"/>
+            <a:off x="6629400" y="4555567"/>
             <a:ext cx="4572000" cy="548640"/>
           </a:xfrm>
           <a:prstGeom prst="rect">
@@ -11485,7 +11485,7 @@
         </p:nvSpPr>
         <p:spPr>
           <a:xfrm>
-            <a:off x="777240" y="5348047"/>
+            <a:off x="777240" y="5561407"/>
             <a:ext cx="10607040" cy="548640"/>
           </a:xfrm>
           <a:prstGeom prst="rect">
@@ -11786,7 +11786,7 @@
       </p:sp>
       <p:pic>
         <p:nvPicPr>
-          <p:cNvPr id="9" name="Picture 8" descr="a371fb833d68347b.png"/>
+          <p:cNvPr id="9" name="Picture 8" descr="983316d8a340e399.png"/>
           <p:cNvPicPr>
             <a:picLocks noChangeAspect="1"/>
           </p:cNvPicPr>
@@ -11800,8 +11800,8 @@
         </p:blipFill>
         <p:spPr>
           <a:xfrm>
-            <a:off x="4937759" y="2194560"/>
-            <a:ext cx="2286000" cy="661416"/>
+            <a:off x="4792980" y="2194560"/>
+            <a:ext cx="2575560" cy="877824"/>
           </a:xfrm>
           <a:prstGeom prst="rect">
             <a:avLst/>
@@ -12143,7 +12143,7 @@
       </p:sp>
       <p:pic>
         <p:nvPicPr>
-          <p:cNvPr id="9" name="Picture 8" descr="a371fb833d68347b.png"/>
+          <p:cNvPr id="9" name="Picture 8" descr="983316d8a340e399.png"/>
           <p:cNvPicPr>
             <a:picLocks noChangeAspect="1"/>
           </p:cNvPicPr>
@@ -12157,8 +12157,8 @@
         </p:blipFill>
         <p:spPr>
           <a:xfrm>
-            <a:off x="4937759" y="2103120"/>
-            <a:ext cx="2286000" cy="661416"/>
+            <a:off x="4792980" y="2103120"/>
+            <a:ext cx="2575560" cy="877824"/>
           </a:xfrm>
           <a:prstGeom prst="rect">
             <a:avLst/>
@@ -12173,7 +12173,7 @@
         </p:nvSpPr>
         <p:spPr>
           <a:xfrm>
-            <a:off x="1828800" y="3038856"/>
+            <a:off x="1828800" y="3255263"/>
             <a:ext cx="8503920" cy="548640"/>
           </a:xfrm>
           <a:prstGeom prst="rect">
@@ -12253,7 +12253,7 @@
         </p:nvSpPr>
         <p:spPr>
           <a:xfrm>
-            <a:off x="4940808" y="4712208"/>
+            <a:off x="4864607" y="4820412"/>
             <a:ext cx="1920240" cy="548640"/>
           </a:xfrm>
           <a:prstGeom prst="rect">
@@ -12282,7 +12282,7 @@
       </p:sp>
       <p:pic>
         <p:nvPicPr>
-          <p:cNvPr id="12" name="Picture 11" descr="377fd0808a285487.png"/>
+          <p:cNvPr id="12" name="Picture 11" descr="c37c2f03a9ba8642.png"/>
           <p:cNvPicPr>
             <a:picLocks noChangeAspect="1"/>
           </p:cNvPicPr>
@@ -12296,8 +12296,8 @@
         </p:blipFill>
         <p:spPr>
           <a:xfrm>
-            <a:off x="6861048" y="4663440"/>
-            <a:ext cx="359664" cy="646176"/>
+            <a:off x="6784848" y="4663440"/>
+            <a:ext cx="512064" cy="862584"/>
           </a:xfrm>
           <a:prstGeom prst="rect">
             <a:avLst/>
@@ -12569,7 +12569,7 @@
       </p:sp>
       <p:pic>
         <p:nvPicPr>
-          <p:cNvPr id="9" name="Picture 8" descr="841bc461cea07914.png"/>
+          <p:cNvPr id="9" name="Picture 8" descr="c18abdc6135bde12.png"/>
           <p:cNvPicPr>
             <a:picLocks noChangeAspect="1"/>
           </p:cNvPicPr>
@@ -12583,8 +12583,8 @@
         </p:blipFill>
         <p:spPr>
           <a:xfrm>
-            <a:off x="4642104" y="2194560"/>
-            <a:ext cx="2877312" cy="649224"/>
+            <a:off x="4486656" y="2194560"/>
+            <a:ext cx="3188208" cy="856488"/>
           </a:xfrm>
           <a:prstGeom prst="rect">
             <a:avLst/>
@@ -12933,7 +12933,7 @@
         <p:spPr>
           <a:xfrm>
             <a:off x="1874519" y="1760220"/>
-            <a:ext cx="3551936" cy="457200"/>
+            <a:ext cx="3058734" cy="457200"/>
           </a:xfrm>
           <a:prstGeom prst="rect">
             <a:avLst/>
@@ -12942,7 +12942,7 @@
         </p:spPr>
         <p:txBody>
           <a:bodyPr wrap="none" lIns="45720" rIns="45720" tIns="18288" bIns="18288" anchor="ctr">
-            <a:spAutoFit/>
+            <a:noAutofit/>
           </a:bodyPr>
           <a:lstStyle/>
           <a:p>
@@ -12975,7 +12975,7 @@
         </p:blipFill>
         <p:spPr>
           <a:xfrm>
-            <a:off x="5289296" y="1851660"/>
+            <a:off x="4796094" y="1851660"/>
             <a:ext cx="417576" cy="274320"/>
           </a:xfrm>
           <a:prstGeom prst="rect">
@@ -12985,7 +12985,7 @@
       </p:pic>
       <p:pic>
         <p:nvPicPr>
-          <p:cNvPr id="11" name="Picture 10" descr="5392bc2de2d7921b.png"/>
+          <p:cNvPr id="11" name="Picture 10" descr="0f45754c59884ba0.png"/>
           <p:cNvPicPr>
             <a:picLocks noChangeAspect="1"/>
           </p:cNvPicPr>
@@ -12999,8 +12999,8 @@
         </p:blipFill>
         <p:spPr>
           <a:xfrm>
-            <a:off x="6255512" y="1783080"/>
-            <a:ext cx="118872" cy="420624"/>
+            <a:off x="5762310" y="1783080"/>
+            <a:ext cx="170688" cy="554736"/>
           </a:xfrm>
           <a:prstGeom prst="rect">
             <a:avLst/>
@@ -13015,8 +13015,8 @@
         </p:nvSpPr>
         <p:spPr>
           <a:xfrm>
-            <a:off x="1874519" y="2395728"/>
-            <a:ext cx="6285992" cy="457200"/>
+            <a:off x="1874519" y="2468880"/>
+            <a:ext cx="5677198" cy="457200"/>
           </a:xfrm>
           <a:prstGeom prst="rect">
             <a:avLst/>
@@ -13025,7 +13025,7 @@
         </p:spPr>
         <p:txBody>
           <a:bodyPr wrap="none" lIns="45720" rIns="45720" tIns="18288" bIns="18288" anchor="ctr">
-            <a:spAutoFit/>
+            <a:noAutofit/>
           </a:bodyPr>
           <a:lstStyle/>
           <a:p>
@@ -13044,7 +13044,7 @@
       </p:sp>
       <p:pic>
         <p:nvPicPr>
-          <p:cNvPr id="13" name="Picture 12" descr="37c17cda3a3954ed.png"/>
+          <p:cNvPr id="13" name="Picture 12" descr="82be0161615a5d7f.png"/>
           <p:cNvPicPr>
             <a:picLocks noChangeAspect="1"/>
           </p:cNvPicPr>
@@ -13058,8 +13058,8 @@
         </p:blipFill>
         <p:spPr>
           <a:xfrm>
-            <a:off x="8023352" y="2395728"/>
-            <a:ext cx="326136" cy="457200"/>
+            <a:off x="7414558" y="2395728"/>
+            <a:ext cx="463296" cy="603504"/>
           </a:xfrm>
           <a:prstGeom prst="rect">
             <a:avLst/>
@@ -13082,7 +13082,7 @@
         </p:blipFill>
         <p:spPr>
           <a:xfrm>
-            <a:off x="8898127" y="2462784"/>
+            <a:off x="8426494" y="2462784"/>
             <a:ext cx="271272" cy="277368"/>
           </a:xfrm>
           <a:prstGeom prst="rect">
@@ -13098,8 +13098,8 @@
         </p:nvSpPr>
         <p:spPr>
           <a:xfrm>
-            <a:off x="1874519" y="3031236"/>
-            <a:ext cx="3551936" cy="457200"/>
+            <a:off x="1874519" y="3177540"/>
+            <a:ext cx="3065570" cy="457200"/>
           </a:xfrm>
           <a:prstGeom prst="rect">
             <a:avLst/>
@@ -13108,7 +13108,7 @@
         </p:spPr>
         <p:txBody>
           <a:bodyPr wrap="none" lIns="45720" rIns="45720" tIns="18288" bIns="18288" anchor="ctr">
-            <a:spAutoFit/>
+            <a:noAutofit/>
           </a:bodyPr>
           <a:lstStyle/>
           <a:p>
@@ -13141,7 +13141,7 @@
         </p:blipFill>
         <p:spPr>
           <a:xfrm>
-            <a:off x="5289296" y="3122676"/>
+            <a:off x="4802930" y="3268980"/>
             <a:ext cx="265176" cy="274320"/>
           </a:xfrm>
           <a:prstGeom prst="rect">
@@ -13157,8 +13157,8 @@
         </p:nvSpPr>
         <p:spPr>
           <a:xfrm>
-            <a:off x="5554472" y="3031236"/>
-            <a:ext cx="817879" cy="457200"/>
+            <a:off x="5068106" y="3177540"/>
+            <a:ext cx="674751" cy="457200"/>
           </a:xfrm>
           <a:prstGeom prst="rect">
             <a:avLst/>
@@ -13167,7 +13167,7 @@
         </p:spPr>
         <p:txBody>
           <a:bodyPr wrap="none" lIns="45720" rIns="45720" tIns="18288" bIns="18288" anchor="ctr">
-            <a:spAutoFit/>
+            <a:noAutofit/>
           </a:bodyPr>
           <a:lstStyle/>
           <a:p>
@@ -13200,7 +13200,7 @@
         </p:blipFill>
         <p:spPr>
           <a:xfrm>
-            <a:off x="6235192" y="3118104"/>
+            <a:off x="5605697" y="3264408"/>
             <a:ext cx="265176" cy="283464"/>
           </a:xfrm>
           <a:prstGeom prst="rect">
@@ -13216,8 +13216,8 @@
         </p:nvSpPr>
         <p:spPr>
           <a:xfrm>
-            <a:off x="6500368" y="3031236"/>
-            <a:ext cx="362204" cy="457200"/>
+            <a:off x="5870873" y="3177540"/>
+            <a:ext cx="347771" cy="457200"/>
           </a:xfrm>
           <a:prstGeom prst="rect">
             <a:avLst/>
@@ -13226,7 +13226,7 @@
         </p:spPr>
         <p:txBody>
           <a:bodyPr wrap="none" lIns="45720" rIns="45720" tIns="18288" bIns="18288" anchor="ctr">
-            <a:spAutoFit/>
+            <a:noAutofit/>
           </a:bodyPr>
           <a:lstStyle/>
           <a:p>
@@ -13259,7 +13259,7 @@
         </p:blipFill>
         <p:spPr>
           <a:xfrm>
-            <a:off x="7274052" y="3118104"/>
+            <a:off x="6630125" y="3264408"/>
             <a:ext cx="265176" cy="283464"/>
           </a:xfrm>
           <a:prstGeom prst="rect">
@@ -13275,8 +13275,8 @@
         </p:nvSpPr>
         <p:spPr>
           <a:xfrm>
-            <a:off x="7539227" y="3031236"/>
-            <a:ext cx="1904492" cy="457200"/>
+            <a:off x="6895301" y="3177540"/>
+            <a:ext cx="1616354" cy="457200"/>
           </a:xfrm>
           <a:prstGeom prst="rect">
             <a:avLst/>
@@ -13285,7 +13285,7 @@
         </p:spPr>
         <p:txBody>
           <a:bodyPr wrap="none" lIns="45720" rIns="45720" tIns="18288" bIns="18288" anchor="ctr">
-            <a:spAutoFit/>
+            <a:noAutofit/>
           </a:bodyPr>
           <a:lstStyle/>
           <a:p>
@@ -13310,8 +13310,8 @@
         </p:nvSpPr>
         <p:spPr>
           <a:xfrm>
-            <a:off x="1874519" y="3649980"/>
-            <a:ext cx="4767072" cy="457200"/>
+            <a:off x="1874519" y="3863340"/>
+            <a:ext cx="4084107" cy="457200"/>
           </a:xfrm>
           <a:prstGeom prst="rect">
             <a:avLst/>
@@ -13320,7 +13320,7 @@
         </p:spPr>
         <p:txBody>
           <a:bodyPr wrap="none" lIns="45720" rIns="45720" tIns="18288" bIns="18288" anchor="ctr">
-            <a:spAutoFit/>
+            <a:noAutofit/>
           </a:bodyPr>
           <a:lstStyle/>
           <a:p>
@@ -13339,7 +13339,7 @@
       </p:sp>
       <p:pic>
         <p:nvPicPr>
-          <p:cNvPr id="23" name="Picture 22" descr="e8053e529bf5330f.png"/>
+          <p:cNvPr id="23" name="Picture 22" descr="e5446a4e89f9a3af.png"/>
           <p:cNvPicPr>
             <a:picLocks noChangeAspect="1"/>
           </p:cNvPicPr>
@@ -13353,8 +13353,8 @@
         </p:blipFill>
         <p:spPr>
           <a:xfrm>
-            <a:off x="6504432" y="3666744"/>
-            <a:ext cx="329184" cy="423672"/>
+            <a:off x="5821467" y="3813048"/>
+            <a:ext cx="377952" cy="557784"/>
           </a:xfrm>
           <a:prstGeom prst="rect">
             <a:avLst/>
@@ -13363,7 +13363,7 @@
       </p:pic>
       <p:pic>
         <p:nvPicPr>
-          <p:cNvPr id="24" name="Picture 23" descr="d51f16306963751d.png"/>
+          <p:cNvPr id="24" name="Picture 23" descr="84c4e18228051985.png"/>
           <p:cNvPicPr>
             <a:picLocks noChangeAspect="1"/>
           </p:cNvPicPr>
@@ -13377,8 +13377,8 @@
         </p:blipFill>
         <p:spPr>
           <a:xfrm>
-            <a:off x="7382256" y="3666744"/>
-            <a:ext cx="329184" cy="420624"/>
+            <a:off x="6748059" y="3813048"/>
+            <a:ext cx="377952" cy="557784"/>
           </a:xfrm>
           <a:prstGeom prst="rect">
             <a:avLst/>
@@ -13650,7 +13650,7 @@
       </p:sp>
       <p:pic>
         <p:nvPicPr>
-          <p:cNvPr id="9" name="Picture 8" descr="841bc461cea07914.png"/>
+          <p:cNvPr id="9" name="Picture 8" descr="c18abdc6135bde12.png"/>
           <p:cNvPicPr>
             <a:picLocks noChangeAspect="1"/>
           </p:cNvPicPr>
@@ -13664,8 +13664,8 @@
         </p:blipFill>
         <p:spPr>
           <a:xfrm>
-            <a:off x="4642104" y="2103120"/>
-            <a:ext cx="2877312" cy="649224"/>
+            <a:off x="4486656" y="2103120"/>
+            <a:ext cx="3188208" cy="856488"/>
           </a:xfrm>
           <a:prstGeom prst="rect">
             <a:avLst/>
@@ -13680,7 +13680,7 @@
         </p:nvSpPr>
         <p:spPr>
           <a:xfrm>
-            <a:off x="1828800" y="3026663"/>
+            <a:off x="1828800" y="3233927"/>
             <a:ext cx="8503920" cy="548640"/>
           </a:xfrm>
           <a:prstGeom prst="rect">
@@ -13733,7 +13733,7 @@
         </p:nvSpPr>
         <p:spPr>
           <a:xfrm>
-            <a:off x="4706112" y="4713731"/>
+            <a:off x="4632960" y="4815840"/>
             <a:ext cx="1920240" cy="548640"/>
           </a:xfrm>
           <a:prstGeom prst="rect">
@@ -13762,7 +13762,7 @@
       </p:sp>
       <p:pic>
         <p:nvPicPr>
-          <p:cNvPr id="12" name="Picture 11" descr="e472ed1d39f0c4a0.png"/>
+          <p:cNvPr id="12" name="Picture 11" descr="2e17728107926c07.png"/>
           <p:cNvPicPr>
             <a:picLocks noChangeAspect="1"/>
           </p:cNvPicPr>
@@ -13776,8 +13776,8 @@
         </p:blipFill>
         <p:spPr>
           <a:xfrm>
-            <a:off x="6626351" y="4663440"/>
-            <a:ext cx="829056" cy="649224"/>
+            <a:off x="6553199" y="4663440"/>
+            <a:ext cx="975360" cy="853440"/>
           </a:xfrm>
           <a:prstGeom prst="rect">
             <a:avLst/>
@@ -14055,8 +14055,8 @@
         </p:nvSpPr>
         <p:spPr>
           <a:xfrm>
-            <a:off x="2111248" y="2223516"/>
-            <a:ext cx="2270760" cy="457200"/>
+            <a:off x="2253551" y="2304288"/>
+            <a:ext cx="2202162" cy="457200"/>
           </a:xfrm>
           <a:prstGeom prst="rect">
             <a:avLst/>
@@ -14065,7 +14065,7 @@
         </p:spPr>
         <p:txBody>
           <a:bodyPr wrap="none" lIns="45720" rIns="45720" tIns="18288" bIns="18288" anchor="ctr">
-            <a:spAutoFit/>
+            <a:noAutofit/>
           </a:bodyPr>
           <a:lstStyle/>
           <a:p>
@@ -14084,7 +14084,7 @@
       </p:sp>
       <p:pic>
         <p:nvPicPr>
-          <p:cNvPr id="10" name="Picture 9" descr="fc8a1ed7dd08188d.png"/>
+          <p:cNvPr id="10" name="Picture 9" descr="bcbcbf803cfe7ecd.png"/>
           <p:cNvPicPr>
             <a:picLocks noChangeAspect="1"/>
           </p:cNvPicPr>
@@ -14098,8 +14098,8 @@
         </p:blipFill>
         <p:spPr>
           <a:xfrm>
-            <a:off x="4244848" y="2194560"/>
-            <a:ext cx="1127760" cy="515112"/>
+            <a:off x="4318553" y="2194560"/>
+            <a:ext cx="1246632" cy="676656"/>
           </a:xfrm>
           <a:prstGeom prst="rect">
             <a:avLst/>
@@ -14114,8 +14114,8 @@
         </p:nvSpPr>
         <p:spPr>
           <a:xfrm>
-            <a:off x="5372608" y="2223516"/>
-            <a:ext cx="4159504" cy="457200"/>
+            <a:off x="5565185" y="2304288"/>
+            <a:ext cx="3705751" cy="457200"/>
           </a:xfrm>
           <a:prstGeom prst="rect">
             <a:avLst/>
@@ -14124,7 +14124,7 @@
         </p:spPr>
         <p:txBody>
           <a:bodyPr wrap="none" lIns="45720" rIns="45720" tIns="18288" bIns="18288" anchor="ctr">
-            <a:spAutoFit/>
+            <a:noAutofit/>
           </a:bodyPr>
           <a:lstStyle/>
           <a:p>
@@ -14143,7 +14143,7 @@
       </p:sp>
       <p:pic>
         <p:nvPicPr>
-          <p:cNvPr id="12" name="Picture 11" descr="74d02f0e2d6650da.png"/>
+          <p:cNvPr id="12" name="Picture 11" descr="9b43b28c9551277e.png"/>
           <p:cNvPicPr>
             <a:picLocks noChangeAspect="1"/>
           </p:cNvPicPr>
@@ -14157,8 +14157,8 @@
         </p:blipFill>
         <p:spPr>
           <a:xfrm>
-            <a:off x="9394952" y="2194560"/>
-            <a:ext cx="655320" cy="515112"/>
+            <a:off x="9133776" y="2194560"/>
+            <a:ext cx="774192" cy="676656"/>
           </a:xfrm>
           <a:prstGeom prst="rect">
             <a:avLst/>
@@ -14173,7 +14173,7 @@
         </p:nvSpPr>
         <p:spPr>
           <a:xfrm>
-            <a:off x="777240" y="2983992"/>
+            <a:off x="777240" y="3145535"/>
             <a:ext cx="10607040" cy="465151"/>
           </a:xfrm>
           <a:prstGeom prst="rect">
@@ -14541,8 +14541,8 @@
         </p:nvSpPr>
         <p:spPr>
           <a:xfrm>
-            <a:off x="2111248" y="2132076"/>
-            <a:ext cx="2270760" cy="457200"/>
+            <a:off x="2253551" y="2212848"/>
+            <a:ext cx="2202162" cy="457200"/>
           </a:xfrm>
           <a:prstGeom prst="rect">
             <a:avLst/>
@@ -14551,7 +14551,7 @@
         </p:spPr>
         <p:txBody>
           <a:bodyPr wrap="none" lIns="45720" rIns="45720" tIns="18288" bIns="18288" anchor="ctr">
-            <a:spAutoFit/>
+            <a:noAutofit/>
           </a:bodyPr>
           <a:lstStyle/>
           <a:p>
@@ -14570,7 +14570,7 @@
       </p:sp>
       <p:pic>
         <p:nvPicPr>
-          <p:cNvPr id="10" name="Picture 9" descr="fc8a1ed7dd08188d.png"/>
+          <p:cNvPr id="10" name="Picture 9" descr="bcbcbf803cfe7ecd.png"/>
           <p:cNvPicPr>
             <a:picLocks noChangeAspect="1"/>
           </p:cNvPicPr>
@@ -14584,8 +14584,8 @@
         </p:blipFill>
         <p:spPr>
           <a:xfrm>
-            <a:off x="4244848" y="2103120"/>
-            <a:ext cx="1127760" cy="515112"/>
+            <a:off x="4318553" y="2103120"/>
+            <a:ext cx="1246632" cy="676656"/>
           </a:xfrm>
           <a:prstGeom prst="rect">
             <a:avLst/>
@@ -14600,8 +14600,8 @@
         </p:nvSpPr>
         <p:spPr>
           <a:xfrm>
-            <a:off x="5372608" y="2132076"/>
-            <a:ext cx="4159504" cy="457200"/>
+            <a:off x="5565185" y="2212848"/>
+            <a:ext cx="3705751" cy="457200"/>
           </a:xfrm>
           <a:prstGeom prst="rect">
             <a:avLst/>
@@ -14610,7 +14610,7 @@
         </p:spPr>
         <p:txBody>
           <a:bodyPr wrap="none" lIns="45720" rIns="45720" tIns="18288" bIns="18288" anchor="ctr">
-            <a:spAutoFit/>
+            <a:noAutofit/>
           </a:bodyPr>
           <a:lstStyle/>
           <a:p>
@@ -14629,7 +14629,7 @@
       </p:sp>
       <p:pic>
         <p:nvPicPr>
-          <p:cNvPr id="12" name="Picture 11" descr="74d02f0e2d6650da.png"/>
+          <p:cNvPr id="12" name="Picture 11" descr="9b43b28c9551277e.png"/>
           <p:cNvPicPr>
             <a:picLocks noChangeAspect="1"/>
           </p:cNvPicPr>
@@ -14643,8 +14643,8 @@
         </p:blipFill>
         <p:spPr>
           <a:xfrm>
-            <a:off x="9394952" y="2103120"/>
-            <a:ext cx="655320" cy="515112"/>
+            <a:off x="9133776" y="2103120"/>
+            <a:ext cx="774192" cy="676656"/>
           </a:xfrm>
           <a:prstGeom prst="rect">
             <a:avLst/>
@@ -14659,7 +14659,7 @@
         </p:nvSpPr>
         <p:spPr>
           <a:xfrm>
-            <a:off x="777240" y="2892552"/>
+            <a:off x="777240" y="3054096"/>
             <a:ext cx="10607040" cy="465151"/>
           </a:xfrm>
           <a:prstGeom prst="rect">
@@ -14694,7 +14694,7 @@
         </p:nvSpPr>
         <p:spPr>
           <a:xfrm>
-            <a:off x="1828800" y="3513151"/>
+            <a:off x="1828800" y="3674695"/>
             <a:ext cx="8503920" cy="548640"/>
           </a:xfrm>
           <a:prstGeom prst="rect">
@@ -17362,7 +17362,7 @@
       </p:cxnSp>
       <p:pic>
         <p:nvPicPr>
-          <p:cNvPr id="10" name="Picture 9" descr="f32a293cd16e3f1a.png"/>
+          <p:cNvPr id="10" name="Picture 9" descr="250f758fe051adf5.png"/>
           <p:cNvPicPr>
             <a:picLocks noChangeAspect="1"/>
           </p:cNvPicPr>
@@ -17376,8 +17376,8 @@
         </p:blipFill>
         <p:spPr>
           <a:xfrm>
-            <a:off x="3438144" y="2340864"/>
-            <a:ext cx="1929384" cy="524256"/>
+            <a:off x="3761785" y="2340864"/>
+            <a:ext cx="2136648" cy="694944"/>
           </a:xfrm>
           <a:prstGeom prst="rect">
             <a:avLst/>
@@ -17392,8 +17392,8 @@
         </p:nvSpPr>
         <p:spPr>
           <a:xfrm>
-            <a:off x="5367527" y="2374392"/>
-            <a:ext cx="2099056" cy="457200"/>
+            <a:off x="5898433" y="2459736"/>
+            <a:ext cx="1299682" cy="457200"/>
           </a:xfrm>
           <a:prstGeom prst="rect">
             <a:avLst/>
@@ -17402,7 +17402,7 @@
         </p:spPr>
         <p:txBody>
           <a:bodyPr wrap="none" lIns="45720" rIns="45720" tIns="18288" bIns="18288" anchor="ctr">
-            <a:spAutoFit/>
+            <a:noAutofit/>
           </a:bodyPr>
           <a:lstStyle/>
           <a:p>
@@ -17435,7 +17435,7 @@
         </p:blipFill>
         <p:spPr>
           <a:xfrm>
-            <a:off x="7329423" y="2432304"/>
+            <a:off x="7060955" y="2517648"/>
             <a:ext cx="1149096" cy="341376"/>
           </a:xfrm>
           <a:prstGeom prst="rect">
@@ -17451,8 +17451,8 @@
         </p:nvSpPr>
         <p:spPr>
           <a:xfrm>
-            <a:off x="8478519" y="2374392"/>
-            <a:ext cx="382016" cy="457200"/>
+            <a:off x="8210051" y="2459736"/>
+            <a:ext cx="326842" cy="457200"/>
           </a:xfrm>
           <a:prstGeom prst="rect">
             <a:avLst/>
@@ -17461,7 +17461,7 @@
         </p:spPr>
         <p:txBody>
           <a:bodyPr wrap="none" lIns="45720" rIns="45720" tIns="18288" bIns="18288" anchor="ctr">
-            <a:spAutoFit/>
+            <a:noAutofit/>
           </a:bodyPr>
           <a:lstStyle/>
           <a:p>
@@ -17480,7 +17480,7 @@
       </p:sp>
       <p:pic>
         <p:nvPicPr>
-          <p:cNvPr id="14" name="Picture 13" descr="4df30392cf54eeb9.png"/>
+          <p:cNvPr id="14" name="Picture 13" descr="fdfb3bffd237f41c.png"/>
           <p:cNvPicPr>
             <a:picLocks noChangeAspect="1"/>
           </p:cNvPicPr>
@@ -17494,8 +17494,8 @@
         </p:blipFill>
         <p:spPr>
           <a:xfrm>
-            <a:off x="2546095" y="3139440"/>
-            <a:ext cx="2724912" cy="530352"/>
+            <a:off x="2630160" y="3310128"/>
+            <a:ext cx="3075432" cy="691896"/>
           </a:xfrm>
           <a:prstGeom prst="rect">
             <a:avLst/>
@@ -17510,8 +17510,8 @@
         </p:nvSpPr>
         <p:spPr>
           <a:xfrm>
-            <a:off x="5271008" y="3176016"/>
-            <a:ext cx="1927352" cy="457200"/>
+            <a:off x="5705592" y="3427476"/>
+            <a:ext cx="1183151" cy="457200"/>
           </a:xfrm>
           <a:prstGeom prst="rect">
             <a:avLst/>
@@ -17520,7 +17520,7 @@
         </p:spPr>
         <p:txBody>
           <a:bodyPr wrap="none" lIns="45720" rIns="45720" tIns="18288" bIns="18288" anchor="ctr">
-            <a:spAutoFit/>
+            <a:noAutofit/>
           </a:bodyPr>
           <a:lstStyle/>
           <a:p>
@@ -17539,7 +17539,7 @@
       </p:sp>
       <p:pic>
         <p:nvPicPr>
-          <p:cNvPr id="16" name="Picture 15" descr="999eb572a3bddd53.png"/>
+          <p:cNvPr id="16" name="Picture 15" descr="a048de6488523f64.png"/>
           <p:cNvPicPr>
             <a:picLocks noChangeAspect="1"/>
           </p:cNvPicPr>
@@ -17553,8 +17553,8 @@
         </p:blipFill>
         <p:spPr>
           <a:xfrm>
-            <a:off x="7061199" y="3145536"/>
-            <a:ext cx="2554224" cy="518160"/>
+            <a:off x="6751583" y="3316224"/>
+            <a:ext cx="2779776" cy="679704"/>
           </a:xfrm>
           <a:prstGeom prst="rect">
             <a:avLst/>
@@ -17569,7 +17569,7 @@
         </p:nvSpPr>
         <p:spPr>
           <a:xfrm>
-            <a:off x="987552" y="4008119"/>
+            <a:off x="987552" y="4340352"/>
             <a:ext cx="10131551" cy="475488"/>
           </a:xfrm>
           <a:prstGeom prst="rect">
@@ -17604,8 +17604,8 @@
         </p:nvSpPr>
         <p:spPr>
           <a:xfrm>
-            <a:off x="987552" y="4750307"/>
-            <a:ext cx="5982208" cy="457200"/>
+            <a:off x="987552" y="5163312"/>
+            <a:ext cx="5545365" cy="457200"/>
           </a:xfrm>
           <a:prstGeom prst="rect">
             <a:avLst/>
@@ -17614,7 +17614,7 @@
         </p:spPr>
         <p:txBody>
           <a:bodyPr wrap="none" lIns="45720" rIns="45720" tIns="18288" bIns="18288" anchor="ctr">
-            <a:spAutoFit/>
+            <a:noAutofit/>
           </a:bodyPr>
           <a:lstStyle/>
           <a:p>
@@ -17633,7 +17633,7 @@
       </p:sp>
       <p:pic>
         <p:nvPicPr>
-          <p:cNvPr id="19" name="Picture 18" descr="fbbebe8d00bd196d.png"/>
+          <p:cNvPr id="19" name="Picture 18" descr="2071a168bc27be10.png"/>
           <p:cNvPicPr>
             <a:picLocks noChangeAspect="1"/>
           </p:cNvPicPr>
@@ -17647,8 +17647,8 @@
         </p:blipFill>
         <p:spPr>
           <a:xfrm>
-            <a:off x="6832600" y="4721351"/>
-            <a:ext cx="3008376" cy="515112"/>
+            <a:off x="6395757" y="5053584"/>
+            <a:ext cx="3224784" cy="676656"/>
           </a:xfrm>
           <a:prstGeom prst="rect">
             <a:avLst/>
@@ -17955,7 +17955,7 @@
       </p:cxnSp>
       <p:pic>
         <p:nvPicPr>
-          <p:cNvPr id="10" name="Picture 9" descr="012867de7e9fcfe3.png"/>
+          <p:cNvPr id="10" name="Picture 9" descr="db66c38b65bd5778.png"/>
           <p:cNvPicPr>
             <a:picLocks noChangeAspect="1"/>
           </p:cNvPicPr>
@@ -17969,8 +17969,8 @@
         </p:blipFill>
         <p:spPr>
           <a:xfrm>
-            <a:off x="2391156" y="2340864"/>
-            <a:ext cx="7379208" cy="609600"/>
+            <a:off x="2075688" y="2340864"/>
+            <a:ext cx="8010144" cy="816864"/>
           </a:xfrm>
           <a:prstGeom prst="rect">
             <a:avLst/>
@@ -17985,7 +17985,7 @@
         </p:nvSpPr>
         <p:spPr>
           <a:xfrm>
-            <a:off x="987552" y="3288791"/>
+            <a:off x="987552" y="3496055"/>
             <a:ext cx="10131551" cy="475488"/>
           </a:xfrm>
           <a:prstGeom prst="rect">
@@ -18277,7 +18277,7 @@
       </p:sp>
       <p:pic>
         <p:nvPicPr>
-          <p:cNvPr id="9" name="Picture 8" descr="e59d67251576d050.png"/>
+          <p:cNvPr id="9" name="Picture 8" descr="9ed1bed15013a3f1.png"/>
           <p:cNvPicPr>
             <a:picLocks noChangeAspect="1"/>
           </p:cNvPicPr>
@@ -18291,8 +18291,8 @@
         </p:blipFill>
         <p:spPr>
           <a:xfrm>
-            <a:off x="5510784" y="2103120"/>
-            <a:ext cx="1139952" cy="515112"/>
+            <a:off x="5451347" y="2103120"/>
+            <a:ext cx="1258824" cy="676656"/>
           </a:xfrm>
           <a:prstGeom prst="rect">
             <a:avLst/>
@@ -18307,7 +18307,7 @@
         </p:nvSpPr>
         <p:spPr>
           <a:xfrm>
-            <a:off x="777240" y="3121152"/>
+            <a:off x="777240" y="3282696"/>
             <a:ext cx="10607040" cy="429370"/>
           </a:xfrm>
           <a:prstGeom prst="rect">
@@ -18599,7 +18599,7 @@
       </p:sp>
       <p:pic>
         <p:nvPicPr>
-          <p:cNvPr id="9" name="Picture 8" descr="6462a303f5c59a05.png"/>
+          <p:cNvPr id="9" name="Picture 8" descr="7b2b3d6125a7d80c.png"/>
           <p:cNvPicPr>
             <a:picLocks noChangeAspect="1"/>
           </p:cNvPicPr>
@@ -18614,7 +18614,7 @@
         <p:spPr>
           <a:xfrm>
             <a:off x="1828800" y="1920240"/>
-            <a:ext cx="2566416" cy="524256"/>
+            <a:ext cx="2791968" cy="685800"/>
           </a:xfrm>
           <a:prstGeom prst="rect">
             <a:avLst/>
@@ -18629,8 +18629,8 @@
         </p:nvSpPr>
         <p:spPr>
           <a:xfrm>
-            <a:off x="4852416" y="1953768"/>
-            <a:ext cx="6400800" cy="502920"/>
+            <a:off x="5077967" y="2034540"/>
+            <a:ext cx="6306312" cy="502920"/>
           </a:xfrm>
           <a:prstGeom prst="rect">
             <a:avLst/>
@@ -18658,7 +18658,7 @@
       </p:sp>
       <p:pic>
         <p:nvPicPr>
-          <p:cNvPr id="11" name="Picture 10" descr="c394fe297b9bba2b.png"/>
+          <p:cNvPr id="11" name="Picture 10" descr="e24c31941ca2fecb.png"/>
           <p:cNvPicPr>
             <a:picLocks noChangeAspect="1"/>
           </p:cNvPicPr>
@@ -18672,8 +18672,8 @@
         </p:blipFill>
         <p:spPr>
           <a:xfrm>
-            <a:off x="1828800" y="2718816"/>
-            <a:ext cx="1655064" cy="530352"/>
+            <a:off x="1828800" y="2880360"/>
+            <a:ext cx="1895856" cy="697992"/>
           </a:xfrm>
           <a:prstGeom prst="rect">
             <a:avLst/>
@@ -18688,7 +18688,7 @@
         </p:nvSpPr>
         <p:spPr>
           <a:xfrm>
-            <a:off x="3941064" y="2755392"/>
+            <a:off x="4181856" y="3000756"/>
             <a:ext cx="6400800" cy="502920"/>
           </a:xfrm>
           <a:prstGeom prst="rect">
@@ -19015,7 +19015,7 @@
       </p:sp>
       <p:pic>
         <p:nvPicPr>
-          <p:cNvPr id="9" name="Picture 8" descr="aaa1dfcd273e9206.png"/>
+          <p:cNvPr id="9" name="Picture 8" descr="a7f1f688f77ec613.png"/>
           <p:cNvPicPr>
             <a:picLocks noChangeAspect="1"/>
           </p:cNvPicPr>
@@ -19029,8 +19029,8 @@
         </p:blipFill>
         <p:spPr>
           <a:xfrm>
-            <a:off x="5373623" y="2194560"/>
-            <a:ext cx="1414272" cy="649224"/>
+            <a:off x="5298948" y="2194560"/>
+            <a:ext cx="1563624" cy="862584"/>
           </a:xfrm>
           <a:prstGeom prst="rect">
             <a:avLst/>

--- a/a7/build/out/u3/A7 3.05  Slides.pptx
+++ b/a7/build/out/u3/A7 3.05  Slides.pptx
@@ -3817,7 +3817,7 @@
       </p:sp>
       <p:pic>
         <p:nvPicPr>
-          <p:cNvPr id="9" name="Picture 8" descr="a7f1f688f77ec613.png"/>
+          <p:cNvPr id="9" name="Picture 8" descr="9b72eb366786e7f7.png"/>
           <p:cNvPicPr>
             <a:picLocks noChangeAspect="1"/>
           </p:cNvPicPr>
@@ -3831,8 +3831,8 @@
         </p:blipFill>
         <p:spPr>
           <a:xfrm>
-            <a:off x="5298948" y="2194560"/>
-            <a:ext cx="1563624" cy="862584"/>
+            <a:off x="5297424" y="2194560"/>
+            <a:ext cx="1566672" cy="862584"/>
           </a:xfrm>
           <a:prstGeom prst="rect">
             <a:avLst/>
@@ -4538,7 +4538,7 @@
       </p:sp>
       <p:pic>
         <p:nvPicPr>
-          <p:cNvPr id="9" name="Picture 8" descr="db559d4d2a359eb5.png"/>
+          <p:cNvPr id="9" name="Picture 8" descr="4608ef90342adf85.png"/>
           <p:cNvPicPr>
             <a:picLocks noChangeAspect="1"/>
           </p:cNvPicPr>
@@ -4553,7 +4553,7 @@
         <p:spPr>
           <a:xfrm>
             <a:off x="1828800" y="1920240"/>
-            <a:ext cx="5227320" cy="691896"/>
+            <a:ext cx="5245608" cy="694944"/>
           </a:xfrm>
           <a:prstGeom prst="rect">
             <a:avLst/>
@@ -4568,8 +4568,8 @@
         </p:nvSpPr>
         <p:spPr>
           <a:xfrm>
-            <a:off x="7513320" y="2037588"/>
-            <a:ext cx="3870959" cy="502920"/>
+            <a:off x="7531608" y="2039112"/>
+            <a:ext cx="3852671" cy="502920"/>
           </a:xfrm>
           <a:prstGeom prst="rect">
             <a:avLst/>
@@ -4597,7 +4597,7 @@
       </p:sp>
       <p:pic>
         <p:nvPicPr>
-          <p:cNvPr id="11" name="Picture 10" descr="49a689f73e6d36b0.png"/>
+          <p:cNvPr id="11" name="Picture 10" descr="0d1a35c0d260c797.png"/>
           <p:cNvPicPr>
             <a:picLocks noChangeAspect="1"/>
           </p:cNvPicPr>
@@ -4611,8 +4611,8 @@
         </p:blipFill>
         <p:spPr>
           <a:xfrm>
-            <a:off x="1828800" y="2886456"/>
-            <a:ext cx="1621536" cy="697992"/>
+            <a:off x="1828800" y="2889504"/>
+            <a:ext cx="1630680" cy="697992"/>
           </a:xfrm>
           <a:prstGeom prst="rect">
             <a:avLst/>
@@ -4627,7 +4627,7 @@
         </p:nvSpPr>
         <p:spPr>
           <a:xfrm>
-            <a:off x="3907536" y="3006852"/>
+            <a:off x="3916680" y="3009900"/>
             <a:ext cx="6400800" cy="502920"/>
           </a:xfrm>
           <a:prstGeom prst="rect">
@@ -5259,7 +5259,7 @@
       </p:sp>
       <p:pic>
         <p:nvPicPr>
-          <p:cNvPr id="9" name="Picture 8" descr="a7f97d6945899edc.png"/>
+          <p:cNvPr id="9" name="Picture 8" descr="30e4c8bd3032b31f.png"/>
           <p:cNvPicPr>
             <a:picLocks noChangeAspect="1"/>
           </p:cNvPicPr>
@@ -5273,8 +5273,8 @@
         </p:blipFill>
         <p:spPr>
           <a:xfrm>
-            <a:off x="4315968" y="2194560"/>
-            <a:ext cx="3529584" cy="862584"/>
+            <a:off x="4314444" y="2194560"/>
+            <a:ext cx="3532632" cy="862584"/>
           </a:xfrm>
           <a:prstGeom prst="rect">
             <a:avLst/>
@@ -6152,7 +6152,7 @@
         </p:nvSpPr>
         <p:spPr>
           <a:xfrm>
-            <a:off x="2888003" y="2212848"/>
+            <a:off x="2886479" y="2217420"/>
             <a:ext cx="5370780" cy="457200"/>
           </a:xfrm>
           <a:prstGeom prst="rect">
@@ -6181,7 +6181,7 @@
       </p:sp>
       <p:pic>
         <p:nvPicPr>
-          <p:cNvPr id="10" name="Picture 9" descr="b43afb9c608d068d.png"/>
+          <p:cNvPr id="10" name="Picture 9" descr="db3fdb8511f37e00.png"/>
           <p:cNvPicPr>
             <a:picLocks noChangeAspect="1"/>
           </p:cNvPicPr>
@@ -6195,8 +6195,8 @@
         </p:blipFill>
         <p:spPr>
           <a:xfrm>
-            <a:off x="8121624" y="2103120"/>
-            <a:ext cx="981455" cy="676656"/>
+            <a:off x="8120100" y="2103120"/>
+            <a:ext cx="984504" cy="685800"/>
           </a:xfrm>
           <a:prstGeom prst="rect">
             <a:avLst/>
@@ -6211,7 +6211,7 @@
         </p:nvSpPr>
         <p:spPr>
           <a:xfrm>
-            <a:off x="9103080" y="2212848"/>
+            <a:off x="9104604" y="2217420"/>
             <a:ext cx="307595" cy="457200"/>
           </a:xfrm>
           <a:prstGeom prst="rect">
@@ -6246,7 +6246,7 @@
         </p:nvSpPr>
         <p:spPr>
           <a:xfrm>
-            <a:off x="777240" y="3054096"/>
+            <a:off x="777240" y="3063239"/>
             <a:ext cx="10607040" cy="465151"/>
           </a:xfrm>
           <a:prstGeom prst="rect">
@@ -6281,7 +6281,7 @@
         </p:nvSpPr>
         <p:spPr>
           <a:xfrm>
-            <a:off x="777240" y="3628975"/>
+            <a:off x="777240" y="3638119"/>
             <a:ext cx="10607040" cy="465151"/>
           </a:xfrm>
           <a:prstGeom prst="rect">
@@ -6316,7 +6316,7 @@
         </p:nvSpPr>
         <p:spPr>
           <a:xfrm>
-            <a:off x="1828800" y="4249574"/>
+            <a:off x="1828800" y="4258718"/>
             <a:ext cx="8503920" cy="548640"/>
           </a:xfrm>
           <a:prstGeom prst="rect">
@@ -6351,7 +6351,7 @@
         </p:nvSpPr>
         <p:spPr>
           <a:xfrm>
-            <a:off x="4629912" y="5133494"/>
+            <a:off x="4629912" y="5142638"/>
             <a:ext cx="1920240" cy="548640"/>
           </a:xfrm>
           <a:prstGeom prst="rect">
@@ -6394,7 +6394,7 @@
         </p:blipFill>
         <p:spPr>
           <a:xfrm>
-            <a:off x="6550152" y="4981094"/>
+            <a:off x="6550152" y="4990238"/>
             <a:ext cx="981455" cy="853440"/>
           </a:xfrm>
           <a:prstGeom prst="rect">
@@ -7024,7 +7024,7 @@
       </p:sp>
       <p:pic>
         <p:nvPicPr>
-          <p:cNvPr id="9" name="Picture 8" descr="23a87bc643d7e5a2.png"/>
+          <p:cNvPr id="9" name="Picture 8" descr="388782ac10a65267.png"/>
           <p:cNvPicPr>
             <a:picLocks noChangeAspect="1"/>
           </p:cNvPicPr>
@@ -7038,8 +7038,8 @@
         </p:blipFill>
         <p:spPr>
           <a:xfrm>
-            <a:off x="5292852" y="2103120"/>
-            <a:ext cx="1575816" cy="868680"/>
+            <a:off x="5291328" y="2103120"/>
+            <a:ext cx="1578864" cy="868680"/>
           </a:xfrm>
           <a:prstGeom prst="rect">
             <a:avLst/>
@@ -8355,7 +8355,7 @@
       </p:sp>
       <p:pic>
         <p:nvPicPr>
-          <p:cNvPr id="9" name="Picture 8" descr="c08fd56f1b4e345e.png"/>
+          <p:cNvPr id="9" name="Picture 8" descr="47a2897b65a37ce7.png"/>
           <p:cNvPicPr>
             <a:picLocks noChangeAspect="1"/>
           </p:cNvPicPr>
@@ -8370,7 +8370,7 @@
         <p:spPr>
           <a:xfrm>
             <a:off x="5288280" y="2103120"/>
-            <a:ext cx="1584960" cy="871728"/>
+            <a:ext cx="1584960" cy="868680"/>
           </a:xfrm>
           <a:prstGeom prst="rect">
             <a:avLst/>
@@ -8385,7 +8385,7 @@
         </p:nvSpPr>
         <p:spPr>
           <a:xfrm>
-            <a:off x="1828800" y="3249167"/>
+            <a:off x="1828800" y="3246120"/>
             <a:ext cx="8503920" cy="548640"/>
           </a:xfrm>
           <a:prstGeom prst="rect">
@@ -9111,7 +9111,7 @@
       </p:sp>
       <p:pic>
         <p:nvPicPr>
-          <p:cNvPr id="9" name="Picture 8" descr="c2285e954aff8d61.png"/>
+          <p:cNvPr id="9" name="Picture 8" descr="54c64471c94cdd3c.png"/>
           <p:cNvPicPr>
             <a:picLocks noChangeAspect="1"/>
           </p:cNvPicPr>
@@ -9126,7 +9126,7 @@
         <p:spPr>
           <a:xfrm>
             <a:off x="5347715" y="2103120"/>
-            <a:ext cx="1466088" cy="853440"/>
+            <a:ext cx="1466088" cy="850392"/>
           </a:xfrm>
           <a:prstGeom prst="rect">
             <a:avLst/>
@@ -9141,7 +9141,7 @@
         </p:nvSpPr>
         <p:spPr>
           <a:xfrm>
-            <a:off x="1828800" y="3230880"/>
+            <a:off x="1828800" y="3227832"/>
             <a:ext cx="8503920" cy="548640"/>
           </a:xfrm>
           <a:prstGeom prst="rect">
@@ -10061,7 +10061,7 @@
       </p:sp>
       <p:pic>
         <p:nvPicPr>
-          <p:cNvPr id="9" name="Picture 8" descr="fb95563de51335d3.png"/>
+          <p:cNvPr id="9" name="Picture 8" descr="fba4f61953915bcf.png"/>
           <p:cNvPicPr>
             <a:picLocks noChangeAspect="1"/>
           </p:cNvPicPr>
@@ -10075,8 +10075,8 @@
         </p:blipFill>
         <p:spPr>
           <a:xfrm>
-            <a:off x="5301996" y="2103120"/>
-            <a:ext cx="1557528" cy="853440"/>
+            <a:off x="5298948" y="2103120"/>
+            <a:ext cx="1563624" cy="853440"/>
           </a:xfrm>
           <a:prstGeom prst="rect">
             <a:avLst/>
@@ -11208,7 +11208,7 @@
       </p:sp>
       <p:pic>
         <p:nvPicPr>
-          <p:cNvPr id="9" name="Picture 8" descr="e9242358ed1b2b8f.png"/>
+          <p:cNvPr id="9" name="Picture 8" descr="9eac5073baeb7118.png"/>
           <p:cNvPicPr>
             <a:picLocks noChangeAspect="1"/>
           </p:cNvPicPr>
@@ -12143,7 +12143,7 @@
       </p:sp>
       <p:pic>
         <p:nvPicPr>
-          <p:cNvPr id="9" name="Picture 8" descr="983316d8a340e399.png"/>
+          <p:cNvPr id="9" name="Picture 8" descr="c30d2bd25c2ac253.png"/>
           <p:cNvPicPr>
             <a:picLocks noChangeAspect="1"/>
           </p:cNvPicPr>
@@ -12158,7 +12158,7 @@
         <p:spPr>
           <a:xfrm>
             <a:off x="4792980" y="2103120"/>
-            <a:ext cx="2575560" cy="877824"/>
+            <a:ext cx="2575560" cy="874776"/>
           </a:xfrm>
           <a:prstGeom prst="rect">
             <a:avLst/>
@@ -12173,7 +12173,7 @@
         </p:nvSpPr>
         <p:spPr>
           <a:xfrm>
-            <a:off x="1828800" y="3255263"/>
+            <a:off x="1828800" y="3252215"/>
             <a:ext cx="8503920" cy="548640"/>
           </a:xfrm>
           <a:prstGeom prst="rect">
@@ -13650,7 +13650,7 @@
       </p:sp>
       <p:pic>
         <p:nvPicPr>
-          <p:cNvPr id="9" name="Picture 8" descr="c18abdc6135bde12.png"/>
+          <p:cNvPr id="9" name="Picture 8" descr="31a45253de33cc10.png"/>
           <p:cNvPicPr>
             <a:picLocks noChangeAspect="1"/>
           </p:cNvPicPr>
@@ -13664,8 +13664,8 @@
         </p:blipFill>
         <p:spPr>
           <a:xfrm>
-            <a:off x="4486656" y="2103120"/>
-            <a:ext cx="3188208" cy="856488"/>
+            <a:off x="4483607" y="2103120"/>
+            <a:ext cx="3194304" cy="862584"/>
           </a:xfrm>
           <a:prstGeom prst="rect">
             <a:avLst/>
@@ -13680,7 +13680,7 @@
         </p:nvSpPr>
         <p:spPr>
           <a:xfrm>
-            <a:off x="1828800" y="3233927"/>
+            <a:off x="1828800" y="3240023"/>
             <a:ext cx="8503920" cy="548640"/>
           </a:xfrm>
           <a:prstGeom prst="rect">
@@ -14541,7 +14541,7 @@
         </p:nvSpPr>
         <p:spPr>
           <a:xfrm>
-            <a:off x="2253551" y="2212848"/>
+            <a:off x="2247455" y="2217420"/>
             <a:ext cx="2202162" cy="457200"/>
           </a:xfrm>
           <a:prstGeom prst="rect">
@@ -14570,7 +14570,7 @@
       </p:sp>
       <p:pic>
         <p:nvPicPr>
-          <p:cNvPr id="10" name="Picture 9" descr="bcbcbf803cfe7ecd.png"/>
+          <p:cNvPr id="10" name="Picture 9" descr="88b5d7d638f0291c.png"/>
           <p:cNvPicPr>
             <a:picLocks noChangeAspect="1"/>
           </p:cNvPicPr>
@@ -14584,8 +14584,8 @@
         </p:blipFill>
         <p:spPr>
           <a:xfrm>
-            <a:off x="4318553" y="2103120"/>
-            <a:ext cx="1246632" cy="676656"/>
+            <a:off x="4312457" y="2103120"/>
+            <a:ext cx="1252728" cy="685800"/>
           </a:xfrm>
           <a:prstGeom prst="rect">
             <a:avLst/>
@@ -14600,7 +14600,7 @@
         </p:nvSpPr>
         <p:spPr>
           <a:xfrm>
-            <a:off x="5565185" y="2212848"/>
+            <a:off x="5565185" y="2217420"/>
             <a:ext cx="3705751" cy="457200"/>
           </a:xfrm>
           <a:prstGeom prst="rect">
@@ -14629,7 +14629,7 @@
       </p:sp>
       <p:pic>
         <p:nvPicPr>
-          <p:cNvPr id="12" name="Picture 11" descr="9b43b28c9551277e.png"/>
+          <p:cNvPr id="12" name="Picture 11" descr="3daedfdf5ed4c4ed.png"/>
           <p:cNvPicPr>
             <a:picLocks noChangeAspect="1"/>
           </p:cNvPicPr>
@@ -14644,7 +14644,7 @@
         <p:spPr>
           <a:xfrm>
             <a:off x="9133776" y="2103120"/>
-            <a:ext cx="774192" cy="676656"/>
+            <a:ext cx="780288" cy="685800"/>
           </a:xfrm>
           <a:prstGeom prst="rect">
             <a:avLst/>
@@ -14659,7 +14659,7 @@
         </p:nvSpPr>
         <p:spPr>
           <a:xfrm>
-            <a:off x="777240" y="3054096"/>
+            <a:off x="777240" y="3063239"/>
             <a:ext cx="10607040" cy="465151"/>
           </a:xfrm>
           <a:prstGeom prst="rect">
@@ -14694,7 +14694,7 @@
         </p:nvSpPr>
         <p:spPr>
           <a:xfrm>
-            <a:off x="1828800" y="3674695"/>
+            <a:off x="1828800" y="3683839"/>
             <a:ext cx="8503920" cy="548640"/>
           </a:xfrm>
           <a:prstGeom prst="rect">
@@ -17362,7 +17362,7 @@
       </p:cxnSp>
       <p:pic>
         <p:nvPicPr>
-          <p:cNvPr id="10" name="Picture 9" descr="250f758fe051adf5.png"/>
+          <p:cNvPr id="10" name="Picture 9" descr="4b0f3e7d8c2c695f.png"/>
           <p:cNvPicPr>
             <a:picLocks noChangeAspect="1"/>
           </p:cNvPicPr>
@@ -17376,8 +17376,8 @@
         </p:blipFill>
         <p:spPr>
           <a:xfrm>
-            <a:off x="3761785" y="2340864"/>
-            <a:ext cx="2136648" cy="694944"/>
+            <a:off x="3763309" y="2340864"/>
+            <a:ext cx="2133600" cy="694944"/>
           </a:xfrm>
           <a:prstGeom prst="rect">
             <a:avLst/>
@@ -17392,7 +17392,7 @@
         </p:nvSpPr>
         <p:spPr>
           <a:xfrm>
-            <a:off x="5898433" y="2459736"/>
+            <a:off x="5896909" y="2459736"/>
             <a:ext cx="1299682" cy="457200"/>
           </a:xfrm>
           <a:prstGeom prst="rect">
@@ -17421,7 +17421,7 @@
       </p:sp>
       <p:pic>
         <p:nvPicPr>
-          <p:cNvPr id="12" name="Picture 11" descr="9a4d83fc761d1401.png"/>
+          <p:cNvPr id="12" name="Picture 11" descr="0526fdf803528f99.png"/>
           <p:cNvPicPr>
             <a:picLocks noChangeAspect="1"/>
           </p:cNvPicPr>
@@ -17435,7 +17435,7 @@
         </p:blipFill>
         <p:spPr>
           <a:xfrm>
-            <a:off x="7060955" y="2517648"/>
+            <a:off x="7059431" y="2517648"/>
             <a:ext cx="1149096" cy="341376"/>
           </a:xfrm>
           <a:prstGeom prst="rect">
@@ -17451,7 +17451,7 @@
         </p:nvSpPr>
         <p:spPr>
           <a:xfrm>
-            <a:off x="8210051" y="2459736"/>
+            <a:off x="8208527" y="2459736"/>
             <a:ext cx="326842" cy="457200"/>
           </a:xfrm>
           <a:prstGeom prst="rect">
@@ -17480,7 +17480,7 @@
       </p:sp>
       <p:pic>
         <p:nvPicPr>
-          <p:cNvPr id="14" name="Picture 13" descr="fdfb3bffd237f41c.png"/>
+          <p:cNvPr id="14" name="Picture 13" descr="0760a5d348419dd0.png"/>
           <p:cNvPicPr>
             <a:picLocks noChangeAspect="1"/>
           </p:cNvPicPr>
@@ -17494,8 +17494,8 @@
         </p:blipFill>
         <p:spPr>
           <a:xfrm>
-            <a:off x="2630160" y="3310128"/>
-            <a:ext cx="3075432" cy="691896"/>
+            <a:off x="2619492" y="3310128"/>
+            <a:ext cx="3084576" cy="694944"/>
           </a:xfrm>
           <a:prstGeom prst="rect">
             <a:avLst/>
@@ -17510,7 +17510,7 @@
         </p:nvSpPr>
         <p:spPr>
           <a:xfrm>
-            <a:off x="5705592" y="3427476"/>
+            <a:off x="5704068" y="3429000"/>
             <a:ext cx="1183151" cy="457200"/>
           </a:xfrm>
           <a:prstGeom prst="rect">
@@ -17539,7 +17539,7 @@
       </p:sp>
       <p:pic>
         <p:nvPicPr>
-          <p:cNvPr id="16" name="Picture 15" descr="a048de6488523f64.png"/>
+          <p:cNvPr id="16" name="Picture 15" descr="8aa2b2ce219d387c.png"/>
           <p:cNvPicPr>
             <a:picLocks noChangeAspect="1"/>
           </p:cNvPicPr>
@@ -17553,8 +17553,8 @@
         </p:blipFill>
         <p:spPr>
           <a:xfrm>
-            <a:off x="6751583" y="3316224"/>
-            <a:ext cx="2779776" cy="679704"/>
+            <a:off x="6750059" y="3313176"/>
+            <a:ext cx="2791968" cy="688848"/>
           </a:xfrm>
           <a:prstGeom prst="rect">
             <a:avLst/>
@@ -17569,7 +17569,7 @@
         </p:nvSpPr>
         <p:spPr>
           <a:xfrm>
-            <a:off x="987552" y="4340352"/>
+            <a:off x="987552" y="4343400"/>
             <a:ext cx="10131551" cy="475488"/>
           </a:xfrm>
           <a:prstGeom prst="rect">
@@ -17604,7 +17604,7 @@
         </p:nvSpPr>
         <p:spPr>
           <a:xfrm>
-            <a:off x="987552" y="5163312"/>
+            <a:off x="987552" y="5167884"/>
             <a:ext cx="5545365" cy="457200"/>
           </a:xfrm>
           <a:prstGeom prst="rect">
@@ -17633,7 +17633,7 @@
       </p:sp>
       <p:pic>
         <p:nvPicPr>
-          <p:cNvPr id="19" name="Picture 18" descr="2071a168bc27be10.png"/>
+          <p:cNvPr id="19" name="Picture 18" descr="f1d121a4d71cf0c8.png"/>
           <p:cNvPicPr>
             <a:picLocks noChangeAspect="1"/>
           </p:cNvPicPr>
@@ -17647,8 +17647,8 @@
         </p:blipFill>
         <p:spPr>
           <a:xfrm>
-            <a:off x="6395757" y="5053584"/>
-            <a:ext cx="3224784" cy="676656"/>
+            <a:off x="6395757" y="5056631"/>
+            <a:ext cx="3230880" cy="679704"/>
           </a:xfrm>
           <a:prstGeom prst="rect">
             <a:avLst/>
@@ -17955,7 +17955,7 @@
       </p:cxnSp>
       <p:pic>
         <p:nvPicPr>
-          <p:cNvPr id="10" name="Picture 9" descr="db66c38b65bd5778.png"/>
+          <p:cNvPr id="10" name="Picture 9" descr="08b6d01a45108b1d.png"/>
           <p:cNvPicPr>
             <a:picLocks noChangeAspect="1"/>
           </p:cNvPicPr>
@@ -17969,8 +17969,8 @@
         </p:blipFill>
         <p:spPr>
           <a:xfrm>
-            <a:off x="2075688" y="2340864"/>
-            <a:ext cx="8010144" cy="816864"/>
+            <a:off x="2071116" y="2340864"/>
+            <a:ext cx="8019288" cy="816864"/>
           </a:xfrm>
           <a:prstGeom prst="rect">
             <a:avLst/>
@@ -18599,7 +18599,7 @@
       </p:sp>
       <p:pic>
         <p:nvPicPr>
-          <p:cNvPr id="9" name="Picture 8" descr="7b2b3d6125a7d80c.png"/>
+          <p:cNvPr id="9" name="Picture 8" descr="bc4c574f50fed791.png"/>
           <p:cNvPicPr>
             <a:picLocks noChangeAspect="1"/>
           </p:cNvPicPr>
@@ -18614,7 +18614,7 @@
         <p:spPr>
           <a:xfrm>
             <a:off x="1828800" y="1920240"/>
-            <a:ext cx="2791968" cy="685800"/>
+            <a:ext cx="2798064" cy="688848"/>
           </a:xfrm>
           <a:prstGeom prst="rect">
             <a:avLst/>
@@ -18629,8 +18629,8 @@
         </p:nvSpPr>
         <p:spPr>
           <a:xfrm>
-            <a:off x="5077967" y="2034540"/>
-            <a:ext cx="6306312" cy="502920"/>
+            <a:off x="5084064" y="2036064"/>
+            <a:ext cx="6300215" cy="502920"/>
           </a:xfrm>
           <a:prstGeom prst="rect">
             <a:avLst/>
@@ -18658,7 +18658,7 @@
       </p:sp>
       <p:pic>
         <p:nvPicPr>
-          <p:cNvPr id="11" name="Picture 10" descr="e24c31941ca2fecb.png"/>
+          <p:cNvPr id="11" name="Picture 10" descr="2145b6f87f912dee.png"/>
           <p:cNvPicPr>
             <a:picLocks noChangeAspect="1"/>
           </p:cNvPicPr>
@@ -18672,8 +18672,8 @@
         </p:blipFill>
         <p:spPr>
           <a:xfrm>
-            <a:off x="1828800" y="2880360"/>
-            <a:ext cx="1895856" cy="697992"/>
+            <a:off x="1828800" y="2883408"/>
+            <a:ext cx="1898904" cy="701040"/>
           </a:xfrm>
           <a:prstGeom prst="rect">
             <a:avLst/>
@@ -18688,7 +18688,7 @@
         </p:nvSpPr>
         <p:spPr>
           <a:xfrm>
-            <a:off x="4181856" y="3000756"/>
+            <a:off x="4184903" y="3005328"/>
             <a:ext cx="6400800" cy="502920"/>
           </a:xfrm>
           <a:prstGeom prst="rect">

--- a/a7/build/out/u3/A7 3.05  Slides.pptx
+++ b/a7/build/out/u3/A7 3.05  Slides.pptx
@@ -3817,7 +3817,7 @@
       </p:sp>
       <p:pic>
         <p:nvPicPr>
-          <p:cNvPr id="9" name="Picture 8" descr="9b72eb366786e7f7.png"/>
+          <p:cNvPr id="9" name="Picture 8" descr="055ea4267017cf05.png"/>
           <p:cNvPicPr>
             <a:picLocks noChangeAspect="1"/>
           </p:cNvPicPr>
@@ -4538,7 +4538,7 @@
       </p:sp>
       <p:pic>
         <p:nvPicPr>
-          <p:cNvPr id="9" name="Picture 8" descr="4608ef90342adf85.png"/>
+          <p:cNvPr id="9" name="Picture 8" descr="10be869d41e0dd57.png"/>
           <p:cNvPicPr>
             <a:picLocks noChangeAspect="1"/>
           </p:cNvPicPr>
@@ -4553,7 +4553,7 @@
         <p:spPr>
           <a:xfrm>
             <a:off x="1828800" y="1920240"/>
-            <a:ext cx="5245608" cy="694944"/>
+            <a:ext cx="5239512" cy="694944"/>
           </a:xfrm>
           <a:prstGeom prst="rect">
             <a:avLst/>
@@ -4568,8 +4568,8 @@
         </p:nvSpPr>
         <p:spPr>
           <a:xfrm>
-            <a:off x="7531608" y="2039112"/>
-            <a:ext cx="3852671" cy="502920"/>
+            <a:off x="7525512" y="2039112"/>
+            <a:ext cx="3858767" cy="502920"/>
           </a:xfrm>
           <a:prstGeom prst="rect">
             <a:avLst/>
@@ -4597,7 +4597,7 @@
       </p:sp>
       <p:pic>
         <p:nvPicPr>
-          <p:cNvPr id="11" name="Picture 10" descr="0d1a35c0d260c797.png"/>
+          <p:cNvPr id="11" name="Picture 10" descr="268771bcd93959c7.png"/>
           <p:cNvPicPr>
             <a:picLocks noChangeAspect="1"/>
           </p:cNvPicPr>
@@ -4612,7 +4612,7 @@
         <p:spPr>
           <a:xfrm>
             <a:off x="1828800" y="2889504"/>
-            <a:ext cx="1630680" cy="697992"/>
+            <a:ext cx="1621536" cy="694944"/>
           </a:xfrm>
           <a:prstGeom prst="rect">
             <a:avLst/>
@@ -4627,7 +4627,7 @@
         </p:nvSpPr>
         <p:spPr>
           <a:xfrm>
-            <a:off x="3916680" y="3009900"/>
+            <a:off x="3907536" y="3008376"/>
             <a:ext cx="6400800" cy="502920"/>
           </a:xfrm>
           <a:prstGeom prst="rect">
@@ -5259,7 +5259,7 @@
       </p:sp>
       <p:pic>
         <p:nvPicPr>
-          <p:cNvPr id="9" name="Picture 8" descr="30e4c8bd3032b31f.png"/>
+          <p:cNvPr id="9" name="Picture 8" descr="40cdd198e5060778.png"/>
           <p:cNvPicPr>
             <a:picLocks noChangeAspect="1"/>
           </p:cNvPicPr>
@@ -6152,7 +6152,7 @@
         </p:nvSpPr>
         <p:spPr>
           <a:xfrm>
-            <a:off x="2886479" y="2217420"/>
+            <a:off x="2886479" y="2215896"/>
             <a:ext cx="5370780" cy="457200"/>
           </a:xfrm>
           <a:prstGeom prst="rect">
@@ -6181,7 +6181,7 @@
       </p:sp>
       <p:pic>
         <p:nvPicPr>
-          <p:cNvPr id="10" name="Picture 9" descr="db3fdb8511f37e00.png"/>
+          <p:cNvPr id="10" name="Picture 9" descr="ceb45c64c87ab3e7.png"/>
           <p:cNvPicPr>
             <a:picLocks noChangeAspect="1"/>
           </p:cNvPicPr>
@@ -6196,7 +6196,7 @@
         <p:spPr>
           <a:xfrm>
             <a:off x="8120100" y="2103120"/>
-            <a:ext cx="984504" cy="685800"/>
+            <a:ext cx="984504" cy="682752"/>
           </a:xfrm>
           <a:prstGeom prst="rect">
             <a:avLst/>
@@ -6211,7 +6211,7 @@
         </p:nvSpPr>
         <p:spPr>
           <a:xfrm>
-            <a:off x="9104604" y="2217420"/>
+            <a:off x="9104604" y="2215896"/>
             <a:ext cx="307595" cy="457200"/>
           </a:xfrm>
           <a:prstGeom prst="rect">
@@ -6246,7 +6246,7 @@
         </p:nvSpPr>
         <p:spPr>
           <a:xfrm>
-            <a:off x="777240" y="3063239"/>
+            <a:off x="777240" y="3060191"/>
             <a:ext cx="10607040" cy="465151"/>
           </a:xfrm>
           <a:prstGeom prst="rect">
@@ -6281,7 +6281,7 @@
         </p:nvSpPr>
         <p:spPr>
           <a:xfrm>
-            <a:off x="777240" y="3638119"/>
+            <a:off x="777240" y="3635071"/>
             <a:ext cx="10607040" cy="465151"/>
           </a:xfrm>
           <a:prstGeom prst="rect">
@@ -6316,7 +6316,7 @@
         </p:nvSpPr>
         <p:spPr>
           <a:xfrm>
-            <a:off x="1828800" y="4258718"/>
+            <a:off x="1828800" y="4255670"/>
             <a:ext cx="8503920" cy="548640"/>
           </a:xfrm>
           <a:prstGeom prst="rect">
@@ -6351,7 +6351,7 @@
         </p:nvSpPr>
         <p:spPr>
           <a:xfrm>
-            <a:off x="4629912" y="5142638"/>
+            <a:off x="4629912" y="5139590"/>
             <a:ext cx="1920240" cy="548640"/>
           </a:xfrm>
           <a:prstGeom prst="rect">
@@ -6394,7 +6394,7 @@
         </p:blipFill>
         <p:spPr>
           <a:xfrm>
-            <a:off x="6550152" y="4990238"/>
+            <a:off x="6550152" y="4987190"/>
             <a:ext cx="981455" cy="853440"/>
           </a:xfrm>
           <a:prstGeom prst="rect">
@@ -7024,7 +7024,7 @@
       </p:sp>
       <p:pic>
         <p:nvPicPr>
-          <p:cNvPr id="9" name="Picture 8" descr="388782ac10a65267.png"/>
+          <p:cNvPr id="9" name="Picture 8" descr="7b4aab4c0a6cc8a0.png"/>
           <p:cNvPicPr>
             <a:picLocks noChangeAspect="1"/>
           </p:cNvPicPr>
@@ -8355,7 +8355,7 @@
       </p:sp>
       <p:pic>
         <p:nvPicPr>
-          <p:cNvPr id="9" name="Picture 8" descr="47a2897b65a37ce7.png"/>
+          <p:cNvPr id="9" name="Picture 8" descr="bc194338a8886ecd.png"/>
           <p:cNvPicPr>
             <a:picLocks noChangeAspect="1"/>
           </p:cNvPicPr>
@@ -9111,7 +9111,7 @@
       </p:sp>
       <p:pic>
         <p:nvPicPr>
-          <p:cNvPr id="9" name="Picture 8" descr="54c64471c94cdd3c.png"/>
+          <p:cNvPr id="9" name="Picture 8" descr="bf10b2e2dc356d3c.png"/>
           <p:cNvPicPr>
             <a:picLocks noChangeAspect="1"/>
           </p:cNvPicPr>
@@ -9125,8 +9125,8 @@
         </p:blipFill>
         <p:spPr>
           <a:xfrm>
-            <a:off x="5347715" y="2103120"/>
-            <a:ext cx="1466088" cy="850392"/>
+            <a:off x="5349240" y="2103120"/>
+            <a:ext cx="1463040" cy="850392"/>
           </a:xfrm>
           <a:prstGeom prst="rect">
             <a:avLst/>
@@ -10061,7 +10061,7 @@
       </p:sp>
       <p:pic>
         <p:nvPicPr>
-          <p:cNvPr id="9" name="Picture 8" descr="fba4f61953915bcf.png"/>
+          <p:cNvPr id="9" name="Picture 8" descr="de3072ed6d5fe593.png"/>
           <p:cNvPicPr>
             <a:picLocks noChangeAspect="1"/>
           </p:cNvPicPr>
@@ -10075,8 +10075,8 @@
         </p:blipFill>
         <p:spPr>
           <a:xfrm>
-            <a:off x="5298948" y="2103120"/>
-            <a:ext cx="1563624" cy="853440"/>
+            <a:off x="5300471" y="2103120"/>
+            <a:ext cx="1560576" cy="853440"/>
           </a:xfrm>
           <a:prstGeom prst="rect">
             <a:avLst/>
@@ -11208,7 +11208,7 @@
       </p:sp>
       <p:pic>
         <p:nvPicPr>
-          <p:cNvPr id="9" name="Picture 8" descr="9eac5073baeb7118.png"/>
+          <p:cNvPr id="9" name="Picture 8" descr="77243053f2f7c3fe.png"/>
           <p:cNvPicPr>
             <a:picLocks noChangeAspect="1"/>
           </p:cNvPicPr>
@@ -12143,7 +12143,7 @@
       </p:sp>
       <p:pic>
         <p:nvPicPr>
-          <p:cNvPr id="9" name="Picture 8" descr="c30d2bd25c2ac253.png"/>
+          <p:cNvPr id="9" name="Picture 8" descr="cccf2e6aacb49bf9.png"/>
           <p:cNvPicPr>
             <a:picLocks noChangeAspect="1"/>
           </p:cNvPicPr>
@@ -12157,8 +12157,8 @@
         </p:blipFill>
         <p:spPr>
           <a:xfrm>
-            <a:off x="4792980" y="2103120"/>
-            <a:ext cx="2575560" cy="874776"/>
+            <a:off x="4791455" y="2103120"/>
+            <a:ext cx="2578608" cy="877824"/>
           </a:xfrm>
           <a:prstGeom prst="rect">
             <a:avLst/>
@@ -12173,7 +12173,7 @@
         </p:nvSpPr>
         <p:spPr>
           <a:xfrm>
-            <a:off x="1828800" y="3252215"/>
+            <a:off x="1828800" y="3255263"/>
             <a:ext cx="8503920" cy="548640"/>
           </a:xfrm>
           <a:prstGeom prst="rect">
@@ -13650,7 +13650,7 @@
       </p:sp>
       <p:pic>
         <p:nvPicPr>
-          <p:cNvPr id="9" name="Picture 8" descr="31a45253de33cc10.png"/>
+          <p:cNvPr id="9" name="Picture 8" descr="7d2314fb4fc5114f.png"/>
           <p:cNvPicPr>
             <a:picLocks noChangeAspect="1"/>
           </p:cNvPicPr>
@@ -13665,7 +13665,7 @@
         <p:spPr>
           <a:xfrm>
             <a:off x="4483607" y="2103120"/>
-            <a:ext cx="3194304" cy="862584"/>
+            <a:ext cx="3194304" cy="859536"/>
           </a:xfrm>
           <a:prstGeom prst="rect">
             <a:avLst/>
@@ -13680,7 +13680,7 @@
         </p:nvSpPr>
         <p:spPr>
           <a:xfrm>
-            <a:off x="1828800" y="3240023"/>
+            <a:off x="1828800" y="3236975"/>
             <a:ext cx="8503920" cy="548640"/>
           </a:xfrm>
           <a:prstGeom prst="rect">
@@ -14541,7 +14541,7 @@
         </p:nvSpPr>
         <p:spPr>
           <a:xfrm>
-            <a:off x="2247455" y="2217420"/>
+            <a:off x="2248979" y="2215896"/>
             <a:ext cx="2202162" cy="457200"/>
           </a:xfrm>
           <a:prstGeom prst="rect">
@@ -14570,7 +14570,7 @@
       </p:sp>
       <p:pic>
         <p:nvPicPr>
-          <p:cNvPr id="10" name="Picture 9" descr="88b5d7d638f0291c.png"/>
+          <p:cNvPr id="10" name="Picture 9" descr="61e0767165f6b191.png"/>
           <p:cNvPicPr>
             <a:picLocks noChangeAspect="1"/>
           </p:cNvPicPr>
@@ -14584,8 +14584,8 @@
         </p:blipFill>
         <p:spPr>
           <a:xfrm>
-            <a:off x="4312457" y="2103120"/>
-            <a:ext cx="1252728" cy="685800"/>
+            <a:off x="4313981" y="2103120"/>
+            <a:ext cx="1252728" cy="682752"/>
           </a:xfrm>
           <a:prstGeom prst="rect">
             <a:avLst/>
@@ -14600,7 +14600,7 @@
         </p:nvSpPr>
         <p:spPr>
           <a:xfrm>
-            <a:off x="5565185" y="2217420"/>
+            <a:off x="5566709" y="2215896"/>
             <a:ext cx="3705751" cy="457200"/>
           </a:xfrm>
           <a:prstGeom prst="rect">
@@ -14629,7 +14629,7 @@
       </p:sp>
       <p:pic>
         <p:nvPicPr>
-          <p:cNvPr id="12" name="Picture 11" descr="3daedfdf5ed4c4ed.png"/>
+          <p:cNvPr id="12" name="Picture 11" descr="5c0a9d4ef3b8e54c.png"/>
           <p:cNvPicPr>
             <a:picLocks noChangeAspect="1"/>
           </p:cNvPicPr>
@@ -14643,8 +14643,8 @@
         </p:blipFill>
         <p:spPr>
           <a:xfrm>
-            <a:off x="9133776" y="2103120"/>
-            <a:ext cx="780288" cy="685800"/>
+            <a:off x="9135300" y="2103120"/>
+            <a:ext cx="777240" cy="682752"/>
           </a:xfrm>
           <a:prstGeom prst="rect">
             <a:avLst/>
@@ -14659,7 +14659,7 @@
         </p:nvSpPr>
         <p:spPr>
           <a:xfrm>
-            <a:off x="777240" y="3063239"/>
+            <a:off x="777240" y="3060191"/>
             <a:ext cx="10607040" cy="465151"/>
           </a:xfrm>
           <a:prstGeom prst="rect">
@@ -14694,7 +14694,7 @@
         </p:nvSpPr>
         <p:spPr>
           <a:xfrm>
-            <a:off x="1828800" y="3683839"/>
+            <a:off x="1828800" y="3680791"/>
             <a:ext cx="8503920" cy="548640"/>
           </a:xfrm>
           <a:prstGeom prst="rect">
@@ -17362,7 +17362,7 @@
       </p:cxnSp>
       <p:pic>
         <p:nvPicPr>
-          <p:cNvPr id="10" name="Picture 9" descr="4b0f3e7d8c2c695f.png"/>
+          <p:cNvPr id="10" name="Picture 9" descr="105dd24fbf391055.png"/>
           <p:cNvPicPr>
             <a:picLocks noChangeAspect="1"/>
           </p:cNvPicPr>
@@ -17376,8 +17376,8 @@
         </p:blipFill>
         <p:spPr>
           <a:xfrm>
-            <a:off x="3763309" y="2340864"/>
-            <a:ext cx="2133600" cy="694944"/>
+            <a:off x="3761785" y="2340864"/>
+            <a:ext cx="2133600" cy="691896"/>
           </a:xfrm>
           <a:prstGeom prst="rect">
             <a:avLst/>
@@ -17392,7 +17392,7 @@
         </p:nvSpPr>
         <p:spPr>
           <a:xfrm>
-            <a:off x="5896909" y="2459736"/>
+            <a:off x="5895385" y="2458212"/>
             <a:ext cx="1299682" cy="457200"/>
           </a:xfrm>
           <a:prstGeom prst="rect">
@@ -17421,7 +17421,7 @@
       </p:sp>
       <p:pic>
         <p:nvPicPr>
-          <p:cNvPr id="12" name="Picture 11" descr="0526fdf803528f99.png"/>
+          <p:cNvPr id="12" name="Picture 11" descr="2e707716356433bc.png"/>
           <p:cNvPicPr>
             <a:picLocks noChangeAspect="1"/>
           </p:cNvPicPr>
@@ -17435,8 +17435,8 @@
         </p:blipFill>
         <p:spPr>
           <a:xfrm>
-            <a:off x="7059431" y="2517648"/>
-            <a:ext cx="1149096" cy="341376"/>
+            <a:off x="7057907" y="2516124"/>
+            <a:ext cx="1152144" cy="341376"/>
           </a:xfrm>
           <a:prstGeom prst="rect">
             <a:avLst/>
@@ -17451,7 +17451,7 @@
         </p:nvSpPr>
         <p:spPr>
           <a:xfrm>
-            <a:off x="8208527" y="2459736"/>
+            <a:off x="8210051" y="2458212"/>
             <a:ext cx="326842" cy="457200"/>
           </a:xfrm>
           <a:prstGeom prst="rect">
@@ -17480,7 +17480,7 @@
       </p:sp>
       <p:pic>
         <p:nvPicPr>
-          <p:cNvPr id="14" name="Picture 13" descr="0760a5d348419dd0.png"/>
+          <p:cNvPr id="14" name="Picture 13" descr="33556cc2e8273199.png"/>
           <p:cNvPicPr>
             <a:picLocks noChangeAspect="1"/>
           </p:cNvPicPr>
@@ -17494,8 +17494,8 @@
         </p:blipFill>
         <p:spPr>
           <a:xfrm>
-            <a:off x="2619492" y="3310128"/>
-            <a:ext cx="3084576" cy="694944"/>
+            <a:off x="2625588" y="3307080"/>
+            <a:ext cx="3075432" cy="697992"/>
           </a:xfrm>
           <a:prstGeom prst="rect">
             <a:avLst/>
@@ -17510,7 +17510,7 @@
         </p:nvSpPr>
         <p:spPr>
           <a:xfrm>
-            <a:off x="5704068" y="3429000"/>
+            <a:off x="5701020" y="3427476"/>
             <a:ext cx="1183151" cy="457200"/>
           </a:xfrm>
           <a:prstGeom prst="rect">
@@ -17539,7 +17539,7 @@
       </p:sp>
       <p:pic>
         <p:nvPicPr>
-          <p:cNvPr id="16" name="Picture 15" descr="8aa2b2ce219d387c.png"/>
+          <p:cNvPr id="16" name="Picture 15" descr="7adc35e6f9ec4d06.png"/>
           <p:cNvPicPr>
             <a:picLocks noChangeAspect="1"/>
           </p:cNvPicPr>
@@ -17553,8 +17553,8 @@
         </p:blipFill>
         <p:spPr>
           <a:xfrm>
-            <a:off x="6750059" y="3313176"/>
-            <a:ext cx="2791968" cy="688848"/>
+            <a:off x="6747011" y="3311652"/>
+            <a:ext cx="2788920" cy="688848"/>
           </a:xfrm>
           <a:prstGeom prst="rect">
             <a:avLst/>
@@ -17604,7 +17604,7 @@
         </p:nvSpPr>
         <p:spPr>
           <a:xfrm>
-            <a:off x="987552" y="5167884"/>
+            <a:off x="987552" y="5166359"/>
             <a:ext cx="5545365" cy="457200"/>
           </a:xfrm>
           <a:prstGeom prst="rect">
@@ -17633,7 +17633,7 @@
       </p:sp>
       <p:pic>
         <p:nvPicPr>
-          <p:cNvPr id="19" name="Picture 18" descr="f1d121a4d71cf0c8.png"/>
+          <p:cNvPr id="19" name="Picture 18" descr="dee9fbc307a9f902.png"/>
           <p:cNvPicPr>
             <a:picLocks noChangeAspect="1"/>
           </p:cNvPicPr>
@@ -17648,7 +17648,7 @@
         <p:spPr>
           <a:xfrm>
             <a:off x="6395757" y="5056631"/>
-            <a:ext cx="3230880" cy="679704"/>
+            <a:ext cx="3230880" cy="676656"/>
           </a:xfrm>
           <a:prstGeom prst="rect">
             <a:avLst/>
@@ -17955,7 +17955,7 @@
       </p:cxnSp>
       <p:pic>
         <p:nvPicPr>
-          <p:cNvPr id="10" name="Picture 9" descr="08b6d01a45108b1d.png"/>
+          <p:cNvPr id="10" name="Picture 9" descr="1390af24b50c4cdc.png"/>
           <p:cNvPicPr>
             <a:picLocks noChangeAspect="1"/>
           </p:cNvPicPr>
@@ -17969,8 +17969,8 @@
         </p:blipFill>
         <p:spPr>
           <a:xfrm>
-            <a:off x="2071116" y="2340864"/>
-            <a:ext cx="8019288" cy="816864"/>
+            <a:off x="2074163" y="2340864"/>
+            <a:ext cx="8013192" cy="816864"/>
           </a:xfrm>
           <a:prstGeom prst="rect">
             <a:avLst/>
@@ -18599,7 +18599,7 @@
       </p:sp>
       <p:pic>
         <p:nvPicPr>
-          <p:cNvPr id="9" name="Picture 8" descr="bc4c574f50fed791.png"/>
+          <p:cNvPr id="9" name="Picture 8" descr="8e941bf8846b5513.png"/>
           <p:cNvPicPr>
             <a:picLocks noChangeAspect="1"/>
           </p:cNvPicPr>
@@ -18614,7 +18614,7 @@
         <p:spPr>
           <a:xfrm>
             <a:off x="1828800" y="1920240"/>
-            <a:ext cx="2798064" cy="688848"/>
+            <a:ext cx="2798064" cy="691896"/>
           </a:xfrm>
           <a:prstGeom prst="rect">
             <a:avLst/>
@@ -18629,7 +18629,7 @@
         </p:nvSpPr>
         <p:spPr>
           <a:xfrm>
-            <a:off x="5084064" y="2036064"/>
+            <a:off x="5084064" y="2037588"/>
             <a:ext cx="6300215" cy="502920"/>
           </a:xfrm>
           <a:prstGeom prst="rect">
@@ -18658,7 +18658,7 @@
       </p:sp>
       <p:pic>
         <p:nvPicPr>
-          <p:cNvPr id="11" name="Picture 10" descr="2145b6f87f912dee.png"/>
+          <p:cNvPr id="11" name="Picture 10" descr="b75e3c313a78d69c.png"/>
           <p:cNvPicPr>
             <a:picLocks noChangeAspect="1"/>
           </p:cNvPicPr>
@@ -18672,8 +18672,8 @@
         </p:blipFill>
         <p:spPr>
           <a:xfrm>
-            <a:off x="1828800" y="2883408"/>
-            <a:ext cx="1898904" cy="701040"/>
+            <a:off x="1828800" y="2886456"/>
+            <a:ext cx="1889760" cy="697992"/>
           </a:xfrm>
           <a:prstGeom prst="rect">
             <a:avLst/>
@@ -18688,7 +18688,7 @@
         </p:nvSpPr>
         <p:spPr>
           <a:xfrm>
-            <a:off x="4184903" y="3005328"/>
+            <a:off x="4175760" y="3006852"/>
             <a:ext cx="6400800" cy="502920"/>
           </a:xfrm>
           <a:prstGeom prst="rect">

--- a/a7/build/out/u3/A7 3.05  Slides.pptx
+++ b/a7/build/out/u3/A7 3.05  Slides.pptx
@@ -9588,7 +9588,7 @@
                 </a:solidFill>
                 <a:latin typeface="Century Schoolbook"/>
               </a:rPr>
-              <a:t>(−8/7)</a:t>
+              <a:t>(7/8)</a:t>
             </a:r>
             <a:r>
               <a:rPr sz="2400" b="0" i="0" baseline="30000">
@@ -9641,7 +9641,7 @@
                 </a:solidFill>
                 <a:latin typeface="Century Schoolbook"/>
               </a:rPr>
-              <a:t>(8/7)</a:t>
+              <a:t>(−8/7)</a:t>
             </a:r>
             <a:r>
               <a:rPr sz="2400" b="0" i="0" baseline="30000">
@@ -9747,7 +9747,7 @@
                 </a:solidFill>
                 <a:latin typeface="Century Schoolbook"/>
               </a:rPr>
-              <a:t>(7/8)</a:t>
+              <a:t>(8/7)</a:t>
             </a:r>
             <a:r>
               <a:rPr sz="2400" b="0" i="0" baseline="30000">
@@ -10144,25 +10144,25 @@
             <a:r>
               <a:rPr sz="2400" b="1" i="0">
                 <a:solidFill>
-                  <a:srgbClr val="9E1B32"/>
+                  <a:srgbClr val="1A1A1A"/>
                 </a:solidFill>
                 <a:latin typeface="Century Schoolbook"/>
               </a:rPr>
               <a:t>A.   </a:t>
             </a:r>
             <a:r>
-              <a:rPr sz="2400" b="1" i="0">
-                <a:solidFill>
-                  <a:srgbClr val="9E1B32"/>
-                </a:solidFill>
-                <a:latin typeface="Century Schoolbook"/>
-              </a:rPr>
-              <a:t>(−8/7)</a:t>
-            </a:r>
-            <a:r>
-              <a:rPr sz="2400" b="1" i="0" baseline="30000">
-                <a:solidFill>
-                  <a:srgbClr val="9E1B32"/>
+              <a:rPr sz="2400" b="0" i="0">
+                <a:solidFill>
+                  <a:srgbClr val="1A1A1A"/>
+                </a:solidFill>
+                <a:latin typeface="Century Schoolbook"/>
+              </a:rPr>
+              <a:t>(7/8)</a:t>
+            </a:r>
+            <a:r>
+              <a:rPr sz="2400" b="0" i="0" baseline="30000">
+                <a:solidFill>
+                  <a:srgbClr val="1A1A1A"/>
                 </a:solidFill>
                 <a:latin typeface="Century Schoolbook"/>
               </a:rPr>
@@ -10197,25 +10197,25 @@
             <a:r>
               <a:rPr sz="2400" b="1" i="0">
                 <a:solidFill>
-                  <a:srgbClr val="1A1A1A"/>
+                  <a:srgbClr val="9E1B32"/>
                 </a:solidFill>
                 <a:latin typeface="Century Schoolbook"/>
               </a:rPr>
               <a:t>B.   </a:t>
             </a:r>
             <a:r>
-              <a:rPr sz="2400" b="0" i="0">
-                <a:solidFill>
-                  <a:srgbClr val="1A1A1A"/>
-                </a:solidFill>
-                <a:latin typeface="Century Schoolbook"/>
-              </a:rPr>
-              <a:t>(8/7)</a:t>
-            </a:r>
-            <a:r>
-              <a:rPr sz="2400" b="0" i="0" baseline="30000">
-                <a:solidFill>
-                  <a:srgbClr val="1A1A1A"/>
+              <a:rPr sz="2400" b="1" i="0">
+                <a:solidFill>
+                  <a:srgbClr val="9E1B32"/>
+                </a:solidFill>
+                <a:latin typeface="Century Schoolbook"/>
+              </a:rPr>
+              <a:t>(−8/7)</a:t>
+            </a:r>
+            <a:r>
+              <a:rPr sz="2400" b="1" i="0" baseline="30000">
+                <a:solidFill>
+                  <a:srgbClr val="9E1B32"/>
                 </a:solidFill>
                 <a:latin typeface="Century Schoolbook"/>
               </a:rPr>
@@ -10316,7 +10316,7 @@
                 </a:solidFill>
                 <a:latin typeface="Century Schoolbook"/>
               </a:rPr>
-              <a:t>(7/8)</a:t>
+              <a:t>(8/7)</a:t>
             </a:r>
             <a:r>
               <a:rPr sz="2400" b="0" i="0" baseline="30000">
@@ -10360,7 +10360,7 @@
                 </a:solidFill>
                 <a:latin typeface="Century Schoolbook"/>
               </a:rPr>
-              <a:t>Answer:   A — (−8/7)</a:t>
+              <a:t>Answer:   B — (−8/7)</a:t>
             </a:r>
             <a:r>
               <a:rPr sz="3200" b="1" i="0" baseline="30000">
@@ -10735,7 +10735,7 @@
                 </a:solidFill>
                 <a:latin typeface="Century Schoolbook"/>
               </a:rPr>
-              <a:t>(5/8)</a:t>
+              <a:t>(8/5)</a:t>
             </a:r>
             <a:r>
               <a:rPr sz="2400" b="0" i="0" baseline="30000">
@@ -10788,7 +10788,7 @@
                 </a:solidFill>
                 <a:latin typeface="Century Schoolbook"/>
               </a:rPr>
-              <a:t>(8/5)</a:t>
+              <a:t>(5/8)</a:t>
             </a:r>
             <a:r>
               <a:rPr sz="2400" b="0" i="0" baseline="30000">
@@ -10797,7 +10797,7 @@
                 </a:solidFill>
                 <a:latin typeface="Century Schoolbook"/>
               </a:rPr>
-              <a:t>2</a:t>
+              <a:t>-6</a:t>
             </a:r>
           </a:p>
         </p:txBody>
@@ -10850,7 +10850,7 @@
                 </a:solidFill>
                 <a:latin typeface="Century Schoolbook"/>
               </a:rPr>
-              <a:t>-6</a:t>
+              <a:t>2</a:t>
             </a:r>
           </a:p>
         </p:txBody>
@@ -11291,25 +11291,25 @@
             <a:r>
               <a:rPr sz="2400" b="1" i="0">
                 <a:solidFill>
-                  <a:srgbClr val="9E1B32"/>
+                  <a:srgbClr val="1A1A1A"/>
                 </a:solidFill>
                 <a:latin typeface="Century Schoolbook"/>
               </a:rPr>
               <a:t>A.   </a:t>
             </a:r>
             <a:r>
-              <a:rPr sz="2400" b="1" i="0">
-                <a:solidFill>
-                  <a:srgbClr val="9E1B32"/>
-                </a:solidFill>
-                <a:latin typeface="Century Schoolbook"/>
-              </a:rPr>
-              <a:t>(5/8)</a:t>
-            </a:r>
-            <a:r>
-              <a:rPr sz="2400" b="1" i="0" baseline="30000">
-                <a:solidFill>
-                  <a:srgbClr val="9E1B32"/>
+              <a:rPr sz="2400" b="0" i="0">
+                <a:solidFill>
+                  <a:srgbClr val="1A1A1A"/>
+                </a:solidFill>
+                <a:latin typeface="Century Schoolbook"/>
+              </a:rPr>
+              <a:t>(8/5)</a:t>
+            </a:r>
+            <a:r>
+              <a:rPr sz="2400" b="0" i="0" baseline="30000">
+                <a:solidFill>
+                  <a:srgbClr val="1A1A1A"/>
                 </a:solidFill>
                 <a:latin typeface="Century Schoolbook"/>
               </a:rPr>
@@ -11357,7 +11357,7 @@
                 </a:solidFill>
                 <a:latin typeface="Century Schoolbook"/>
               </a:rPr>
-              <a:t>(8/5)</a:t>
+              <a:t>(5/8)</a:t>
             </a:r>
             <a:r>
               <a:rPr sz="2400" b="0" i="0" baseline="30000">
@@ -11366,7 +11366,7 @@
                 </a:solidFill>
                 <a:latin typeface="Century Schoolbook"/>
               </a:rPr>
-              <a:t>2</a:t>
+              <a:t>-6</a:t>
             </a:r>
           </a:p>
         </p:txBody>
@@ -11397,29 +11397,29 @@
             <a:r>
               <a:rPr sz="2400" b="1" i="0">
                 <a:solidFill>
-                  <a:srgbClr val="1A1A1A"/>
+                  <a:srgbClr val="9E1B32"/>
                 </a:solidFill>
                 <a:latin typeface="Century Schoolbook"/>
               </a:rPr>
               <a:t>C.   </a:t>
             </a:r>
             <a:r>
-              <a:rPr sz="2400" b="0" i="0">
-                <a:solidFill>
-                  <a:srgbClr val="1A1A1A"/>
+              <a:rPr sz="2400" b="1" i="0">
+                <a:solidFill>
+                  <a:srgbClr val="9E1B32"/>
                 </a:solidFill>
                 <a:latin typeface="Century Schoolbook"/>
               </a:rPr>
               <a:t>(5/8)</a:t>
             </a:r>
             <a:r>
-              <a:rPr sz="2400" b="0" i="0" baseline="30000">
-                <a:solidFill>
-                  <a:srgbClr val="1A1A1A"/>
-                </a:solidFill>
-                <a:latin typeface="Century Schoolbook"/>
-              </a:rPr>
-              <a:t>-6</a:t>
+              <a:rPr sz="2400" b="1" i="0" baseline="30000">
+                <a:solidFill>
+                  <a:srgbClr val="9E1B32"/>
+                </a:solidFill>
+                <a:latin typeface="Century Schoolbook"/>
+              </a:rPr>
+              <a:t>2</a:t>
             </a:r>
           </a:p>
         </p:txBody>
@@ -11507,7 +11507,7 @@
                 </a:solidFill>
                 <a:latin typeface="Century Schoolbook"/>
               </a:rPr>
-              <a:t>Answer:   A — (5/8)</a:t>
+              <a:t>Answer:   C — (5/8)</a:t>
             </a:r>
             <a:r>
               <a:rPr sz="3200" b="1" i="0" baseline="30000">

--- a/a7/build/out/u3/A7 3.05  Slides.pptx
+++ b/a7/build/out/u3/A7 3.05  Slides.pptx
@@ -4247,7 +4247,7 @@
         <p:spPr>
           <a:xfrm>
             <a:off x="777240" y="3297936"/>
-            <a:ext cx="10607040" cy="429370"/>
+            <a:ext cx="10607040" cy="858740"/>
           </a:xfrm>
           <a:prstGeom prst="rect">
             <a:avLst/>
@@ -5655,8 +5655,8 @@
         </p:nvSpPr>
         <p:spPr>
           <a:xfrm>
-            <a:off x="2888003" y="2304288"/>
-            <a:ext cx="5370780" cy="457200"/>
+            <a:off x="1234440" y="1921764"/>
+            <a:ext cx="4268947" cy="457200"/>
           </a:xfrm>
           <a:prstGeom prst="rect">
             <a:avLst/>
@@ -5671,20 +5671,20 @@
           <a:p>
             <a:pPr algn="l"/>
             <a:r>
-              <a:rPr sz="2600" b="0" i="0">
+              <a:rPr sz="2400" b="0" i="0">
                 <a:solidFill>
                   <a:srgbClr val="1A1A1A"/>
                 </a:solidFill>
                 <a:latin typeface="Century Schoolbook"/>
               </a:rPr>
-              <a:t>A recipe is scaled by a factor of  </a:t>
+              <a:t>A copier shrinks a page to  </a:t>
             </a:r>
           </a:p>
         </p:txBody>
       </p:sp>
       <p:pic>
         <p:nvPicPr>
-          <p:cNvPr id="10" name="Picture 9" descr="b43afb9c608d068d.png"/>
+          <p:cNvPr id="10" name="Picture 9" descr="e8022fa09c25c018.png"/>
           <p:cNvPicPr>
             <a:picLocks noChangeAspect="1"/>
           </p:cNvPicPr>
@@ -5698,8 +5698,8 @@
         </p:blipFill>
         <p:spPr>
           <a:xfrm>
-            <a:off x="8121624" y="2194560"/>
-            <a:ext cx="981455" cy="676656"/>
+            <a:off x="5366227" y="1874519"/>
+            <a:ext cx="170688" cy="551688"/>
           </a:xfrm>
           <a:prstGeom prst="rect">
             <a:avLst/>
@@ -5714,8 +5714,8 @@
         </p:nvSpPr>
         <p:spPr>
           <a:xfrm>
-            <a:off x="9103080" y="2304288"/>
-            <a:ext cx="307595" cy="457200"/>
+            <a:off x="5536915" y="1921764"/>
+            <a:ext cx="3595216" cy="457200"/>
           </a:xfrm>
           <a:prstGeom prst="rect">
             <a:avLst/>
@@ -5730,13 +5730,13 @@
           <a:p>
             <a:pPr algn="l"/>
             <a:r>
-              <a:rPr sz="2600" b="0" i="0">
+              <a:rPr sz="2400" b="0" i="0">
                 <a:solidFill>
                   <a:srgbClr val="1A1A1A"/>
                 </a:solidFill>
                 <a:latin typeface="Century Schoolbook"/>
               </a:rPr>
-              <a:t>.</a:t>
+              <a:t>  size, 4 times in a row.</a:t>
             </a:r>
           </a:p>
         </p:txBody>
@@ -5749,8 +5749,196 @@
         </p:nvSpPr>
         <p:spPr>
           <a:xfrm>
-            <a:off x="777240" y="3145535"/>
-            <a:ext cx="10607040" cy="465151"/>
+            <a:off x="1234440" y="2676144"/>
+            <a:ext cx="3787102" cy="457200"/>
+          </a:xfrm>
+          <a:prstGeom prst="rect">
+            <a:avLst/>
+          </a:prstGeom>
+          <a:noFill/>
+        </p:spPr>
+        <p:txBody>
+          <a:bodyPr wrap="none" lIns="45720" rIns="45720" tIns="18288" bIns="18288" anchor="ctr">
+            <a:noAutofit/>
+          </a:bodyPr>
+          <a:lstStyle/>
+          <a:p>
+            <a:pPr algn="l"/>
+            <a:r>
+              <a:rPr sz="2400" b="0" i="0">
+                <a:solidFill>
+                  <a:srgbClr val="1A1A1A"/>
+                </a:solidFill>
+                <a:latin typeface="Century Schoolbook"/>
+              </a:rPr>
+              <a:t>To undo it, multiply by  </a:t>
+            </a:r>
+          </a:p>
+        </p:txBody>
+      </p:sp>
+      <p:pic>
+        <p:nvPicPr>
+          <p:cNvPr id="13" name="Picture 12" descr="58d50ad2ce0b236e.png"/>
+          <p:cNvPicPr>
+            <a:picLocks noChangeAspect="1"/>
+          </p:cNvPicPr>
+          <p:nvPr/>
+        </p:nvPicPr>
+        <p:blipFill>
+          <a:blip r:embed="rId3"/>
+          <a:stretch>
+            <a:fillRect/>
+          </a:stretch>
+        </p:blipFill>
+        <p:spPr>
+          <a:xfrm>
+            <a:off x="4884382" y="2627376"/>
+            <a:ext cx="795528" cy="554736"/>
+          </a:xfrm>
+          <a:prstGeom prst="rect">
+            <a:avLst/>
+          </a:prstGeom>
+        </p:spPr>
+      </p:pic>
+      <p:sp>
+        <p:nvSpPr>
+          <p:cNvPr id="14" name="TextBox 13"/>
+          <p:cNvSpPr txBox="1"/>
+          <p:nvPr/>
+        </p:nvSpPr>
+        <p:spPr>
+          <a:xfrm>
+            <a:off x="5679910" y="2676144"/>
+            <a:ext cx="4369070" cy="457200"/>
+          </a:xfrm>
+          <a:prstGeom prst="rect">
+            <a:avLst/>
+          </a:prstGeom>
+          <a:noFill/>
+        </p:spPr>
+        <p:txBody>
+          <a:bodyPr wrap="none" lIns="45720" rIns="45720" tIns="18288" bIns="18288" anchor="ctr">
+            <a:noAutofit/>
+          </a:bodyPr>
+          <a:lstStyle/>
+          <a:p>
+            <a:pPr algn="l"/>
+            <a:r>
+              <a:rPr sz="2400" b="0" i="0">
+                <a:solidFill>
+                  <a:srgbClr val="1A1A1A"/>
+                </a:solidFill>
+                <a:latin typeface="Century Schoolbook"/>
+              </a:rPr>
+              <a:t>.  The page is 6 inches wide.</a:t>
+            </a:r>
+          </a:p>
+        </p:txBody>
+      </p:sp>
+      <p:sp>
+        <p:nvSpPr>
+          <p:cNvPr id="15" name="TextBox 14"/>
+          <p:cNvSpPr txBox="1"/>
+          <p:nvPr/>
+        </p:nvSpPr>
+        <p:spPr>
+          <a:xfrm>
+            <a:off x="1234440" y="3432048"/>
+            <a:ext cx="1746873" cy="457200"/>
+          </a:xfrm>
+          <a:prstGeom prst="rect">
+            <a:avLst/>
+          </a:prstGeom>
+          <a:noFill/>
+        </p:spPr>
+        <p:txBody>
+          <a:bodyPr wrap="none" lIns="45720" rIns="45720" tIns="18288" bIns="18288" anchor="ctr">
+            <a:noAutofit/>
+          </a:bodyPr>
+          <a:lstStyle/>
+          <a:p>
+            <a:pPr algn="l"/>
+            <a:r>
+              <a:rPr sz="2400" b="1" i="0">
+                <a:solidFill>
+                  <a:srgbClr val="1A1A1A"/>
+                </a:solidFill>
+                <a:latin typeface="Century Schoolbook"/>
+              </a:rPr>
+              <a:t>Rewrite  </a:t>
+            </a:r>
+          </a:p>
+        </p:txBody>
+      </p:sp>
+      <p:pic>
+        <p:nvPicPr>
+          <p:cNvPr id="16" name="Picture 15" descr="58d50ad2ce0b236e.png"/>
+          <p:cNvPicPr>
+            <a:picLocks noChangeAspect="1"/>
+          </p:cNvPicPr>
+          <p:nvPr/>
+        </p:nvPicPr>
+        <p:blipFill>
+          <a:blip r:embed="rId3"/>
+          <a:stretch>
+            <a:fillRect/>
+          </a:stretch>
+        </p:blipFill>
+        <p:spPr>
+          <a:xfrm>
+            <a:off x="2844153" y="3383280"/>
+            <a:ext cx="795528" cy="554736"/>
+          </a:xfrm>
+          <a:prstGeom prst="rect">
+            <a:avLst/>
+          </a:prstGeom>
+        </p:spPr>
+      </p:pic>
+      <p:sp>
+        <p:nvSpPr>
+          <p:cNvPr id="17" name="TextBox 16"/>
+          <p:cNvSpPr txBox="1"/>
+          <p:nvPr/>
+        </p:nvSpPr>
+        <p:spPr>
+          <a:xfrm>
+            <a:off x="3639681" y="3432048"/>
+            <a:ext cx="4609388" cy="457200"/>
+          </a:xfrm>
+          <a:prstGeom prst="rect">
+            <a:avLst/>
+          </a:prstGeom>
+          <a:noFill/>
+        </p:spPr>
+        <p:txBody>
+          <a:bodyPr wrap="none" lIns="45720" rIns="45720" tIns="18288" bIns="18288" anchor="ctr">
+            <a:noAutofit/>
+          </a:bodyPr>
+          <a:lstStyle/>
+          <a:p>
+            <a:pPr algn="l"/>
+            <a:r>
+              <a:rPr sz="2400" b="1" i="0">
+                <a:solidFill>
+                  <a:srgbClr val="1A1A1A"/>
+                </a:solidFill>
+                <a:latin typeface="Century Schoolbook"/>
+              </a:rPr>
+              <a:t>  with a positive exponent.</a:t>
+            </a:r>
+          </a:p>
+        </p:txBody>
+      </p:sp>
+      <p:sp>
+        <p:nvSpPr>
+          <p:cNvPr id="18" name="TextBox 17"/>
+          <p:cNvSpPr txBox="1"/>
+          <p:nvPr/>
+        </p:nvSpPr>
+        <p:spPr>
+          <a:xfrm>
+            <a:off x="777240" y="4343400"/>
+            <a:ext cx="10607040" cy="457200"/>
           </a:xfrm>
           <a:prstGeom prst="rect">
             <a:avLst/>
@@ -5765,118 +5953,13 @@
           <a:p>
             <a:pPr algn="ctr"/>
             <a:r>
-              <a:rPr sz="2600" b="0" i="0">
+              <a:rPr sz="2600" b="1" i="0">
                 <a:solidFill>
                   <a:srgbClr val="1A1A1A"/>
                 </a:solidFill>
                 <a:latin typeface="Century Schoolbook"/>
               </a:rPr>
-              <a:t>The original recipe serves 6 people.</a:t>
-            </a:r>
-          </a:p>
-        </p:txBody>
-      </p:sp>
-      <p:sp>
-        <p:nvSpPr>
-          <p:cNvPr id="13" name="TextBox 12"/>
-          <p:cNvSpPr txBox="1"/>
-          <p:nvPr/>
-        </p:nvSpPr>
-        <p:spPr>
-          <a:xfrm>
-            <a:off x="777240" y="3720415"/>
-            <a:ext cx="10607040" cy="465151"/>
-          </a:xfrm>
-          <a:prstGeom prst="rect">
-            <a:avLst/>
-          </a:prstGeom>
-          <a:noFill/>
-        </p:spPr>
-        <p:txBody>
-          <a:bodyPr wrap="square" lIns="45720" rIns="45720" tIns="18288" bIns="18288" anchor="t">
-            <a:spAutoFit/>
-          </a:bodyPr>
-          <a:lstStyle/>
-          <a:p>
-            <a:pPr algn="ctr"/>
-            <a:r>
-              <a:rPr sz="2600" b="0" i="0">
-                <a:solidFill>
-                  <a:srgbClr val="1A1A1A"/>
-                </a:solidFill>
-                <a:latin typeface="Century Schoolbook"/>
-              </a:rPr>
-              <a:t>Rewrite the factor with a positive exponent.</a:t>
-            </a:r>
-          </a:p>
-        </p:txBody>
-      </p:sp>
-      <p:sp>
-        <p:nvSpPr>
-          <p:cNvPr id="14" name="TextBox 13"/>
-          <p:cNvSpPr txBox="1"/>
-          <p:nvPr/>
-        </p:nvSpPr>
-        <p:spPr>
-          <a:xfrm>
-            <a:off x="777240" y="4432454"/>
-            <a:ext cx="10607040" cy="457200"/>
-          </a:xfrm>
-          <a:prstGeom prst="rect">
-            <a:avLst/>
-          </a:prstGeom>
-          <a:noFill/>
-        </p:spPr>
-        <p:txBody>
-          <a:bodyPr wrap="square" lIns="45720" rIns="45720" tIns="18288" bIns="18288" anchor="t">
-            <a:spAutoFit/>
-          </a:bodyPr>
-          <a:lstStyle/>
-          <a:p>
-            <a:pPr algn="ctr"/>
-            <a:r>
-              <a:rPr sz="2600" b="1" i="0">
-                <a:solidFill>
-                  <a:srgbClr val="1A1A1A"/>
-                </a:solidFill>
-                <a:latin typeface="Century Schoolbook"/>
-              </a:rPr>
               <a:t>Answer it.</a:t>
-            </a:r>
-          </a:p>
-        </p:txBody>
-      </p:sp>
-      <p:sp>
-        <p:nvSpPr>
-          <p:cNvPr id="15" name="TextBox 14"/>
-          <p:cNvSpPr txBox="1"/>
-          <p:nvPr/>
-        </p:nvSpPr>
-        <p:spPr>
-          <a:xfrm>
-            <a:off x="777240" y="4917086"/>
-            <a:ext cx="10607040" cy="365760"/>
-          </a:xfrm>
-          <a:prstGeom prst="rect">
-            <a:avLst/>
-          </a:prstGeom>
-          <a:noFill/>
-        </p:spPr>
-        <p:txBody>
-          <a:bodyPr wrap="square" lIns="45720" rIns="45720" tIns="18288" bIns="18288" anchor="t">
-            <a:spAutoFit/>
-          </a:bodyPr>
-          <a:lstStyle/>
-          <a:p>
-            <a:pPr algn="ctr"/>
-            <a:r>
-              <a:rPr sz="1900" b="0" i="1">
-                <a:solidFill>
-                  <a:srgbClr val="6B6B6B"/>
-                </a:solidFill>
-                <a:latin typeface="Century Schoolbook"/>
-              </a:rPr>
-              <a:t>Rewrite with a positive exponent.</a:t>
             </a:r>
           </a:p>
         </p:txBody>
@@ -6152,8 +6235,8 @@
         </p:nvSpPr>
         <p:spPr>
           <a:xfrm>
-            <a:off x="2886479" y="2215896"/>
-            <a:ext cx="5370780" cy="457200"/>
+            <a:off x="1234440" y="1923287"/>
+            <a:ext cx="4268947" cy="457200"/>
           </a:xfrm>
           <a:prstGeom prst="rect">
             <a:avLst/>
@@ -6168,20 +6251,20 @@
           <a:p>
             <a:pPr algn="l"/>
             <a:r>
-              <a:rPr sz="2600" b="0" i="0">
+              <a:rPr sz="2400" b="0" i="0">
                 <a:solidFill>
                   <a:srgbClr val="1A1A1A"/>
                 </a:solidFill>
                 <a:latin typeface="Century Schoolbook"/>
               </a:rPr>
-              <a:t>A recipe is scaled by a factor of  </a:t>
+              <a:t>A copier shrinks a page to  </a:t>
             </a:r>
           </a:p>
         </p:txBody>
       </p:sp>
       <p:pic>
         <p:nvPicPr>
-          <p:cNvPr id="10" name="Picture 9" descr="ceb45c64c87ab3e7.png"/>
+          <p:cNvPr id="10" name="Picture 9" descr="024e90b41a6caf45.png"/>
           <p:cNvPicPr>
             <a:picLocks noChangeAspect="1"/>
           </p:cNvPicPr>
@@ -6195,8 +6278,8 @@
         </p:blipFill>
         <p:spPr>
           <a:xfrm>
-            <a:off x="8120100" y="2103120"/>
-            <a:ext cx="984504" cy="682752"/>
+            <a:off x="5366227" y="1874519"/>
+            <a:ext cx="164592" cy="554736"/>
           </a:xfrm>
           <a:prstGeom prst="rect">
             <a:avLst/>
@@ -6211,8 +6294,8 @@
         </p:nvSpPr>
         <p:spPr>
           <a:xfrm>
-            <a:off x="9104604" y="2215896"/>
-            <a:ext cx="307595" cy="457200"/>
+            <a:off x="5530819" y="1923287"/>
+            <a:ext cx="3595216" cy="457200"/>
           </a:xfrm>
           <a:prstGeom prst="rect">
             <a:avLst/>
@@ -6227,13 +6310,13 @@
           <a:p>
             <a:pPr algn="l"/>
             <a:r>
-              <a:rPr sz="2600" b="0" i="0">
+              <a:rPr sz="2400" b="0" i="0">
                 <a:solidFill>
                   <a:srgbClr val="1A1A1A"/>
                 </a:solidFill>
                 <a:latin typeface="Century Schoolbook"/>
               </a:rPr>
-              <a:t>.</a:t>
+              <a:t>  size, 4 times in a row.</a:t>
             </a:r>
           </a:p>
         </p:txBody>
@@ -6246,141 +6329,36 @@
         </p:nvSpPr>
         <p:spPr>
           <a:xfrm>
-            <a:off x="777240" y="3060191"/>
-            <a:ext cx="10607040" cy="465151"/>
-          </a:xfrm>
-          <a:prstGeom prst="rect">
-            <a:avLst/>
-          </a:prstGeom>
-          <a:noFill/>
-        </p:spPr>
-        <p:txBody>
-          <a:bodyPr wrap="square" lIns="45720" rIns="45720" tIns="18288" bIns="18288" anchor="t">
-            <a:spAutoFit/>
-          </a:bodyPr>
-          <a:lstStyle/>
-          <a:p>
-            <a:pPr algn="ctr"/>
-            <a:r>
-              <a:rPr sz="2600" b="0" i="0">
+            <a:off x="1234440" y="2680716"/>
+            <a:ext cx="3787102" cy="457200"/>
+          </a:xfrm>
+          <a:prstGeom prst="rect">
+            <a:avLst/>
+          </a:prstGeom>
+          <a:noFill/>
+        </p:spPr>
+        <p:txBody>
+          <a:bodyPr wrap="none" lIns="45720" rIns="45720" tIns="18288" bIns="18288" anchor="ctr">
+            <a:noAutofit/>
+          </a:bodyPr>
+          <a:lstStyle/>
+          <a:p>
+            <a:pPr algn="l"/>
+            <a:r>
+              <a:rPr sz="2400" b="0" i="0">
                 <a:solidFill>
                   <a:srgbClr val="1A1A1A"/>
                 </a:solidFill>
                 <a:latin typeface="Century Schoolbook"/>
               </a:rPr>
-              <a:t>The original recipe serves 6 people.</a:t>
-            </a:r>
-          </a:p>
-        </p:txBody>
-      </p:sp>
-      <p:sp>
-        <p:nvSpPr>
-          <p:cNvPr id="13" name="TextBox 12"/>
-          <p:cNvSpPr txBox="1"/>
-          <p:nvPr/>
-        </p:nvSpPr>
-        <p:spPr>
-          <a:xfrm>
-            <a:off x="777240" y="3635071"/>
-            <a:ext cx="10607040" cy="465151"/>
-          </a:xfrm>
-          <a:prstGeom prst="rect">
-            <a:avLst/>
-          </a:prstGeom>
-          <a:noFill/>
-        </p:spPr>
-        <p:txBody>
-          <a:bodyPr wrap="square" lIns="45720" rIns="45720" tIns="18288" bIns="18288" anchor="t">
-            <a:spAutoFit/>
-          </a:bodyPr>
-          <a:lstStyle/>
-          <a:p>
-            <a:pPr algn="ctr"/>
-            <a:r>
-              <a:rPr sz="2600" b="0" i="0">
-                <a:solidFill>
-                  <a:srgbClr val="1A1A1A"/>
-                </a:solidFill>
-                <a:latin typeface="Century Schoolbook"/>
-              </a:rPr>
-              <a:t>Rewrite the factor with a positive exponent.</a:t>
-            </a:r>
-          </a:p>
-        </p:txBody>
-      </p:sp>
-      <p:sp>
-        <p:nvSpPr>
-          <p:cNvPr id="14" name="TextBox 13"/>
-          <p:cNvSpPr txBox="1"/>
-          <p:nvPr/>
-        </p:nvSpPr>
-        <p:spPr>
-          <a:xfrm>
-            <a:off x="1828800" y="4255670"/>
-            <a:ext cx="8503920" cy="548640"/>
-          </a:xfrm>
-          <a:prstGeom prst="rect">
-            <a:avLst/>
-          </a:prstGeom>
-          <a:noFill/>
-        </p:spPr>
-        <p:txBody>
-          <a:bodyPr wrap="square" lIns="45720" rIns="45720" tIns="18288" bIns="18288" anchor="t">
-            <a:spAutoFit/>
-          </a:bodyPr>
-          <a:lstStyle/>
-          <a:p>
-            <a:pPr algn="ctr"/>
-            <a:r>
-              <a:rPr sz="2400" b="0" i="0">
-                <a:solidFill>
-                  <a:srgbClr val="6B6B6B"/>
-                </a:solidFill>
-                <a:latin typeface="Century Schoolbook"/>
-              </a:rPr>
-              <a:t>flip the base</a:t>
-            </a:r>
-          </a:p>
-        </p:txBody>
-      </p:sp>
-      <p:sp>
-        <p:nvSpPr>
-          <p:cNvPr id="15" name="TextBox 14"/>
-          <p:cNvSpPr txBox="1"/>
-          <p:nvPr/>
-        </p:nvSpPr>
-        <p:spPr>
-          <a:xfrm>
-            <a:off x="4629912" y="5139590"/>
-            <a:ext cx="1920240" cy="548640"/>
-          </a:xfrm>
-          <a:prstGeom prst="rect">
-            <a:avLst/>
-          </a:prstGeom>
-          <a:noFill/>
-        </p:spPr>
-        <p:txBody>
-          <a:bodyPr wrap="square" lIns="45720" rIns="45720" tIns="18288" bIns="18288" anchor="ctr">
-            <a:spAutoFit/>
-          </a:bodyPr>
-          <a:lstStyle/>
-          <a:p>
-            <a:pPr algn="l"/>
-            <a:r>
-              <a:rPr sz="3200" b="1" i="0">
-                <a:solidFill>
-                  <a:srgbClr val="9E1B32"/>
-                </a:solidFill>
-                <a:latin typeface="Century Schoolbook"/>
-              </a:rPr>
-              <a:t>Answer:</a:t>
+              <a:t>To undo it, multiply by  </a:t>
             </a:r>
           </a:p>
         </p:txBody>
       </p:sp>
       <p:pic>
         <p:nvPicPr>
-          <p:cNvPr id="16" name="Picture 15" descr="319963a3efbf8562.png"/>
+          <p:cNvPr id="13" name="Picture 12" descr="f653752a1e91a6f1.png"/>
           <p:cNvPicPr>
             <a:picLocks noChangeAspect="1"/>
           </p:cNvPicPr>
@@ -6394,7 +6372,230 @@
         </p:blipFill>
         <p:spPr>
           <a:xfrm>
-            <a:off x="6550152" y="4987190"/>
+            <a:off x="4884382" y="2630424"/>
+            <a:ext cx="798576" cy="557784"/>
+          </a:xfrm>
+          <a:prstGeom prst="rect">
+            <a:avLst/>
+          </a:prstGeom>
+        </p:spPr>
+      </p:pic>
+      <p:sp>
+        <p:nvSpPr>
+          <p:cNvPr id="14" name="TextBox 13"/>
+          <p:cNvSpPr txBox="1"/>
+          <p:nvPr/>
+        </p:nvSpPr>
+        <p:spPr>
+          <a:xfrm>
+            <a:off x="5682958" y="2680716"/>
+            <a:ext cx="4369070" cy="457200"/>
+          </a:xfrm>
+          <a:prstGeom prst="rect">
+            <a:avLst/>
+          </a:prstGeom>
+          <a:noFill/>
+        </p:spPr>
+        <p:txBody>
+          <a:bodyPr wrap="none" lIns="45720" rIns="45720" tIns="18288" bIns="18288" anchor="ctr">
+            <a:noAutofit/>
+          </a:bodyPr>
+          <a:lstStyle/>
+          <a:p>
+            <a:pPr algn="l"/>
+            <a:r>
+              <a:rPr sz="2400" b="0" i="0">
+                <a:solidFill>
+                  <a:srgbClr val="1A1A1A"/>
+                </a:solidFill>
+                <a:latin typeface="Century Schoolbook"/>
+              </a:rPr>
+              <a:t>.  The page is 6 inches wide.</a:t>
+            </a:r>
+          </a:p>
+        </p:txBody>
+      </p:sp>
+      <p:sp>
+        <p:nvSpPr>
+          <p:cNvPr id="15" name="TextBox 14"/>
+          <p:cNvSpPr txBox="1"/>
+          <p:nvPr/>
+        </p:nvSpPr>
+        <p:spPr>
+          <a:xfrm>
+            <a:off x="1234440" y="3439668"/>
+            <a:ext cx="1746873" cy="457200"/>
+          </a:xfrm>
+          <a:prstGeom prst="rect">
+            <a:avLst/>
+          </a:prstGeom>
+          <a:noFill/>
+        </p:spPr>
+        <p:txBody>
+          <a:bodyPr wrap="none" lIns="45720" rIns="45720" tIns="18288" bIns="18288" anchor="ctr">
+            <a:noAutofit/>
+          </a:bodyPr>
+          <a:lstStyle/>
+          <a:p>
+            <a:pPr algn="l"/>
+            <a:r>
+              <a:rPr sz="2400" b="1" i="0">
+                <a:solidFill>
+                  <a:srgbClr val="1A1A1A"/>
+                </a:solidFill>
+                <a:latin typeface="Century Schoolbook"/>
+              </a:rPr>
+              <a:t>Rewrite  </a:t>
+            </a:r>
+          </a:p>
+        </p:txBody>
+      </p:sp>
+      <p:pic>
+        <p:nvPicPr>
+          <p:cNvPr id="16" name="Picture 15" descr="f653752a1e91a6f1.png"/>
+          <p:cNvPicPr>
+            <a:picLocks noChangeAspect="1"/>
+          </p:cNvPicPr>
+          <p:nvPr/>
+        </p:nvPicPr>
+        <p:blipFill>
+          <a:blip r:embed="rId3"/>
+          <a:stretch>
+            <a:fillRect/>
+          </a:stretch>
+        </p:blipFill>
+        <p:spPr>
+          <a:xfrm>
+            <a:off x="2844153" y="3389376"/>
+            <a:ext cx="798576" cy="557784"/>
+          </a:xfrm>
+          <a:prstGeom prst="rect">
+            <a:avLst/>
+          </a:prstGeom>
+        </p:spPr>
+      </p:pic>
+      <p:sp>
+        <p:nvSpPr>
+          <p:cNvPr id="17" name="TextBox 16"/>
+          <p:cNvSpPr txBox="1"/>
+          <p:nvPr/>
+        </p:nvSpPr>
+        <p:spPr>
+          <a:xfrm>
+            <a:off x="3642729" y="3439668"/>
+            <a:ext cx="4609388" cy="457200"/>
+          </a:xfrm>
+          <a:prstGeom prst="rect">
+            <a:avLst/>
+          </a:prstGeom>
+          <a:noFill/>
+        </p:spPr>
+        <p:txBody>
+          <a:bodyPr wrap="none" lIns="45720" rIns="45720" tIns="18288" bIns="18288" anchor="ctr">
+            <a:noAutofit/>
+          </a:bodyPr>
+          <a:lstStyle/>
+          <a:p>
+            <a:pPr algn="l"/>
+            <a:r>
+              <a:rPr sz="2400" b="1" i="0">
+                <a:solidFill>
+                  <a:srgbClr val="1A1A1A"/>
+                </a:solidFill>
+                <a:latin typeface="Century Schoolbook"/>
+              </a:rPr>
+              <a:t>  with a positive exponent.</a:t>
+            </a:r>
+          </a:p>
+        </p:txBody>
+      </p:sp>
+      <p:sp>
+        <p:nvSpPr>
+          <p:cNvPr id="18" name="TextBox 17"/>
+          <p:cNvSpPr txBox="1"/>
+          <p:nvPr/>
+        </p:nvSpPr>
+        <p:spPr>
+          <a:xfrm>
+            <a:off x="1828800" y="4239767"/>
+            <a:ext cx="8503920" cy="548640"/>
+          </a:xfrm>
+          <a:prstGeom prst="rect">
+            <a:avLst/>
+          </a:prstGeom>
+          <a:noFill/>
+        </p:spPr>
+        <p:txBody>
+          <a:bodyPr wrap="square" lIns="45720" rIns="45720" tIns="18288" bIns="18288" anchor="t">
+            <a:spAutoFit/>
+          </a:bodyPr>
+          <a:lstStyle/>
+          <a:p>
+            <a:pPr algn="ctr"/>
+            <a:r>
+              <a:rPr sz="2400" b="0" i="0">
+                <a:solidFill>
+                  <a:srgbClr val="6B6B6B"/>
+                </a:solidFill>
+                <a:latin typeface="Century Schoolbook"/>
+              </a:rPr>
+              <a:t>flip the base</a:t>
+            </a:r>
+          </a:p>
+        </p:txBody>
+      </p:sp>
+      <p:sp>
+        <p:nvSpPr>
+          <p:cNvPr id="19" name="TextBox 18"/>
+          <p:cNvSpPr txBox="1"/>
+          <p:nvPr/>
+        </p:nvSpPr>
+        <p:spPr>
+          <a:xfrm>
+            <a:off x="4629912" y="5123688"/>
+            <a:ext cx="1920240" cy="548640"/>
+          </a:xfrm>
+          <a:prstGeom prst="rect">
+            <a:avLst/>
+          </a:prstGeom>
+          <a:noFill/>
+        </p:spPr>
+        <p:txBody>
+          <a:bodyPr wrap="square" lIns="45720" rIns="45720" tIns="18288" bIns="18288" anchor="ctr">
+            <a:spAutoFit/>
+          </a:bodyPr>
+          <a:lstStyle/>
+          <a:p>
+            <a:pPr algn="l"/>
+            <a:r>
+              <a:rPr sz="3200" b="1" i="0">
+                <a:solidFill>
+                  <a:srgbClr val="9E1B32"/>
+                </a:solidFill>
+                <a:latin typeface="Century Schoolbook"/>
+              </a:rPr>
+              <a:t>Answer:</a:t>
+            </a:r>
+          </a:p>
+        </p:txBody>
+      </p:sp>
+      <p:pic>
+        <p:nvPicPr>
+          <p:cNvPr id="20" name="Picture 19" descr="319963a3efbf8562.png"/>
+          <p:cNvPicPr>
+            <a:picLocks noChangeAspect="1"/>
+          </p:cNvPicPr>
+          <p:nvPr/>
+        </p:nvPicPr>
+        <p:blipFill>
+          <a:blip r:embed="rId4"/>
+          <a:stretch>
+            <a:fillRect/>
+          </a:stretch>
+        </p:blipFill>
+        <p:spPr>
+          <a:xfrm>
+            <a:off x="6550152" y="4971288"/>
             <a:ext cx="981455" cy="853440"/>
           </a:xfrm>
           <a:prstGeom prst="rect">

--- a/a7/build/out/u3/A7 3.05  Slides.pptx
+++ b/a7/build/out/u3/A7 3.05  Slides.pptx
@@ -5656,7 +5656,7 @@
         <p:spPr>
           <a:xfrm>
             <a:off x="1234440" y="1921764"/>
-            <a:ext cx="4268947" cy="457200"/>
+            <a:ext cx="5357739" cy="457200"/>
           </a:xfrm>
           <a:prstGeom prst="rect">
             <a:avLst/>
@@ -5677,7 +5677,7 @@
                 </a:solidFill>
                 <a:latin typeface="Century Schoolbook"/>
               </a:rPr>
-              <a:t>A copier shrinks a page to  </a:t>
+              <a:t>A copier is set to shrink a page to  </a:t>
             </a:r>
           </a:p>
         </p:txBody>
@@ -5698,7 +5698,7 @@
         </p:blipFill>
         <p:spPr>
           <a:xfrm>
-            <a:off x="5366227" y="1874519"/>
+            <a:off x="6455019" y="1874519"/>
             <a:ext cx="170688" cy="551688"/>
           </a:xfrm>
           <a:prstGeom prst="rect">
@@ -5714,8 +5714,8 @@
         </p:nvSpPr>
         <p:spPr>
           <a:xfrm>
-            <a:off x="5536915" y="1921764"/>
-            <a:ext cx="3595216" cy="457200"/>
+            <a:off x="6625707" y="1921764"/>
+            <a:ext cx="1873868" cy="457200"/>
           </a:xfrm>
           <a:prstGeom prst="rect">
             <a:avLst/>
@@ -5736,7 +5736,7 @@
                 </a:solidFill>
                 <a:latin typeface="Century Schoolbook"/>
               </a:rPr>
-              <a:t>  size, 4 times in a row.</a:t>
+              <a:t>  of its size.</a:t>
             </a:r>
           </a:p>
         </p:txBody>
@@ -5749,17 +5749,17 @@
         </p:nvSpPr>
         <p:spPr>
           <a:xfrm>
-            <a:off x="1234440" y="2676144"/>
-            <a:ext cx="3787102" cy="457200"/>
-          </a:xfrm>
-          <a:prstGeom prst="rect">
-            <a:avLst/>
-          </a:prstGeom>
-          <a:noFill/>
-        </p:spPr>
-        <p:txBody>
-          <a:bodyPr wrap="none" lIns="45720" rIns="45720" tIns="18288" bIns="18288" anchor="ctr">
-            <a:noAutofit/>
+            <a:off x="1234440" y="2627376"/>
+            <a:ext cx="10058400" cy="858740"/>
+          </a:xfrm>
+          <a:prstGeom prst="rect">
+            <a:avLst/>
+          </a:prstGeom>
+          <a:noFill/>
+        </p:spPr>
+        <p:txBody>
+          <a:bodyPr wrap="square" lIns="45720" rIns="45720" tIns="18288" bIns="18288" anchor="t">
+            <a:spAutoFit/>
           </a:bodyPr>
           <a:lstStyle/>
           <a:p>
@@ -5771,167 +5771,49 @@
                 </a:solidFill>
                 <a:latin typeface="Century Schoolbook"/>
               </a:rPr>
-              <a:t>To undo it, multiply by  </a:t>
-            </a:r>
-          </a:p>
-        </p:txBody>
-      </p:sp>
-      <p:pic>
-        <p:nvPicPr>
-          <p:cNvPr id="13" name="Picture 12" descr="58d50ad2ce0b236e.png"/>
-          <p:cNvPicPr>
-            <a:picLocks noChangeAspect="1"/>
-          </p:cNvPicPr>
-          <p:nvPr/>
-        </p:nvPicPr>
-        <p:blipFill>
-          <a:blip r:embed="rId3"/>
-          <a:stretch>
-            <a:fillRect/>
-          </a:stretch>
-        </p:blipFill>
-        <p:spPr>
-          <a:xfrm>
-            <a:off x="4884382" y="2627376"/>
-            <a:ext cx="795528" cy="554736"/>
-          </a:xfrm>
-          <a:prstGeom prst="rect">
-            <a:avLst/>
-          </a:prstGeom>
-        </p:spPr>
-      </p:pic>
+              <a:t>A page 6 inches wide is copied 4 times in a row, each copy from the last.</a:t>
+            </a:r>
+          </a:p>
+        </p:txBody>
+      </p:sp>
+      <p:sp>
+        <p:nvSpPr>
+          <p:cNvPr id="13" name="TextBox 12"/>
+          <p:cNvSpPr txBox="1"/>
+          <p:nvPr/>
+        </p:nvSpPr>
+        <p:spPr>
+          <a:xfrm>
+            <a:off x="1234440" y="3595844"/>
+            <a:ext cx="10058400" cy="429370"/>
+          </a:xfrm>
+          <a:prstGeom prst="rect">
+            <a:avLst/>
+          </a:prstGeom>
+          <a:noFill/>
+        </p:spPr>
+        <p:txBody>
+          <a:bodyPr wrap="square" lIns="45720" rIns="45720" tIns="18288" bIns="18288" anchor="t">
+            <a:spAutoFit/>
+          </a:bodyPr>
+          <a:lstStyle/>
+          <a:p>
+            <a:pPr algn="l"/>
+            <a:r>
+              <a:rPr sz="2400" b="1" i="0">
+                <a:solidFill>
+                  <a:srgbClr val="1A1A1A"/>
+                </a:solidFill>
+                <a:latin typeface="Century Schoolbook"/>
+              </a:rPr>
+              <a:t>What fraction of the original page's size is the last copy?</a:t>
+            </a:r>
+          </a:p>
+        </p:txBody>
+      </p:sp>
       <p:sp>
         <p:nvSpPr>
           <p:cNvPr id="14" name="TextBox 13"/>
-          <p:cNvSpPr txBox="1"/>
-          <p:nvPr/>
-        </p:nvSpPr>
-        <p:spPr>
-          <a:xfrm>
-            <a:off x="5679910" y="2676144"/>
-            <a:ext cx="4369070" cy="457200"/>
-          </a:xfrm>
-          <a:prstGeom prst="rect">
-            <a:avLst/>
-          </a:prstGeom>
-          <a:noFill/>
-        </p:spPr>
-        <p:txBody>
-          <a:bodyPr wrap="none" lIns="45720" rIns="45720" tIns="18288" bIns="18288" anchor="ctr">
-            <a:noAutofit/>
-          </a:bodyPr>
-          <a:lstStyle/>
-          <a:p>
-            <a:pPr algn="l"/>
-            <a:r>
-              <a:rPr sz="2400" b="0" i="0">
-                <a:solidFill>
-                  <a:srgbClr val="1A1A1A"/>
-                </a:solidFill>
-                <a:latin typeface="Century Schoolbook"/>
-              </a:rPr>
-              <a:t>.  The page is 6 inches wide.</a:t>
-            </a:r>
-          </a:p>
-        </p:txBody>
-      </p:sp>
-      <p:sp>
-        <p:nvSpPr>
-          <p:cNvPr id="15" name="TextBox 14"/>
-          <p:cNvSpPr txBox="1"/>
-          <p:nvPr/>
-        </p:nvSpPr>
-        <p:spPr>
-          <a:xfrm>
-            <a:off x="1234440" y="3432048"/>
-            <a:ext cx="1746873" cy="457200"/>
-          </a:xfrm>
-          <a:prstGeom prst="rect">
-            <a:avLst/>
-          </a:prstGeom>
-          <a:noFill/>
-        </p:spPr>
-        <p:txBody>
-          <a:bodyPr wrap="none" lIns="45720" rIns="45720" tIns="18288" bIns="18288" anchor="ctr">
-            <a:noAutofit/>
-          </a:bodyPr>
-          <a:lstStyle/>
-          <a:p>
-            <a:pPr algn="l"/>
-            <a:r>
-              <a:rPr sz="2400" b="1" i="0">
-                <a:solidFill>
-                  <a:srgbClr val="1A1A1A"/>
-                </a:solidFill>
-                <a:latin typeface="Century Schoolbook"/>
-              </a:rPr>
-              <a:t>Rewrite  </a:t>
-            </a:r>
-          </a:p>
-        </p:txBody>
-      </p:sp>
-      <p:pic>
-        <p:nvPicPr>
-          <p:cNvPr id="16" name="Picture 15" descr="58d50ad2ce0b236e.png"/>
-          <p:cNvPicPr>
-            <a:picLocks noChangeAspect="1"/>
-          </p:cNvPicPr>
-          <p:nvPr/>
-        </p:nvPicPr>
-        <p:blipFill>
-          <a:blip r:embed="rId3"/>
-          <a:stretch>
-            <a:fillRect/>
-          </a:stretch>
-        </p:blipFill>
-        <p:spPr>
-          <a:xfrm>
-            <a:off x="2844153" y="3383280"/>
-            <a:ext cx="795528" cy="554736"/>
-          </a:xfrm>
-          <a:prstGeom prst="rect">
-            <a:avLst/>
-          </a:prstGeom>
-        </p:spPr>
-      </p:pic>
-      <p:sp>
-        <p:nvSpPr>
-          <p:cNvPr id="17" name="TextBox 16"/>
-          <p:cNvSpPr txBox="1"/>
-          <p:nvPr/>
-        </p:nvSpPr>
-        <p:spPr>
-          <a:xfrm>
-            <a:off x="3639681" y="3432048"/>
-            <a:ext cx="4609388" cy="457200"/>
-          </a:xfrm>
-          <a:prstGeom prst="rect">
-            <a:avLst/>
-          </a:prstGeom>
-          <a:noFill/>
-        </p:spPr>
-        <p:txBody>
-          <a:bodyPr wrap="none" lIns="45720" rIns="45720" tIns="18288" bIns="18288" anchor="ctr">
-            <a:noAutofit/>
-          </a:bodyPr>
-          <a:lstStyle/>
-          <a:p>
-            <a:pPr algn="l"/>
-            <a:r>
-              <a:rPr sz="2400" b="1" i="0">
-                <a:solidFill>
-                  <a:srgbClr val="1A1A1A"/>
-                </a:solidFill>
-                <a:latin typeface="Century Schoolbook"/>
-              </a:rPr>
-              <a:t>  with a positive exponent.</a:t>
-            </a:r>
-          </a:p>
-        </p:txBody>
-      </p:sp>
-      <p:sp>
-        <p:nvSpPr>
-          <p:cNvPr id="18" name="TextBox 17"/>
           <p:cNvSpPr txBox="1"/>
           <p:nvPr/>
         </p:nvSpPr>
@@ -6236,7 +6118,7 @@
         <p:spPr>
           <a:xfrm>
             <a:off x="1234440" y="1923287"/>
-            <a:ext cx="4268947" cy="457200"/>
+            <a:ext cx="5357739" cy="457200"/>
           </a:xfrm>
           <a:prstGeom prst="rect">
             <a:avLst/>
@@ -6257,7 +6139,7 @@
                 </a:solidFill>
                 <a:latin typeface="Century Schoolbook"/>
               </a:rPr>
-              <a:t>A copier shrinks a page to  </a:t>
+              <a:t>A copier is set to shrink a page to  </a:t>
             </a:r>
           </a:p>
         </p:txBody>
@@ -6278,7 +6160,7 @@
         </p:blipFill>
         <p:spPr>
           <a:xfrm>
-            <a:off x="5366227" y="1874519"/>
+            <a:off x="6455019" y="1874519"/>
             <a:ext cx="164592" cy="554736"/>
           </a:xfrm>
           <a:prstGeom prst="rect">
@@ -6294,8 +6176,8 @@
         </p:nvSpPr>
         <p:spPr>
           <a:xfrm>
-            <a:off x="5530819" y="1923287"/>
-            <a:ext cx="3595216" cy="457200"/>
+            <a:off x="6619611" y="1923287"/>
+            <a:ext cx="1873868" cy="457200"/>
           </a:xfrm>
           <a:prstGeom prst="rect">
             <a:avLst/>
@@ -6316,7 +6198,7 @@
                 </a:solidFill>
                 <a:latin typeface="Century Schoolbook"/>
               </a:rPr>
-              <a:t>  size, 4 times in a row.</a:t>
+              <a:t>  of its size.</a:t>
             </a:r>
           </a:p>
         </p:txBody>
@@ -6329,17 +6211,17 @@
         </p:nvSpPr>
         <p:spPr>
           <a:xfrm>
-            <a:off x="1234440" y="2680716"/>
-            <a:ext cx="3787102" cy="457200"/>
-          </a:xfrm>
-          <a:prstGeom prst="rect">
-            <a:avLst/>
-          </a:prstGeom>
-          <a:noFill/>
-        </p:spPr>
-        <p:txBody>
-          <a:bodyPr wrap="none" lIns="45720" rIns="45720" tIns="18288" bIns="18288" anchor="ctr">
-            <a:noAutofit/>
+            <a:off x="1234440" y="2630424"/>
+            <a:ext cx="10058400" cy="858740"/>
+          </a:xfrm>
+          <a:prstGeom prst="rect">
+            <a:avLst/>
+          </a:prstGeom>
+          <a:noFill/>
+        </p:spPr>
+        <p:txBody>
+          <a:bodyPr wrap="square" lIns="45720" rIns="45720" tIns="18288" bIns="18288" anchor="t">
+            <a:spAutoFit/>
           </a:bodyPr>
           <a:lstStyle/>
           <a:p>
@@ -6351,14 +6233,164 @@
                 </a:solidFill>
                 <a:latin typeface="Century Schoolbook"/>
               </a:rPr>
-              <a:t>To undo it, multiply by  </a:t>
+              <a:t>A page 6 inches wide is copied 4 times in a row, each copy from the last.</a:t>
+            </a:r>
+          </a:p>
+        </p:txBody>
+      </p:sp>
+      <p:sp>
+        <p:nvSpPr>
+          <p:cNvPr id="13" name="TextBox 12"/>
+          <p:cNvSpPr txBox="1"/>
+          <p:nvPr/>
+        </p:nvSpPr>
+        <p:spPr>
+          <a:xfrm>
+            <a:off x="1234440" y="3598892"/>
+            <a:ext cx="10058400" cy="429370"/>
+          </a:xfrm>
+          <a:prstGeom prst="rect">
+            <a:avLst/>
+          </a:prstGeom>
+          <a:noFill/>
+        </p:spPr>
+        <p:txBody>
+          <a:bodyPr wrap="square" lIns="45720" rIns="45720" tIns="18288" bIns="18288" anchor="t">
+            <a:spAutoFit/>
+          </a:bodyPr>
+          <a:lstStyle/>
+          <a:p>
+            <a:pPr algn="l"/>
+            <a:r>
+              <a:rPr sz="2400" b="1" i="0">
+                <a:solidFill>
+                  <a:srgbClr val="1A1A1A"/>
+                </a:solidFill>
+                <a:latin typeface="Century Schoolbook"/>
+              </a:rPr>
+              <a:t>What fraction of the original page's size is the last copy?</a:t>
+            </a:r>
+          </a:p>
+        </p:txBody>
+      </p:sp>
+      <p:sp>
+        <p:nvSpPr>
+          <p:cNvPr id="14" name="TextBox 13"/>
+          <p:cNvSpPr txBox="1"/>
+          <p:nvPr/>
+        </p:nvSpPr>
+        <p:spPr>
+          <a:xfrm>
+            <a:off x="1828800" y="4229431"/>
+            <a:ext cx="8503920" cy="548640"/>
+          </a:xfrm>
+          <a:prstGeom prst="rect">
+            <a:avLst/>
+          </a:prstGeom>
+          <a:noFill/>
+        </p:spPr>
+        <p:txBody>
+          <a:bodyPr wrap="square" lIns="45720" rIns="45720" tIns="18288" bIns="18288" anchor="t">
+            <a:spAutoFit/>
+          </a:bodyPr>
+          <a:lstStyle/>
+          <a:p>
+            <a:pPr algn="ctr"/>
+            <a:r>
+              <a:rPr sz="2400" b="0" i="0">
+                <a:solidFill>
+                  <a:srgbClr val="6B6B6B"/>
+                </a:solidFill>
+                <a:latin typeface="Century Schoolbook"/>
+              </a:rPr>
+              <a:t>(2/3)</a:t>
+            </a:r>
+            <a:r>
+              <a:rPr sz="2400" b="0" i="0" baseline="30000">
+                <a:solidFill>
+                  <a:srgbClr val="6B6B6B"/>
+                </a:solidFill>
+                <a:latin typeface="Century Schoolbook"/>
+              </a:rPr>
+              <a:t>4</a:t>
+            </a:r>
+            <a:r>
+              <a:rPr sz="2400" b="0" i="0">
+                <a:solidFill>
+                  <a:srgbClr val="6B6B6B"/>
+                </a:solidFill>
+                <a:latin typeface="Century Schoolbook"/>
+              </a:rPr>
+              <a:t> = 2</a:t>
+            </a:r>
+            <a:r>
+              <a:rPr sz="2400" b="0" i="0" baseline="30000">
+                <a:solidFill>
+                  <a:srgbClr val="6B6B6B"/>
+                </a:solidFill>
+                <a:latin typeface="Century Schoolbook"/>
+              </a:rPr>
+              <a:t>4</a:t>
+            </a:r>
+            <a:r>
+              <a:rPr sz="2400" b="0" i="0">
+                <a:solidFill>
+                  <a:srgbClr val="6B6B6B"/>
+                </a:solidFill>
+                <a:latin typeface="Century Schoolbook"/>
+              </a:rPr>
+              <a:t> over 3</a:t>
+            </a:r>
+            <a:r>
+              <a:rPr sz="2400" b="0" i="0" baseline="30000">
+                <a:solidFill>
+                  <a:srgbClr val="6B6B6B"/>
+                </a:solidFill>
+                <a:latin typeface="Century Schoolbook"/>
+              </a:rPr>
+              <a:t>4</a:t>
+            </a:r>
+          </a:p>
+        </p:txBody>
+      </p:sp>
+      <p:sp>
+        <p:nvSpPr>
+          <p:cNvPr id="15" name="TextBox 14"/>
+          <p:cNvSpPr txBox="1"/>
+          <p:nvPr/>
+        </p:nvSpPr>
+        <p:spPr>
+          <a:xfrm>
+            <a:off x="4864607" y="5120971"/>
+            <a:ext cx="1920240" cy="548640"/>
+          </a:xfrm>
+          <a:prstGeom prst="rect">
+            <a:avLst/>
+          </a:prstGeom>
+          <a:noFill/>
+        </p:spPr>
+        <p:txBody>
+          <a:bodyPr wrap="square" lIns="45720" rIns="45720" tIns="18288" bIns="18288" anchor="ctr">
+            <a:spAutoFit/>
+          </a:bodyPr>
+          <a:lstStyle/>
+          <a:p>
+            <a:pPr algn="l"/>
+            <a:r>
+              <a:rPr sz="3200" b="1" i="0">
+                <a:solidFill>
+                  <a:srgbClr val="9E1B32"/>
+                </a:solidFill>
+                <a:latin typeface="Century Schoolbook"/>
+              </a:rPr>
+              <a:t>Answer:</a:t>
             </a:r>
           </a:p>
         </p:txBody>
       </p:sp>
       <p:pic>
         <p:nvPicPr>
-          <p:cNvPr id="13" name="Picture 12" descr="f653752a1e91a6f1.png"/>
+          <p:cNvPr id="16" name="Picture 15" descr="7dd35ac51a0ee44c.png"/>
           <p:cNvPicPr>
             <a:picLocks noChangeAspect="1"/>
           </p:cNvPicPr>
@@ -6372,231 +6404,8 @@
         </p:blipFill>
         <p:spPr>
           <a:xfrm>
-            <a:off x="4884382" y="2630424"/>
-            <a:ext cx="798576" cy="557784"/>
-          </a:xfrm>
-          <a:prstGeom prst="rect">
-            <a:avLst/>
-          </a:prstGeom>
-        </p:spPr>
-      </p:pic>
-      <p:sp>
-        <p:nvSpPr>
-          <p:cNvPr id="14" name="TextBox 13"/>
-          <p:cNvSpPr txBox="1"/>
-          <p:nvPr/>
-        </p:nvSpPr>
-        <p:spPr>
-          <a:xfrm>
-            <a:off x="5682958" y="2680716"/>
-            <a:ext cx="4369070" cy="457200"/>
-          </a:xfrm>
-          <a:prstGeom prst="rect">
-            <a:avLst/>
-          </a:prstGeom>
-          <a:noFill/>
-        </p:spPr>
-        <p:txBody>
-          <a:bodyPr wrap="none" lIns="45720" rIns="45720" tIns="18288" bIns="18288" anchor="ctr">
-            <a:noAutofit/>
-          </a:bodyPr>
-          <a:lstStyle/>
-          <a:p>
-            <a:pPr algn="l"/>
-            <a:r>
-              <a:rPr sz="2400" b="0" i="0">
-                <a:solidFill>
-                  <a:srgbClr val="1A1A1A"/>
-                </a:solidFill>
-                <a:latin typeface="Century Schoolbook"/>
-              </a:rPr>
-              <a:t>.  The page is 6 inches wide.</a:t>
-            </a:r>
-          </a:p>
-        </p:txBody>
-      </p:sp>
-      <p:sp>
-        <p:nvSpPr>
-          <p:cNvPr id="15" name="TextBox 14"/>
-          <p:cNvSpPr txBox="1"/>
-          <p:nvPr/>
-        </p:nvSpPr>
-        <p:spPr>
-          <a:xfrm>
-            <a:off x="1234440" y="3439668"/>
-            <a:ext cx="1746873" cy="457200"/>
-          </a:xfrm>
-          <a:prstGeom prst="rect">
-            <a:avLst/>
-          </a:prstGeom>
-          <a:noFill/>
-        </p:spPr>
-        <p:txBody>
-          <a:bodyPr wrap="none" lIns="45720" rIns="45720" tIns="18288" bIns="18288" anchor="ctr">
-            <a:noAutofit/>
-          </a:bodyPr>
-          <a:lstStyle/>
-          <a:p>
-            <a:pPr algn="l"/>
-            <a:r>
-              <a:rPr sz="2400" b="1" i="0">
-                <a:solidFill>
-                  <a:srgbClr val="1A1A1A"/>
-                </a:solidFill>
-                <a:latin typeface="Century Schoolbook"/>
-              </a:rPr>
-              <a:t>Rewrite  </a:t>
-            </a:r>
-          </a:p>
-        </p:txBody>
-      </p:sp>
-      <p:pic>
-        <p:nvPicPr>
-          <p:cNvPr id="16" name="Picture 15" descr="f653752a1e91a6f1.png"/>
-          <p:cNvPicPr>
-            <a:picLocks noChangeAspect="1"/>
-          </p:cNvPicPr>
-          <p:nvPr/>
-        </p:nvPicPr>
-        <p:blipFill>
-          <a:blip r:embed="rId3"/>
-          <a:stretch>
-            <a:fillRect/>
-          </a:stretch>
-        </p:blipFill>
-        <p:spPr>
-          <a:xfrm>
-            <a:off x="2844153" y="3389376"/>
-            <a:ext cx="798576" cy="557784"/>
-          </a:xfrm>
-          <a:prstGeom prst="rect">
-            <a:avLst/>
-          </a:prstGeom>
-        </p:spPr>
-      </p:pic>
-      <p:sp>
-        <p:nvSpPr>
-          <p:cNvPr id="17" name="TextBox 16"/>
-          <p:cNvSpPr txBox="1"/>
-          <p:nvPr/>
-        </p:nvSpPr>
-        <p:spPr>
-          <a:xfrm>
-            <a:off x="3642729" y="3439668"/>
-            <a:ext cx="4609388" cy="457200"/>
-          </a:xfrm>
-          <a:prstGeom prst="rect">
-            <a:avLst/>
-          </a:prstGeom>
-          <a:noFill/>
-        </p:spPr>
-        <p:txBody>
-          <a:bodyPr wrap="none" lIns="45720" rIns="45720" tIns="18288" bIns="18288" anchor="ctr">
-            <a:noAutofit/>
-          </a:bodyPr>
-          <a:lstStyle/>
-          <a:p>
-            <a:pPr algn="l"/>
-            <a:r>
-              <a:rPr sz="2400" b="1" i="0">
-                <a:solidFill>
-                  <a:srgbClr val="1A1A1A"/>
-                </a:solidFill>
-                <a:latin typeface="Century Schoolbook"/>
-              </a:rPr>
-              <a:t>  with a positive exponent.</a:t>
-            </a:r>
-          </a:p>
-        </p:txBody>
-      </p:sp>
-      <p:sp>
-        <p:nvSpPr>
-          <p:cNvPr id="18" name="TextBox 17"/>
-          <p:cNvSpPr txBox="1"/>
-          <p:nvPr/>
-        </p:nvSpPr>
-        <p:spPr>
-          <a:xfrm>
-            <a:off x="1828800" y="4239767"/>
-            <a:ext cx="8503920" cy="548640"/>
-          </a:xfrm>
-          <a:prstGeom prst="rect">
-            <a:avLst/>
-          </a:prstGeom>
-          <a:noFill/>
-        </p:spPr>
-        <p:txBody>
-          <a:bodyPr wrap="square" lIns="45720" rIns="45720" tIns="18288" bIns="18288" anchor="t">
-            <a:spAutoFit/>
-          </a:bodyPr>
-          <a:lstStyle/>
-          <a:p>
-            <a:pPr algn="ctr"/>
-            <a:r>
-              <a:rPr sz="2400" b="0" i="0">
-                <a:solidFill>
-                  <a:srgbClr val="6B6B6B"/>
-                </a:solidFill>
-                <a:latin typeface="Century Schoolbook"/>
-              </a:rPr>
-              <a:t>flip the base</a:t>
-            </a:r>
-          </a:p>
-        </p:txBody>
-      </p:sp>
-      <p:sp>
-        <p:nvSpPr>
-          <p:cNvPr id="19" name="TextBox 18"/>
-          <p:cNvSpPr txBox="1"/>
-          <p:nvPr/>
-        </p:nvSpPr>
-        <p:spPr>
-          <a:xfrm>
-            <a:off x="4629912" y="5123688"/>
-            <a:ext cx="1920240" cy="548640"/>
-          </a:xfrm>
-          <a:prstGeom prst="rect">
-            <a:avLst/>
-          </a:prstGeom>
-          <a:noFill/>
-        </p:spPr>
-        <p:txBody>
-          <a:bodyPr wrap="square" lIns="45720" rIns="45720" tIns="18288" bIns="18288" anchor="ctr">
-            <a:spAutoFit/>
-          </a:bodyPr>
-          <a:lstStyle/>
-          <a:p>
-            <a:pPr algn="l"/>
-            <a:r>
-              <a:rPr sz="3200" b="1" i="0">
-                <a:solidFill>
-                  <a:srgbClr val="9E1B32"/>
-                </a:solidFill>
-                <a:latin typeface="Century Schoolbook"/>
-              </a:rPr>
-              <a:t>Answer:</a:t>
-            </a:r>
-          </a:p>
-        </p:txBody>
-      </p:sp>
-      <p:pic>
-        <p:nvPicPr>
-          <p:cNvPr id="20" name="Picture 19" descr="319963a3efbf8562.png"/>
-          <p:cNvPicPr>
-            <a:picLocks noChangeAspect="1"/>
-          </p:cNvPicPr>
-          <p:nvPr/>
-        </p:nvPicPr>
-        <p:blipFill>
-          <a:blip r:embed="rId4"/>
-          <a:stretch>
-            <a:fillRect/>
-          </a:stretch>
-        </p:blipFill>
-        <p:spPr>
-          <a:xfrm>
-            <a:off x="6550152" y="4971288"/>
-            <a:ext cx="981455" cy="853440"/>
+            <a:off x="6784848" y="4960951"/>
+            <a:ext cx="512064" cy="868680"/>
           </a:xfrm>
           <a:prstGeom prst="rect">
             <a:avLst/>
